--- a/documents/apresentacao_executiva_cdload.pptx
+++ b/documents/apresentacao_executiva_cdload.pptx
@@ -4,22 +4,21 @@
   <p:sldMasterIdLst>
     <p:sldMasterId id="2147483648" r:id="rId1"/>
   </p:sldMasterIdLst>
+  <p:notesMasterIdLst>
+    <p:notesMasterId r:id="rId11"/>
+  </p:notesMasterIdLst>
   <p:sldIdLst>
     <p:sldId id="256" r:id="rId2"/>
     <p:sldId id="257" r:id="rId3"/>
     <p:sldId id="258" r:id="rId4"/>
-    <p:sldId id="259" r:id="rId5"/>
-    <p:sldId id="260" r:id="rId6"/>
-    <p:sldId id="261" r:id="rId7"/>
-    <p:sldId id="262" r:id="rId8"/>
-    <p:sldId id="263" r:id="rId9"/>
+    <p:sldId id="262" r:id="rId5"/>
+    <p:sldId id="263" r:id="rId6"/>
+    <p:sldId id="259" r:id="rId7"/>
+    <p:sldId id="260" r:id="rId8"/>
+    <p:sldId id="261" r:id="rId9"/>
     <p:sldId id="264" r:id="rId10"/>
-    <p:sldId id="265" r:id="rId11"/>
   </p:sldIdLst>
-  <p:notesMasterIdLst>
-    <p:notesMasterId r:id="rId12"/>
-  </p:notesMasterIdLst>
-  <p:sldSz cx="9144000" cy="5143500"/>
+  <p:sldSz cx="9144000" cy="5143500" type="screen16x9"/>
   <p:notesSz cx="5143500" cy="9144000"/>
   <p:defaultTextStyle>
     <a:lvl1pPr marL="0" algn="l" defTabSz="914400" rtl="0" eaLnBrk="1" latinLnBrk="0" hangingPunct="1">
@@ -116,39 +115,37 @@
   <p:extLst>
     <p:ext uri="{521415D9-36F7-43E2-AB2F-B90AF26B5E84}">
       <p14:sectionLst xmlns:p14="http://schemas.microsoft.com/office/powerpoint/2010/main">
-        <p14:section name="Abertura" id="{e1e26ebb-6afe-f1d2-e417-618acb767d1d}">
+        <p14:section name="Abertura" id="{E1E26EBB-6AFE-F1D2-E417-618ACB767D1D}">
           <p14:sldIdLst>
             <p14:sldId id="256"/>
           </p14:sldIdLst>
         </p14:section>
-        <p14:section name="Problema" id="{18afad96-6e1e-0704-801b-4967ee98bdc7}">
+        <p14:section name="Problema" id="{18AFAD96-6E1E-0704-801B-4967EE98BDC7}">
           <p14:sldIdLst>
             <p14:sldId id="257"/>
+            <p14:sldId id="258"/>
+            <p14:sldId id="262"/>
+            <p14:sldId id="263"/>
           </p14:sldIdLst>
         </p14:section>
-        <p14:section name="Solução" id="{475b3e10-4b53-e397-777b-524912e125c2}">
+        <p14:section name="Solução" id="{475B3E10-4B53-E397-777B-524912E125C2}">
           <p14:sldIdLst>
-            <p14:sldId id="258"/>
             <p14:sldId id="259"/>
             <p14:sldId id="260"/>
           </p14:sldIdLst>
         </p14:section>
-        <p14:section name="Impacto" id="{5542d5a5-06fa-b0cd-c669-5858c33f7a29}">
+        <p14:section name="Impacto" id="{5542D5A5-06FA-B0CD-C669-5858C33F7A29}">
           <p14:sldIdLst>
             <p14:sldId id="261"/>
-            <p14:sldId id="262"/>
           </p14:sldIdLst>
         </p14:section>
-        <p14:section name="Execução" id="{7e930bae-a4f5-679b-3d39-f8eb249aeada}">
+        <p14:section name="Execução" id="{7E930BAE-A4F5-679B-3D39-F8EB249AEADA}">
           <p14:sldIdLst>
-            <p14:sldId id="263"/>
             <p14:sldId id="264"/>
           </p14:sldIdLst>
         </p14:section>
-        <p14:section name="Decisão" id="{6ca98b7a-9c6a-5861-9898-b0a6d4e55e8e}">
-          <p14:sldIdLst>
-            <p14:sldId id="265"/>
-          </p14:sldIdLst>
+        <p14:section name="Decisão" id="{6CA98B7A-9C6A-5861-9898-B0A6D4E55E8E}">
+          <p14:sldIdLst/>
         </p14:section>
       </p14:sectionLst>
     </p:ext>
@@ -159,10 +156,142 @@
 </p:presentation>
 </file>
 
+<file path=ppt/changesInfos/changesInfo1.xml><?xml version="1.0" encoding="utf-8"?>
+<pc:chgInfo xmlns:a="http://schemas.openxmlformats.org/drawingml/2006/main" xmlns:r="http://schemas.openxmlformats.org/officeDocument/2006/relationships" xmlns:ac="http://schemas.microsoft.com/office/drawing/2013/main/command" xmlns:pc="http://schemas.microsoft.com/office/powerpoint/2013/main/command">
+  <pc:docChgLst>
+    <pc:chgData name="Matheus Costa" userId="4d403cac-cd4b-4803-9876-75d8fc4094cf" providerId="ADAL" clId="{53D3D0DF-9404-4CC5-8C41-DC88853B8FB5}"/>
+    <pc:docChg chg="undo custSel delSld modSld sldOrd modSection">
+      <pc:chgData name="Matheus Costa" userId="4d403cac-cd4b-4803-9876-75d8fc4094cf" providerId="ADAL" clId="{53D3D0DF-9404-4CC5-8C41-DC88853B8FB5}" dt="2026-10-14T12:20:04.808" v="320" actId="20577"/>
+      <pc:docMkLst>
+        <pc:docMk/>
+      </pc:docMkLst>
+      <pc:sldChg chg="ord">
+        <pc:chgData name="Matheus Costa" userId="4d403cac-cd4b-4803-9876-75d8fc4094cf" providerId="ADAL" clId="{53D3D0DF-9404-4CC5-8C41-DC88853B8FB5}" dt="2026-10-14T12:11:26.915" v="3"/>
+        <pc:sldMkLst>
+          <pc:docMk/>
+          <pc:sldMk cId="0" sldId="258"/>
+        </pc:sldMkLst>
+      </pc:sldChg>
+      <pc:sldChg chg="ord">
+        <pc:chgData name="Matheus Costa" userId="4d403cac-cd4b-4803-9876-75d8fc4094cf" providerId="ADAL" clId="{53D3D0DF-9404-4CC5-8C41-DC88853B8FB5}" dt="2026-10-14T12:11:28.435" v="5"/>
+        <pc:sldMkLst>
+          <pc:docMk/>
+          <pc:sldMk cId="0" sldId="262"/>
+        </pc:sldMkLst>
+      </pc:sldChg>
+      <pc:sldChg chg="addSp delSp modSp mod ord">
+        <pc:chgData name="Matheus Costa" userId="4d403cac-cd4b-4803-9876-75d8fc4094cf" providerId="ADAL" clId="{53D3D0DF-9404-4CC5-8C41-DC88853B8FB5}" dt="2026-10-14T12:20:04.808" v="320" actId="20577"/>
+        <pc:sldMkLst>
+          <pc:docMk/>
+          <pc:sldMk cId="0" sldId="263"/>
+        </pc:sldMkLst>
+        <pc:spChg chg="mod">
+          <ac:chgData name="Matheus Costa" userId="4d403cac-cd4b-4803-9876-75d8fc4094cf" providerId="ADAL" clId="{53D3D0DF-9404-4CC5-8C41-DC88853B8FB5}" dt="2026-10-14T12:20:04.808" v="320" actId="20577"/>
+          <ac:spMkLst>
+            <pc:docMk/>
+            <pc:sldMk cId="0" sldId="263"/>
+            <ac:spMk id="10" creationId="{00000000-0000-0000-0000-000000000000}"/>
+          </ac:spMkLst>
+        </pc:spChg>
+        <pc:spChg chg="mod">
+          <ac:chgData name="Matheus Costa" userId="4d403cac-cd4b-4803-9876-75d8fc4094cf" providerId="ADAL" clId="{53D3D0DF-9404-4CC5-8C41-DC88853B8FB5}" dt="2026-10-14T12:18:33.026" v="256" actId="20577"/>
+          <ac:spMkLst>
+            <pc:docMk/>
+            <pc:sldMk cId="0" sldId="263"/>
+            <ac:spMk id="12" creationId="{00000000-0000-0000-0000-000000000000}"/>
+          </ac:spMkLst>
+        </pc:spChg>
+        <pc:spChg chg="del">
+          <ac:chgData name="Matheus Costa" userId="4d403cac-cd4b-4803-9876-75d8fc4094cf" providerId="ADAL" clId="{53D3D0DF-9404-4CC5-8C41-DC88853B8FB5}" dt="2026-10-14T12:17:21.560" v="234" actId="478"/>
+          <ac:spMkLst>
+            <pc:docMk/>
+            <pc:sldMk cId="0" sldId="263"/>
+            <ac:spMk id="15" creationId="{00000000-0000-0000-0000-000000000000}"/>
+          </ac:spMkLst>
+        </pc:spChg>
+        <pc:spChg chg="del">
+          <ac:chgData name="Matheus Costa" userId="4d403cac-cd4b-4803-9876-75d8fc4094cf" providerId="ADAL" clId="{53D3D0DF-9404-4CC5-8C41-DC88853B8FB5}" dt="2026-10-14T12:17:19.085" v="233" actId="478"/>
+          <ac:spMkLst>
+            <pc:docMk/>
+            <pc:sldMk cId="0" sldId="263"/>
+            <ac:spMk id="16" creationId="{00000000-0000-0000-0000-000000000000}"/>
+          </ac:spMkLst>
+        </pc:spChg>
+        <pc:spChg chg="mod">
+          <ac:chgData name="Matheus Costa" userId="4d403cac-cd4b-4803-9876-75d8fc4094cf" providerId="ADAL" clId="{53D3D0DF-9404-4CC5-8C41-DC88853B8FB5}" dt="2026-10-14T12:16:53.614" v="232" actId="20577"/>
+          <ac:spMkLst>
+            <pc:docMk/>
+            <pc:sldMk cId="0" sldId="263"/>
+            <ac:spMk id="17" creationId="{00000000-0000-0000-0000-000000000000}"/>
+          </ac:spMkLst>
+        </pc:spChg>
+        <pc:spChg chg="mod">
+          <ac:chgData name="Matheus Costa" userId="4d403cac-cd4b-4803-9876-75d8fc4094cf" providerId="ADAL" clId="{53D3D0DF-9404-4CC5-8C41-DC88853B8FB5}" dt="2026-10-14T12:18:39.541" v="265" actId="20577"/>
+          <ac:spMkLst>
+            <pc:docMk/>
+            <pc:sldMk cId="0" sldId="263"/>
+            <ac:spMk id="19" creationId="{00000000-0000-0000-0000-000000000000}"/>
+          </ac:spMkLst>
+        </pc:spChg>
+        <pc:spChg chg="mod">
+          <ac:chgData name="Matheus Costa" userId="4d403cac-cd4b-4803-9876-75d8fc4094cf" providerId="ADAL" clId="{53D3D0DF-9404-4CC5-8C41-DC88853B8FB5}" dt="2026-10-14T12:18:52.377" v="270" actId="6549"/>
+          <ac:spMkLst>
+            <pc:docMk/>
+            <pc:sldMk cId="0" sldId="263"/>
+            <ac:spMk id="24" creationId="{00000000-0000-0000-0000-000000000000}"/>
+          </ac:spMkLst>
+        </pc:spChg>
+        <pc:spChg chg="mod">
+          <ac:chgData name="Matheus Costa" userId="4d403cac-cd4b-4803-9876-75d8fc4094cf" providerId="ADAL" clId="{53D3D0DF-9404-4CC5-8C41-DC88853B8FB5}" dt="2026-10-14T12:14:57.012" v="120" actId="20577"/>
+          <ac:spMkLst>
+            <pc:docMk/>
+            <pc:sldMk cId="0" sldId="263"/>
+            <ac:spMk id="31" creationId="{00000000-0000-0000-0000-000000000000}"/>
+          </ac:spMkLst>
+        </pc:spChg>
+        <pc:spChg chg="add del">
+          <ac:chgData name="Matheus Costa" userId="4d403cac-cd4b-4803-9876-75d8fc4094cf" providerId="ADAL" clId="{53D3D0DF-9404-4CC5-8C41-DC88853B8FB5}" dt="2026-10-14T12:17:22.909" v="236" actId="22"/>
+          <ac:spMkLst>
+            <pc:docMk/>
+            <pc:sldMk cId="0" sldId="263"/>
+            <ac:spMk id="34" creationId="{A7A0DAA5-2B2F-96EA-DBCE-0970712341A4}"/>
+          </ac:spMkLst>
+        </pc:spChg>
+        <pc:spChg chg="add mod">
+          <ac:chgData name="Matheus Costa" userId="4d403cac-cd4b-4803-9876-75d8fc4094cf" providerId="ADAL" clId="{53D3D0DF-9404-4CC5-8C41-DC88853B8FB5}" dt="2026-10-14T12:17:29.050" v="238" actId="1076"/>
+          <ac:spMkLst>
+            <pc:docMk/>
+            <pc:sldMk cId="0" sldId="263"/>
+            <ac:spMk id="36" creationId="{4A660CD6-A274-6ABE-D8EB-01E0A85C66C8}"/>
+          </ac:spMkLst>
+        </pc:spChg>
+        <pc:spChg chg="add mod">
+          <ac:chgData name="Matheus Costa" userId="4d403cac-cd4b-4803-9876-75d8fc4094cf" providerId="ADAL" clId="{53D3D0DF-9404-4CC5-8C41-DC88853B8FB5}" dt="2026-10-14T12:17:29.050" v="238" actId="1076"/>
+          <ac:spMkLst>
+            <pc:docMk/>
+            <pc:sldMk cId="0" sldId="263"/>
+            <ac:spMk id="38" creationId="{6B2A0DC4-8E60-99F7-5E41-01FB04EB09EA}"/>
+          </ac:spMkLst>
+        </pc:spChg>
+      </pc:sldChg>
+      <pc:sldChg chg="del ord">
+        <pc:chgData name="Matheus Costa" userId="4d403cac-cd4b-4803-9876-75d8fc4094cf" providerId="ADAL" clId="{53D3D0DF-9404-4CC5-8C41-DC88853B8FB5}" dt="2026-10-14T12:15:04.560" v="121" actId="47"/>
+        <pc:sldMkLst>
+          <pc:docMk/>
+          <pc:sldMk cId="0" sldId="265"/>
+        </pc:sldMkLst>
+      </pc:sldChg>
+    </pc:docChg>
+  </pc:docChgLst>
+</pc:chgInfo>
+</file>
+
 <file path=ppt/charts/chart1.xml><?xml version="1.0" encoding="utf-8"?>
-<c:chartSpace xmlns:c="http://schemas.openxmlformats.org/drawingml/2006/chart" xmlns:a="http://schemas.openxmlformats.org/drawingml/2006/main" xmlns:r="http://schemas.openxmlformats.org/officeDocument/2006/relationships">
+<c:chartSpace xmlns:c="http://schemas.openxmlformats.org/drawingml/2006/chart" xmlns:a="http://schemas.openxmlformats.org/drawingml/2006/main" xmlns:r="http://schemas.openxmlformats.org/officeDocument/2006/relationships" xmlns:c16r2="http://schemas.microsoft.com/office/drawing/2015/06/chart">
   <c:date1904 val="0"/>
+  <c:lang val="pt-BR"/>
   <c:roundedCorners val="1"/>
+  <c:style val="2"/>
   <c:chart>
     <c:title>
       <c:tx>
@@ -179,7 +308,7 @@
               </a:defRPr>
             </a:pPr>
             <a:r>
-              <a:rPr sz="1300" b="0" i="0" u="none" strike="noStrike">
+              <a:rPr lang="pt-BR" sz="1300" b="0" i="0" u="none" strike="noStrike">
                 <a:solidFill>
                   <a:srgbClr val="0B2447"/>
                 </a:solidFill>
@@ -190,7 +319,6 @@
           </a:p>
         </c:rich>
       </c:tx>
-      <c:layout/>
       <c:overlay val="0"/>
     </c:title>
     <c:autoTitleDeleted val="0"/>
@@ -223,18 +351,26 @@
           <c:invertIfNegative val="0"/>
           <c:dLbls>
             <c:numFmt formatCode="#,##0.0" sourceLinked="0"/>
+            <c:spPr>
+              <a:noFill/>
+              <a:ln>
+                <a:noFill/>
+              </a:ln>
+              <a:effectLst/>
+            </c:spPr>
             <c:txPr>
               <a:bodyPr/>
               <a:lstStyle/>
               <a:p>
                 <a:pPr>
-                  <a:defRPr b="0" i="0" strike="noStrike" sz="1100" u="none">
+                  <a:defRPr sz="1100" b="0" i="0" u="none" strike="noStrike">
                     <a:solidFill>
                       <a:srgbClr val="0F1E3D"/>
                     </a:solidFill>
                     <a:latin typeface="+mn-lt"/>
                   </a:defRPr>
                 </a:pPr>
+                <a:endParaRPr lang="pt-BR"/>
               </a:p>
             </c:txPr>
             <c:showLegendKey val="0"/>
@@ -244,31 +380,34 @@
             <c:showPercent val="0"/>
             <c:showBubbleSize val="0"/>
             <c:showLeaderLines val="0"/>
+            <c:extLst>
+              <c:ext xmlns:c15="http://schemas.microsoft.com/office/drawing/2012/chart" uri="{CE6537A1-D6FC-4f65-9D91-7224C49458BB}">
+                <c15:showLeaderLines val="0"/>
+              </c:ext>
+            </c:extLst>
           </c:dLbls>
           <c:cat>
-            <c:multiLvlStrRef>
+            <c:strRef>
               <c:f>Sheet1!$A$2:$A$6</c:f>
-              <c:multiLvlStrCache>
+              <c:strCache>
                 <c:ptCount val="5"/>
-                <c:lvl>
-                  <c:pt idx="0">
-                    <c:v>Relatórios</c:v>
-                  </c:pt>
-                  <c:pt idx="1">
-                    <c:v>Clipping</c:v>
-                  </c:pt>
-                  <c:pt idx="2">
-                    <c:v>Dashboard</c:v>
-                  </c:pt>
-                  <c:pt idx="3">
-                    <c:v>Home</c:v>
-                  </c:pt>
-                  <c:pt idx="4">
-                    <c:v>Usuários</c:v>
-                  </c:pt>
-                </c:lvl>
-              </c:multiLvlStrCache>
-            </c:multiLvlStrRef>
+                <c:pt idx="0">
+                  <c:v>Relatórios</c:v>
+                </c:pt>
+                <c:pt idx="1">
+                  <c:v>Clipping</c:v>
+                </c:pt>
+                <c:pt idx="2">
+                  <c:v>Dashboard</c:v>
+                </c:pt>
+                <c:pt idx="3">
+                  <c:v>Home</c:v>
+                </c:pt>
+                <c:pt idx="4">
+                  <c:v>Usuários</c:v>
+                </c:pt>
+              </c:strCache>
+            </c:strRef>
           </c:cat>
           <c:val>
             <c:numRef>
@@ -286,7 +425,7 @@
                   <c:v>5</c:v>
                 </c:pt>
                 <c:pt idx="3">
-                  <c:v>4.4</c:v>
+                  <c:v>4.4000000000000004</c:v>
                 </c:pt>
                 <c:pt idx="4">
                   <c:v>1</c:v>
@@ -294,36 +433,23 @@
               </c:numCache>
             </c:numRef>
           </c:val>
+          <c:extLst>
+            <c:ext xmlns:c16="http://schemas.microsoft.com/office/drawing/2014/chart" uri="{C3380CC4-5D6E-409C-BE32-E72D297353CC}">
+              <c16:uniqueId val="{00000000-28BE-4F24-9C3E-4C380F808D10}"/>
+            </c:ext>
+          </c:extLst>
         </c:ser>
         <c:dLbls>
-          <c:numFmt formatCode="#,##0.0" sourceLinked="0"/>
-          <c:txPr>
-            <a:bodyPr/>
-            <a:lstStyle/>
-            <a:p>
-              <a:pPr>
-                <a:defRPr b="0" i="0" strike="noStrike" sz="1100" u="none">
-                  <a:solidFill>
-                    <a:srgbClr val="0F1E3D"/>
-                  </a:solidFill>
-                  <a:latin typeface="+mn-lt"/>
-                </a:defRPr>
-              </a:pPr>
-            </a:p>
-          </c:txPr>
           <c:showLegendKey val="0"/>
           <c:showVal val="1"/>
           <c:showCatName val="0"/>
           <c:showSerName val="0"/>
           <c:showPercent val="0"/>
           <c:showBubbleSize val="0"/>
-          <c:showLeaderLines val="0"/>
         </c:dLbls>
         <c:gapWidth val="60"/>
-        <c:overlap val="0"/>
         <c:axId val="2094734554"/>
         <c:axId val="2094734552"/>
-        <c:axId val="2094734556"/>
       </c:barChart>
       <c:catAx>
         <c:axId val="2094734554"/>
@@ -364,6 +490,7 @@
         <c:crosses val="autoZero"/>
         <c:auto val="1"/>
         <c:lblAlgn val="ctr"/>
+        <c:lblOffset val="100"/>
         <c:noMultiLvlLbl val="1"/>
       </c:catAx>
       <c:valAx>
@@ -372,35 +499,11 @@
           <c:orientation val="minMax"/>
         </c:scaling>
         <c:delete val="1"/>
-        <c:axPos val="b"/>
+        <c:axPos val="t"/>
         <c:numFmt formatCode="General" sourceLinked="0"/>
         <c:majorTickMark val="out"/>
         <c:minorTickMark val="none"/>
         <c:tickLblPos val="low"/>
-        <c:spPr>
-          <a:ln w="12700" cap="flat">
-            <a:solidFill>
-              <a:srgbClr val="888888"/>
-            </a:solidFill>
-            <a:prstDash val="solid"/>
-            <a:round/>
-          </a:ln>
-        </c:spPr>
-        <c:txPr>
-          <a:bodyPr/>
-          <a:lstStyle/>
-          <a:p>
-            <a:pPr>
-              <a:defRPr sz="1200" b="0" i="0" u="none" strike="noStrike">
-                <a:solidFill>
-                  <a:srgbClr val="000000"/>
-                </a:solidFill>
-                <a:latin typeface="Arial"/>
-              </a:defRPr>
-            </a:pPr>
-            <a:endParaRPr lang="en-US"/>
-          </a:p>
-        </c:txPr>
         <c:crossAx val="2094734554"/>
         <c:crosses val="autoZero"/>
         <c:crossBetween val="between"/>
@@ -415,6 +518,7 @@
     </c:plotArea>
     <c:plotVisOnly val="1"/>
     <c:dispBlanksAs val="span"/>
+    <c:showDLblsOverMax val="1"/>
   </c:chart>
   <c:spPr>
     <a:noFill/>
@@ -430,9 +534,11 @@
 </file>
 
 <file path=ppt/charts/chart2.xml><?xml version="1.0" encoding="utf-8"?>
-<c:chartSpace xmlns:c="http://schemas.openxmlformats.org/drawingml/2006/chart" xmlns:a="http://schemas.openxmlformats.org/drawingml/2006/main" xmlns:r="http://schemas.openxmlformats.org/officeDocument/2006/relationships">
+<c:chartSpace xmlns:c="http://schemas.openxmlformats.org/drawingml/2006/chart" xmlns:a="http://schemas.openxmlformats.org/drawingml/2006/main" xmlns:r="http://schemas.openxmlformats.org/officeDocument/2006/relationships" xmlns:c16r2="http://schemas.microsoft.com/office/drawing/2015/06/chart">
   <c:date1904 val="0"/>
+  <c:lang val="pt-BR"/>
   <c:roundedCorners val="1"/>
+  <c:style val="2"/>
   <c:chart>
     <c:title>
       <c:tx>
@@ -449,7 +555,7 @@
               </a:defRPr>
             </a:pPr>
             <a:r>
-              <a:rPr sz="1300" b="0" i="0" u="none" strike="noStrike">
+              <a:rPr lang="pt-BR" sz="1300" b="0" i="0" u="none" strike="noStrike">
                 <a:solidFill>
                   <a:srgbClr val="0B2447"/>
                 </a:solidFill>
@@ -460,7 +566,6 @@
           </a:p>
         </c:rich>
       </c:tx>
-      <c:layout/>
       <c:overlay val="0"/>
     </c:title>
     <c:autoTitleDeleted val="0"/>
@@ -491,54 +596,28 @@
             <a:effectLst/>
           </c:spPr>
           <c:invertIfNegative val="0"/>
-          <c:dLbls>
-            <c:numFmt formatCode="#,##0" sourceLinked="0"/>
-            <c:txPr>
-              <a:bodyPr/>
-              <a:lstStyle/>
-              <a:p>
-                <a:pPr>
-                  <a:defRPr b="0" i="0" strike="noStrike" sz="1200" u="none">
-                    <a:solidFill>
-                      <a:srgbClr val="000000"/>
-                    </a:solidFill>
-                    <a:latin typeface="Arial"/>
-                  </a:defRPr>
-                </a:pPr>
-              </a:p>
-            </c:txPr>
-            <c:showLegendKey val="0"/>
-            <c:showVal val="0"/>
-            <c:showCatName val="0"/>
-            <c:showSerName val="0"/>
-            <c:showPercent val="0"/>
-            <c:showBubbleSize val="0"/>
-            <c:showLeaderLines val="0"/>
-          </c:dLbls>
           <c:cat>
-            <c:multiLvlStrRef>
+            <c:strRef>
               <c:f>Sheet1!$A$2:$A$6</c:f>
-              <c:multiLvlStrCache>
+              <c:strCache>
                 <c:ptCount val="5"/>
-                <c:lvl>
-                  <c:pt idx="0">
-                    <c:v>1 plano</c:v>
-                  </c:pt>
-                  <c:pt idx="1">
-                    <c:v>2 planos</c:v>
-                  </c:pt>
-                  <c:pt idx="2">
-                    <c:v>3 planos</c:v>
-                  </c:pt>
-                  <c:pt idx="3">
-                    <c:v>4 planos</c:v>
-                  </c:pt>
-                  <c:pt idx="4">
-                    <c:v>5 planos</c:v>
-                  </c:pt>
-                </c:lvl>
-              </c:multiLvlStrCache>
-            </c:multiLvlStrRef>
+                <c:pt idx="0">
+                  <c:v>1 plano</c:v>
+                </c:pt>
+                <c:pt idx="1">
+                  <c:v>2 planos</c:v>
+                </c:pt>
+                <c:pt idx="2">
+                  <c:v>3 planos</c:v>
+                </c:pt>
+                <c:pt idx="3">
+                  <c:v>4 planos</c:v>
+                </c:pt>
+                <c:pt idx="4">
+                  <c:v>5 planos</c:v>
+                </c:pt>
+              </c:strCache>
+            </c:strRef>
           </c:cat>
           <c:val>
             <c:numRef>
@@ -564,6 +643,11 @@
               </c:numCache>
             </c:numRef>
           </c:val>
+          <c:extLst>
+            <c:ext xmlns:c16="http://schemas.microsoft.com/office/drawing/2014/chart" uri="{C3380CC4-5D6E-409C-BE32-E72D297353CC}">
+              <c16:uniqueId val="{00000000-B8C8-4409-9EE3-D6DD208A60AC}"/>
+            </c:ext>
+          </c:extLst>
         </c:ser>
         <c:ser>
           <c:idx val="1"/>
@@ -586,54 +670,28 @@
             <a:effectLst/>
           </c:spPr>
           <c:invertIfNegative val="0"/>
-          <c:dLbls>
-            <c:numFmt formatCode="#,##0" sourceLinked="0"/>
-            <c:txPr>
-              <a:bodyPr/>
-              <a:lstStyle/>
-              <a:p>
-                <a:pPr>
-                  <a:defRPr b="0" i="0" strike="noStrike" sz="1200" u="none">
-                    <a:solidFill>
-                      <a:srgbClr val="000000"/>
-                    </a:solidFill>
-                    <a:latin typeface="Arial"/>
-                  </a:defRPr>
-                </a:pPr>
-              </a:p>
-            </c:txPr>
-            <c:showLegendKey val="0"/>
-            <c:showVal val="0"/>
-            <c:showCatName val="0"/>
-            <c:showSerName val="0"/>
-            <c:showPercent val="0"/>
-            <c:showBubbleSize val="0"/>
-            <c:showLeaderLines val="0"/>
-          </c:dLbls>
           <c:cat>
-            <c:multiLvlStrRef>
+            <c:strRef>
               <c:f>Sheet1!$A$2:$A$6</c:f>
-              <c:multiLvlStrCache>
+              <c:strCache>
                 <c:ptCount val="5"/>
-                <c:lvl>
-                  <c:pt idx="0">
-                    <c:v>1 plano</c:v>
-                  </c:pt>
-                  <c:pt idx="1">
-                    <c:v>2 planos</c:v>
-                  </c:pt>
-                  <c:pt idx="2">
-                    <c:v>3 planos</c:v>
-                  </c:pt>
-                  <c:pt idx="3">
-                    <c:v>4 planos</c:v>
-                  </c:pt>
-                  <c:pt idx="4">
-                    <c:v>5 planos</c:v>
-                  </c:pt>
-                </c:lvl>
-              </c:multiLvlStrCache>
-            </c:multiLvlStrRef>
+                <c:pt idx="0">
+                  <c:v>1 plano</c:v>
+                </c:pt>
+                <c:pt idx="1">
+                  <c:v>2 planos</c:v>
+                </c:pt>
+                <c:pt idx="2">
+                  <c:v>3 planos</c:v>
+                </c:pt>
+                <c:pt idx="3">
+                  <c:v>4 planos</c:v>
+                </c:pt>
+                <c:pt idx="4">
+                  <c:v>5 planos</c:v>
+                </c:pt>
+              </c:strCache>
+            </c:strRef>
           </c:cat>
           <c:val>
             <c:numRef>
@@ -659,36 +717,23 @@
               </c:numCache>
             </c:numRef>
           </c:val>
+          <c:extLst>
+            <c:ext xmlns:c16="http://schemas.microsoft.com/office/drawing/2014/chart" uri="{C3380CC4-5D6E-409C-BE32-E72D297353CC}">
+              <c16:uniqueId val="{00000001-B8C8-4409-9EE3-D6DD208A60AC}"/>
+            </c:ext>
+          </c:extLst>
         </c:ser>
         <c:dLbls>
-          <c:numFmt formatCode="#,##0" sourceLinked="0"/>
-          <c:txPr>
-            <a:bodyPr/>
-            <a:lstStyle/>
-            <a:p>
-              <a:pPr>
-                <a:defRPr b="0" i="0" strike="noStrike" sz="1200" u="none">
-                  <a:solidFill>
-                    <a:srgbClr val="000000"/>
-                  </a:solidFill>
-                  <a:latin typeface="Arial"/>
-                </a:defRPr>
-              </a:pPr>
-            </a:p>
-          </c:txPr>
           <c:showLegendKey val="0"/>
           <c:showVal val="0"/>
           <c:showCatName val="0"/>
           <c:showSerName val="0"/>
           <c:showPercent val="0"/>
           <c:showBubbleSize val="0"/>
-          <c:showLeaderLines val="0"/>
         </c:dLbls>
         <c:gapWidth val="50"/>
-        <c:overlap val="0"/>
         <c:axId val="2094734554"/>
         <c:axId val="2094734552"/>
-        <c:axId val="2094734556"/>
       </c:barChart>
       <c:catAx>
         <c:axId val="2094734554"/>
@@ -729,6 +774,7 @@
         <c:crosses val="autoZero"/>
         <c:auto val="1"/>
         <c:lblAlgn val="ctr"/>
+        <c:lblOffset val="100"/>
         <c:noMultiLvlLbl val="1"/>
       </c:catAx>
       <c:valAx>
@@ -811,6 +857,7 @@
     </c:legend>
     <c:plotVisOnly val="1"/>
     <c:dispBlanksAs val="span"/>
+    <c:showDLblsOverMax val="1"/>
   </c:chart>
   <c:spPr>
     <a:noFill/>
@@ -847,234 +894,10 @@
           <a:chExt cx="0" cy="0"/>
         </a:xfrm>
       </p:grpSpPr>
-      <p:sp>
-        <p:nvSpPr>
-          <p:cNvPr id="2" name="Header Placeholder 1"/>
-          <p:cNvSpPr>
-            <a:spLocks noGrp="1"/>
-          </p:cNvSpPr>
-          <p:nvPr>
-            <p:ph type="hdr" sz="quarter"/>
-          </p:nvPr>
-        </p:nvSpPr>
-        <p:spPr>
-          <a:xfrm>
-            <a:off x="0" y="0"/>
-            <a:ext cx="2971800" cy="458788"/>
-          </a:xfrm>
-          <a:prstGeom prst="rect">
-            <a:avLst/>
-          </a:prstGeom>
-        </p:spPr>
-        <p:txBody>
-          <a:bodyPr vert="horz" lIns="91440" tIns="45720" rIns="91440" bIns="45720" rtlCol="0"/>
-          <a:lstStyle>
-            <a:lvl1pPr algn="l">
-              <a:defRPr sz="1200"/>
-            </a:lvl1pPr>
-          </a:lstStyle>
-          <a:p>
-            <a:endParaRPr lang="en-US"/>
-          </a:p>
-        </p:txBody>
-      </p:sp>
-      <p:sp>
-        <p:nvSpPr>
-          <p:cNvPr id="3" name="Date Placeholder 2"/>
-          <p:cNvSpPr>
-            <a:spLocks noGrp="1"/>
-          </p:cNvSpPr>
-          <p:nvPr>
-            <p:ph type="dt" idx="1"/>
-          </p:nvPr>
-        </p:nvSpPr>
-        <p:spPr>
-          <a:xfrm>
-            <a:off x="3884613" y="0"/>
-            <a:ext cx="2971800" cy="458788"/>
-          </a:xfrm>
-          <a:prstGeom prst="rect">
-            <a:avLst/>
-          </a:prstGeom>
-        </p:spPr>
-        <p:txBody>
-          <a:bodyPr vert="horz" lIns="91440" tIns="45720" rIns="91440" bIns="45720" rtlCol="0"/>
-          <a:lstStyle>
-            <a:lvl1pPr algn="r">
-              <a:defRPr sz="1200"/>
-            </a:lvl1pPr>
-          </a:lstStyle>
-          <a:p>
-            <a:fld id="{5282F153-3F37-0F45-9E97-73ACFA13230C}" type="datetimeFigureOut">
-              <a:rPr lang="en-US"/>
-              <a:t>7/23/19</a:t>
-            </a:fld>
-            <a:endParaRPr lang="en-US"/>
-          </a:p>
-        </p:txBody>
-      </p:sp>
-      <p:sp>
-        <p:nvSpPr>
-          <p:cNvPr id="4" name="Slide Image Placeholder 3"/>
-          <p:cNvSpPr>
-            <a:spLocks noGrp="1" noRot="1" noChangeAspect="1"/>
-          </p:cNvSpPr>
-          <p:nvPr>
-            <p:ph type="sldImg" idx="2"/>
-          </p:nvPr>
-        </p:nvSpPr>
-        <p:spPr>
-          <a:xfrm>
-            <a:off x="685800" y="1143000"/>
-            <a:ext cx="5486400" cy="3086100"/>
-          </a:xfrm>
-          <a:prstGeom prst="rect">
-            <a:avLst/>
-          </a:prstGeom>
-          <a:noFill/>
-          <a:ln w="12700">
-            <a:solidFill>
-              <a:prstClr val="black"/>
-            </a:solidFill>
-          </a:ln>
-        </p:spPr>
-        <p:txBody>
-          <a:bodyPr vert="horz" lIns="91440" tIns="45720" rIns="91440" bIns="45720" rtlCol="0" anchor="ctr"/>
-          <a:lstStyle/>
-          <a:p>
-            <a:endParaRPr lang="en-US"/>
-          </a:p>
-        </p:txBody>
-      </p:sp>
-      <p:sp>
-        <p:nvSpPr>
-          <p:cNvPr id="5" name="Notes Placeholder 4"/>
-          <p:cNvSpPr>
-            <a:spLocks noGrp="1"/>
-          </p:cNvSpPr>
-          <p:nvPr>
-            <p:ph type="body" sz="quarter" idx="3"/>
-          </p:nvPr>
-        </p:nvSpPr>
-        <p:spPr>
-          <a:xfrm>
-            <a:off x="685800" y="4400550"/>
-            <a:ext cx="5486400" cy="3600450"/>
-          </a:xfrm>
-          <a:prstGeom prst="rect">
-            <a:avLst/>
-          </a:prstGeom>
-        </p:spPr>
-        <p:txBody>
-          <a:bodyPr vert="horz" lIns="91440" tIns="45720" rIns="91440" bIns="45720" rtlCol="0"/>
-          <a:lstStyle/>
-          <a:p>
-            <a:pPr lvl="0"/>
-            <a:r>
-              <a:rPr lang="en-US"/>
-              <a:t>Click to edit Master text styles</a:t>
-            </a:r>
-          </a:p>
-          <a:p>
-            <a:pPr lvl="1"/>
-            <a:r>
-              <a:rPr lang="en-US"/>
-              <a:t>Second level</a:t>
-            </a:r>
-          </a:p>
-          <a:p>
-            <a:pPr lvl="2"/>
-            <a:r>
-              <a:rPr lang="en-US"/>
-              <a:t>Third level</a:t>
-            </a:r>
-          </a:p>
-          <a:p>
-            <a:pPr lvl="3"/>
-            <a:r>
-              <a:rPr lang="en-US"/>
-              <a:t>Fourth level</a:t>
-            </a:r>
-          </a:p>
-          <a:p>
-            <a:pPr lvl="4"/>
-            <a:r>
-              <a:rPr lang="en-US"/>
-              <a:t>Fifth level</a:t>
-            </a:r>
-          </a:p>
-        </p:txBody>
-      </p:sp>
-      <p:sp>
-        <p:nvSpPr>
-          <p:cNvPr id="6" name="Footer Placeholder 5"/>
-          <p:cNvSpPr>
-            <a:spLocks noGrp="1"/>
-          </p:cNvSpPr>
-          <p:nvPr>
-            <p:ph type="ftr" sz="quarter" idx="4"/>
-          </p:nvPr>
-        </p:nvSpPr>
-        <p:spPr>
-          <a:xfrm>
-            <a:off x="0" y="8685213"/>
-            <a:ext cx="2971800" cy="458787"/>
-          </a:xfrm>
-          <a:prstGeom prst="rect">
-            <a:avLst/>
-          </a:prstGeom>
-        </p:spPr>
-        <p:txBody>
-          <a:bodyPr vert="horz" lIns="91440" tIns="45720" rIns="91440" bIns="45720" rtlCol="0" anchor="b"/>
-          <a:lstStyle>
-            <a:lvl1pPr algn="l">
-              <a:defRPr sz="1200"/>
-            </a:lvl1pPr>
-          </a:lstStyle>
-          <a:p>
-            <a:endParaRPr lang="en-US"/>
-          </a:p>
-        </p:txBody>
-      </p:sp>
-      <p:sp>
-        <p:nvSpPr>
-          <p:cNvPr id="7" name="Slide Number Placeholder 6"/>
-          <p:cNvSpPr>
-            <a:spLocks noGrp="1"/>
-          </p:cNvSpPr>
-          <p:nvPr>
-            <p:ph type="sldNum" sz="quarter" idx="5"/>
-          </p:nvPr>
-        </p:nvSpPr>
-        <p:spPr>
-          <a:xfrm>
-            <a:off x="3884613" y="8685213"/>
-            <a:ext cx="2971800" cy="458787"/>
-          </a:xfrm>
-          <a:prstGeom prst="rect">
-            <a:avLst/>
-          </a:prstGeom>
-        </p:spPr>
-        <p:txBody>
-          <a:bodyPr vert="horz" lIns="91440" tIns="45720" rIns="91440" bIns="45720" rtlCol="0" anchor="b"/>
-          <a:lstStyle>
-            <a:lvl1pPr algn="r">
-              <a:defRPr sz="1200"/>
-            </a:lvl1pPr>
-          </a:lstStyle>
-          <a:p>
-            <a:fld id="{CE5E9CC1-C706-0F49-92D6-E571CC5EEA8F}" type="slidenum">
-              <a:rPr lang="en-US"/>
-              <a:t>‹#›</a:t>
-            </a:fld>
-            <a:endParaRPr lang="en-US"/>
-          </a:p>
-        </p:txBody>
-      </p:sp>
     </p:spTree>
     <p:extLst>
       <p:ext uri="{BB962C8B-B14F-4D97-AF65-F5344CB8AC3E}">
-        <p14:creationId xmlns:p14="http://schemas.microsoft.com/office/powerpoint/2010/main" val="1024086991"/>
+        <p14:creationId xmlns:p14="http://schemas.microsoft.com/office/powerpoint/2010/main" val="1820789552"/>
       </p:ext>
     </p:extLst>
   </p:cSld>
@@ -1222,7 +1045,6 @@
               <a:rPr lang="en-US" dirty="0"/>
               <a:t>Abertura (1 min). A proposta: adotar o CDLoad como a plataforma oficial de dados do Núcleo de Inteligência. Três números resumem o que ele já entrega: 10 módulos em um só lugar, 9 fontes de dados que se atualizam sozinhas todos os dias e cerca de 65 horas por mês devolvidas à equipe.</a:t>
             </a:r>
-            <a:endParaRPr lang="en-US" dirty="0"/>
           </a:p>
         </p:txBody>
       </p:sp>
@@ -1244,94 +1066,6 @@
             <a:fld id="{F7021451-1387-4CA6-816F-3879F97B5CBC}" type="slidenum">
               <a:rPr lang="en-US"/>
               <a:t>1</a:t>
-            </a:fld>
-            <a:endParaRPr lang="en-US"/>
-          </a:p>
-        </p:txBody>
-      </p:sp>
-    </p:spTree>
-    <p:extLst>
-      <p:ext uri="{BB962C8B-B14F-4D97-AF65-F5344CB8AC3E}">
-        <p14:creationId xmlns:p14="http://schemas.microsoft.com/office/powerpoint/2010/main" val="1024086991"/>
-      </p:ext>
-    </p:extLst>
-  </p:cSld>
-  <p:clrMapOvr>
-    <a:masterClrMapping/>
-  </p:clrMapOvr>
-</p:notes>
-</file>
-
-<file path=ppt/notesSlides/notesSlide10.xml><?xml version="1.0" encoding="utf-8"?>
-<p:notes xmlns:a="http://schemas.openxmlformats.org/drawingml/2006/main" xmlns:r="http://schemas.openxmlformats.org/officeDocument/2006/relationships" xmlns:p="http://schemas.openxmlformats.org/presentationml/2006/main">
-  <p:cSld>
-    <p:spTree>
-      <p:nvGrpSpPr>
-        <p:cNvPr id="1" name=""/>
-        <p:cNvGrpSpPr/>
-        <p:nvPr/>
-      </p:nvGrpSpPr>
-      <p:grpSpPr>
-        <a:xfrm>
-          <a:off x="0" y="0"/>
-          <a:ext cx="0" cy="0"/>
-          <a:chOff x="0" y="0"/>
-          <a:chExt cx="0" cy="0"/>
-        </a:xfrm>
-      </p:grpSpPr>
-      <p:sp>
-        <p:nvSpPr>
-          <p:cNvPr id="2" name="Slide Image Placeholder 1"/>
-          <p:cNvSpPr>
-            <a:spLocks noGrp="1" noRot="1" noChangeAspect="1"/>
-          </p:cNvSpPr>
-          <p:nvPr>
-            <p:ph type="sldImg"/>
-          </p:nvPr>
-        </p:nvSpPr>
-        <p:spPr/>
-      </p:sp>
-      <p:sp>
-        <p:nvSpPr>
-          <p:cNvPr id="3" name="Notes Placeholder 2"/>
-          <p:cNvSpPr>
-            <a:spLocks noGrp="1"/>
-          </p:cNvSpPr>
-          <p:nvPr>
-            <p:ph type="body" idx="1"/>
-          </p:nvPr>
-        </p:nvSpPr>
-        <p:spPr/>
-        <p:txBody>
-          <a:bodyPr/>
-          <a:lstStyle/>
-          <a:p>
-            <a:r>
-              <a:rPr lang="en-US" dirty="0"/>
-              <a:t>Fechamento (2 min + perguntas). Quatro pedidos objetivos para a diretoria. A data de decisão (30/11/2026) é sugestão — ajuste conforme o calendário de reuniões.</a:t>
-            </a:r>
-            <a:endParaRPr lang="en-US" dirty="0"/>
-          </a:p>
-        </p:txBody>
-      </p:sp>
-      <p:sp>
-        <p:nvSpPr>
-          <p:cNvPr id="4" name="Slide Number Placeholder 3"/>
-          <p:cNvSpPr>
-            <a:spLocks noGrp="1"/>
-          </p:cNvSpPr>
-          <p:nvPr>
-            <p:ph type="sldNum" sz="quarter" idx="10"/>
-          </p:nvPr>
-        </p:nvSpPr>
-        <p:spPr/>
-        <p:txBody>
-          <a:bodyPr/>
-          <a:lstStyle/>
-          <a:p>
-            <a:fld id="{F7021451-1387-4CA6-816F-3879F97B5CBC}" type="slidenum">
-              <a:rPr lang="en-US"/>
-              <a:t>10</a:t>
             </a:fld>
             <a:endParaRPr lang="en-US"/>
           </a:p>
@@ -1398,7 +1132,6 @@
               <a:rPr lang="en-US" dirty="0"/>
               <a:t>Cenário atual (2 min). Quatro dores: dados espalhados em ferramentas que não conversam; coleta manual e repetitiva (CAGED, clipping de notícias, relatórios); custo de licença que cresce a cada usuário; e falta de controle de acesso centralizado. O efeito somado é de cerca de 65 horas por mês gastas em tarefas que podem ser automatizadas (fonte: planilha de viabilidade do Núcleo, out/2026).</a:t>
             </a:r>
-            <a:endParaRPr lang="en-US" dirty="0"/>
           </a:p>
         </p:txBody>
       </p:sp>
@@ -1486,7 +1219,6 @@
               <a:rPr lang="en-US" dirty="0"/>
               <a:t>A solução (2 min). O CDLoad junta tudo em um só lugar: as fontes (Receita Federal, CAGED, IBGE, Sefaz, Survey Monkey e notícias) entram automaticamente no banco de dados; a equipe e a diretoria consomem o resultado em painéis, no mapa de empresas, em relatórios PDF prontos e em exportações. Não exige instalação: abre no navegador, com login.</a:t>
             </a:r>
-            <a:endParaRPr lang="en-US" dirty="0"/>
           </a:p>
         </p:txBody>
       </p:sp>
@@ -1572,9 +1304,8 @@
           <a:p>
             <a:r>
               <a:rPr lang="en-US" dirty="0"/>
-              <a:t>Módulos (2 min). Azul: análise de mercado (Dashboard, Mapa, Clipping). Verde: rotinas operacionais (Relatórios, Survey Monkey, Estoque). Cinza: governança (Usuários e acesso, visualização do banco). Laranja: em construção (WhatsApp e Campanhas). Todos usam o mesmo login e as mesmas permissões.</a:t>
-            </a:r>
-            <a:endParaRPr lang="en-US" dirty="0"/>
+              <a:t>Impacto qualitativo (2 min). Cultura: todos olham para o mesmo número, atualizado. Segurança: login individual, permissão por seção e regras de acesso por linha (RLS) no banco; dados pessoais dos formulários ficam protegidos (LGPD). Escala: incluir um usuário ou um indicador não multiplica o custo — e a plataforma pode ser oferecida às CDLs parceiras como consultoria.</a:t>
+            </a:r>
           </a:p>
         </p:txBody>
       </p:sp>
@@ -1660,9 +1391,8 @@
           <a:p>
             <a:r>
               <a:rPr lang="en-US" dirty="0"/>
-              <a:t>Fluxo (2 min). Quatro etapas sem intervenção manual: coleta automática, consolidação no banco, análise nos painéis e entrega. O contraste antes × depois usa os tempos da planilha de viabilidade: relatório diário (~2 h), CAGED mensal (~5 h) e pesquisa de notícias.</a:t>
-            </a:r>
-            <a:endParaRPr lang="en-US" dirty="0"/>
+              <a:t>Roadmap (2 min). Fase 1 já entregue (outubro/2026). Fase 2 em andamento até dezembro: tempo real do Survey, mapa por CEP e organização técnica (testes, divisão do código). Fases 3 e 4 são proposta para 2027 — datas e escopo editáveis conforme a decisão da diretoria.</a:t>
+            </a:r>
           </a:p>
         </p:txBody>
       </p:sp>
@@ -1748,9 +1478,8 @@
           <a:p>
             <a:r>
               <a:rPr lang="en-US" dirty="0"/>
-              <a:t>Impacto quantitativo (2 min). Fonte: planilha de viabilidade do Núcleo (out/2026), 22 dias úteis/mês. Horas salvas = frequência × horas por ocorrência. Relatórios é o maior ganho (44 h/mês). Custo anual das ferramentas: R$ 4.370 (Power BI 1 licença R$ 1.310; Claude R$ 1.320; Survey Monkey R$ 1.200; Canva R$ 420; GisMaps R$ 120). Custo por hora devolvida = R$ 4.370 ÷ 785 h = R$ 5,57. Ajuste os números aqui se a planilha mudar.</a:t>
-            </a:r>
-            <a:endParaRPr lang="en-US" dirty="0"/>
+              <a:t>Módulos (2 min). Azul: análise de mercado (Dashboard, Mapa, Clipping). Verde: rotinas operacionais (Relatórios, Survey Monkey, Estoque). Cinza: governança (Usuários e acesso, visualização do banco). Laranja: em construção (WhatsApp e Campanhas). Todos usam o mesmo login e as mesmas permissões.</a:t>
+            </a:r>
           </a:p>
         </p:txBody>
       </p:sp>
@@ -1836,9 +1565,8 @@
           <a:p>
             <a:r>
               <a:rPr lang="en-US" dirty="0"/>
-              <a:t>Impacto qualitativo (2 min). Cultura: todos olham para o mesmo número, atualizado. Segurança: login individual, permissão por seção e regras de acesso por linha (RLS) no banco; dados pessoais dos formulários ficam protegidos (LGPD). Escala: incluir um usuário ou um indicador não multiplica o custo — e a plataforma pode ser oferecida às CDLs parceiras como consultoria.</a:t>
-            </a:r>
-            <a:endParaRPr lang="en-US" dirty="0"/>
+              <a:t>Fluxo (2 min). Quatro etapas sem intervenção manual: coleta automática, consolidação no banco, análise nos painéis e entrega. O contraste antes × depois usa os tempos da planilha de viabilidade: relatório diário (~2 h), CAGED mensal (~5 h) e pesquisa de notícias.</a:t>
+            </a:r>
           </a:p>
         </p:txBody>
       </p:sp>
@@ -1924,9 +1652,8 @@
           <a:p>
             <a:r>
               <a:rPr lang="en-US" dirty="0"/>
-              <a:t>Roadmap (2 min). Fase 1 já entregue (outubro/2026). Fase 2 em andamento até dezembro: tempo real do Survey, mapa por CEP e organização técnica (testes, divisão do código). Fases 3 e 4 são proposta para 2027 — datas e escopo editáveis conforme a decisão da diretoria.</a:t>
-            </a:r>
-            <a:endParaRPr lang="en-US" dirty="0"/>
+              <a:t>Impacto quantitativo (2 min). Fonte: planilha de viabilidade do Núcleo (out/2026), 22 dias úteis/mês. Horas salvas = frequência × horas por ocorrência. Relatórios é o maior ganho (44 h/mês). Custo anual das ferramentas: R$ 4.370 (Power BI 1 licença R$ 1.310; Claude R$ 1.320; Survey Monkey R$ 1.200; Canva R$ 420; GisMaps R$ 120). Custo por hora devolvida = R$ 4.370 ÷ 785 h = R$ 5,57. Ajuste os números aqui se a planilha mudar.</a:t>
+            </a:r>
           </a:p>
         </p:txBody>
       </p:sp>
@@ -2014,7 +1741,6 @@
               <a:rPr lang="en-US" dirty="0"/>
               <a:t>Viabilidade (2 min). Custo anual das ferramentas: R$ 4.370 com 1 licença de Power BI (com 7 licenças, sobe para cerca de R$ 12.230). Captação por plano de consultoria: R$ 120/mês = R$ 1.440/ano. Ponto de equilíbrio: 4 planos (R$ 5.760/ano). Confirmar custos de hospedagem/banco (Supabase, GitHub) antes de apresentar.</a:t>
             </a:r>
-            <a:endParaRPr lang="en-US" dirty="0"/>
           </a:p>
         </p:txBody>
       </p:sp>
@@ -2092,6 +1818,7 @@
         <a:solidFill>
           <a:schemeClr val="tx2"/>
         </a:solidFill>
+        <a:effectLst/>
       </p:bgPr>
     </p:bg>
     <p:spTree>
@@ -2111,9 +1838,11 @@
       <p:sp>
         <p:nvSpPr>
           <p:cNvPr id="2" name="Text 0"/>
-          <p:cNvSpPr/>
+          <p:cNvSpPr>
+            <a:spLocks noGrp="1"/>
+          </p:cNvSpPr>
           <p:nvPr>
-            <p:ph idx="100" type="title" hasCustomPrompt="1"/>
+            <p:ph type="title" idx="100" hasCustomPrompt="1"/>
           </p:nvPr>
         </p:nvSpPr>
         <p:spPr>
@@ -2130,7 +1859,7 @@
         <p:txBody>
           <a:bodyPr wrap="square" rtlCol="0"/>
           <a:lstStyle>
-            <a:lvl1pPr indent="0" marL="0">
+            <a:lvl1pPr marL="0" indent="0">
               <a:buNone/>
               <a:defRPr lang="en-US" sz="3600" b="1" dirty="0">
                 <a:solidFill>
@@ -2140,7 +1869,7 @@
             </a:lvl1pPr>
           </a:lstStyle>
           <a:p>
-            <a:pPr indent="0" marL="0">
+            <a:pPr marL="0" indent="0">
               <a:buNone/>
             </a:pPr>
             <a:r>
@@ -2158,9 +1887,11 @@
       <p:sp>
         <p:nvSpPr>
           <p:cNvPr id="3" name="Text 0"/>
-          <p:cNvSpPr/>
+          <p:cNvSpPr>
+            <a:spLocks noGrp="1"/>
+          </p:cNvSpPr>
           <p:nvPr>
-            <p:ph idx="101" type="body" hasCustomPrompt="1"/>
+            <p:ph type="body" idx="101" hasCustomPrompt="1"/>
           </p:nvPr>
         </p:nvSpPr>
         <p:spPr>
@@ -2177,7 +1908,7 @@
         <p:txBody>
           <a:bodyPr wrap="square" rtlCol="0"/>
           <a:lstStyle>
-            <a:lvl1pPr indent="0" marL="0">
+            <a:lvl1pPr marL="0" indent="0">
               <a:buNone/>
               <a:defRPr lang="en-US" sz="1600" dirty="0">
                 <a:solidFill>
@@ -2187,7 +1918,7 @@
             </a:lvl1pPr>
           </a:lstStyle>
           <a:p>
-            <a:pPr indent="0" marL="0">
+            <a:pPr marL="0" indent="0">
               <a:buNone/>
             </a:pPr>
             <a:r>
@@ -2223,7 +1954,7 @@
           <a:bodyPr wrap="square" lIns="0" tIns="0" rIns="0" bIns="0" rtlCol="0" anchor="ctr"/>
           <a:lstStyle/>
           <a:p>
-            <a:pPr indent="0" marL="0">
+            <a:pPr marL="0" indent="0">
               <a:buNone/>
             </a:pPr>
             <a:r>
@@ -2254,6 +1985,7 @@
         <a:solidFill>
           <a:schemeClr val="bg1"/>
         </a:solidFill>
+        <a:effectLst/>
       </p:bgPr>
     </p:bg>
     <p:spTree>
@@ -2273,9 +2005,11 @@
       <p:sp>
         <p:nvSpPr>
           <p:cNvPr id="2" name="Text 0"/>
-          <p:cNvSpPr/>
+          <p:cNvSpPr>
+            <a:spLocks noGrp="1"/>
+          </p:cNvSpPr>
           <p:nvPr>
-            <p:ph idx="100" type="title" hasCustomPrompt="1"/>
+            <p:ph type="title" idx="100" hasCustomPrompt="1"/>
           </p:nvPr>
         </p:nvSpPr>
         <p:spPr>
@@ -2292,7 +2026,7 @@
         <p:txBody>
           <a:bodyPr wrap="square" rtlCol="0"/>
           <a:lstStyle>
-            <a:lvl1pPr indent="0" marL="0">
+            <a:lvl1pPr marL="0" indent="0">
               <a:buNone/>
               <a:defRPr lang="en-US" sz="2200" b="1" dirty="0">
                 <a:solidFill>
@@ -2302,7 +2036,7 @@
             </a:lvl1pPr>
           </a:lstStyle>
           <a:p>
-            <a:pPr indent="0" marL="0">
+            <a:pPr marL="0" indent="0">
               <a:buNone/>
             </a:pPr>
             <a:r>
@@ -2338,7 +2072,7 @@
           <a:bodyPr wrap="square" lIns="0" tIns="0" rIns="0" bIns="0" rtlCol="0" anchor="ctr"/>
           <a:lstStyle/>
           <a:p>
-            <a:pPr indent="0" marL="0">
+            <a:pPr marL="0" indent="0">
               <a:buNone/>
             </a:pPr>
             <a:r>
@@ -2373,7 +2107,7 @@
           </a:prstGeom>
           <a:extLst>
             <a:ext uri="{C572A759-6A51-4108-AA02-DFA0A04FC94B}">
-              <ma14:wrappingTextBoxFlag xmlns:ma14="http://schemas.microsoft.com/office/mac/drawingml/2011/main" val="0"/>
+              <ma14:wrappingTextBoxFlag xmlns:ma14="http://schemas.microsoft.com/office/mac/drawingml/2011/main" xmlns="" val="0"/>
             </a:ext>
           </a:extLst>
         </p:spPr>
@@ -2391,8 +2125,8 @@
           <a:p>
             <a:pPr algn="r"/>
             <a:fld id="{F7021451-1387-4CA6-816F-3879F97B5CBC}" type="slidenum">
-              <a:rPr b="0" lang="en-US"/>
-              <a:t>1003</a:t>
+              <a:rPr lang="en-US" b="0"/>
+              <a:t>‹nº›</a:t>
             </a:fld>
             <a:endParaRPr lang="en-US"/>
           </a:p>
@@ -2414,6 +2148,7 @@
         <a:solidFill>
           <a:schemeClr val="tx2"/>
         </a:solidFill>
+        <a:effectLst/>
       </p:bgPr>
     </p:bg>
     <p:spTree>
@@ -2433,9 +2168,11 @@
       <p:sp>
         <p:nvSpPr>
           <p:cNvPr id="2" name="Text 0"/>
-          <p:cNvSpPr/>
+          <p:cNvSpPr>
+            <a:spLocks noGrp="1"/>
+          </p:cNvSpPr>
           <p:nvPr>
-            <p:ph idx="100" type="title" hasCustomPrompt="1"/>
+            <p:ph type="title" idx="100" hasCustomPrompt="1"/>
           </p:nvPr>
         </p:nvSpPr>
         <p:spPr>
@@ -2452,7 +2189,7 @@
         <p:txBody>
           <a:bodyPr wrap="square" rtlCol="0"/>
           <a:lstStyle>
-            <a:lvl1pPr indent="0" marL="0">
+            <a:lvl1pPr marL="0" indent="0">
               <a:buNone/>
               <a:defRPr lang="en-US" sz="3000" b="1" dirty="0">
                 <a:solidFill>
@@ -2462,7 +2199,7 @@
             </a:lvl1pPr>
           </a:lstStyle>
           <a:p>
-            <a:pPr indent="0" marL="0">
+            <a:pPr marL="0" indent="0">
               <a:buNone/>
             </a:pPr>
             <a:r>
@@ -2498,7 +2235,7 @@
           <a:bodyPr wrap="square" lIns="0" tIns="0" rIns="0" bIns="0" rtlCol="0" anchor="ctr"/>
           <a:lstStyle/>
           <a:p>
-            <a:pPr indent="0" marL="0">
+            <a:pPr marL="0" indent="0">
               <a:buNone/>
             </a:pPr>
             <a:r>
@@ -2533,7 +2270,7 @@
           </a:prstGeom>
           <a:extLst>
             <a:ext uri="{C572A759-6A51-4108-AA02-DFA0A04FC94B}">
-              <ma14:wrappingTextBoxFlag xmlns:ma14="http://schemas.microsoft.com/office/mac/drawingml/2011/main" val="0"/>
+              <ma14:wrappingTextBoxFlag xmlns:ma14="http://schemas.microsoft.com/office/mac/drawingml/2011/main" xmlns="" val="0"/>
             </a:ext>
           </a:extLst>
         </p:spPr>
@@ -2551,8 +2288,8 @@
           <a:p>
             <a:pPr algn="r"/>
             <a:fld id="{F7021451-1387-4CA6-816F-3879F97B5CBC}" type="slidenum">
-              <a:rPr b="0" lang="en-US"/>
-              <a:t>1004</a:t>
+              <a:rPr lang="en-US" b="0"/>
+              <a:t>‹nº›</a:t>
             </a:fld>
             <a:endParaRPr lang="en-US"/>
           </a:p>
@@ -2569,6 +2306,11 @@
 <file path=ppt/slideMasters/slideMaster1.xml><?xml version="1.0" encoding="utf-8"?>
 <p:sldMaster xmlns:a="http://schemas.openxmlformats.org/drawingml/2006/main" xmlns:r="http://schemas.openxmlformats.org/officeDocument/2006/relationships" xmlns:p="http://schemas.openxmlformats.org/presentationml/2006/main">
   <p:cSld>
+    <p:bg>
+      <p:bgRef idx="1001">
+        <a:schemeClr val="bg1"/>
+      </p:bgRef>
+    </p:bg>
     <p:spTree>
       <p:nvGrpSpPr>
         <p:cNvPr id="1" name=""/>
@@ -2603,7 +2345,7 @@
           </a:prstGeom>
           <a:extLst>
             <a:ext uri="{C572A759-6A51-4108-AA02-DFA0A04FC94B}">
-              <ma14:wrappingTextBoxFlag xmlns:ma14="http://schemas.microsoft.com/office/mac/drawingml/2011/main" val="0"/>
+              <ma14:wrappingTextBoxFlag xmlns:ma14="http://schemas.microsoft.com/office/mac/drawingml/2011/main" xmlns="" val="0"/>
             </a:ext>
           </a:extLst>
         </p:spPr>
@@ -2621,8 +2363,8 @@
           <a:p>
             <a:pPr algn="r"/>
             <a:fld id="{F7021451-1387-4CA6-816F-3879F97B5CBC}" type="slidenum">
-              <a:rPr b="0" lang="en-US"/>
-              <a:t>null</a:t>
+              <a:rPr lang="en-US" b="0"/>
+              <a:t>‹nº›</a:t>
             </a:fld>
             <a:endParaRPr lang="en-US"/>
           </a:p>
@@ -2911,9 +2653,11 @@
       <p:sp>
         <p:nvSpPr>
           <p:cNvPr id="2" name="Text 0"/>
-          <p:cNvSpPr/>
+          <p:cNvSpPr>
+            <a:spLocks noGrp="1"/>
+          </p:cNvSpPr>
           <p:nvPr>
-            <p:ph idx="100" type="title" hasCustomPrompt="1"/>
+            <p:ph type="title" idx="100" hasCustomPrompt="1"/>
           </p:nvPr>
         </p:nvSpPr>
         <p:spPr>
@@ -2931,7 +2675,7 @@
           <a:bodyPr wrap="square" lIns="0" tIns="0" rIns="0" bIns="0" rtlCol="0" anchor="b"/>
           <a:lstStyle/>
           <a:p>
-            <a:pPr algn="l" indent="0" marL="0">
+            <a:pPr marL="0" indent="0" algn="l">
               <a:buNone/>
             </a:pPr>
             <a:r>
@@ -2949,9 +2693,11 @@
       <p:sp>
         <p:nvSpPr>
           <p:cNvPr id="3" name="Text 0"/>
-          <p:cNvSpPr/>
+          <p:cNvSpPr>
+            <a:spLocks noGrp="1"/>
+          </p:cNvSpPr>
           <p:nvPr>
-            <p:ph idx="101" type="body" hasCustomPrompt="1"/>
+            <p:ph type="body" idx="101" hasCustomPrompt="1"/>
           </p:nvPr>
         </p:nvSpPr>
         <p:spPr>
@@ -2969,7 +2715,7 @@
           <a:bodyPr wrap="square" lIns="0" tIns="0" rIns="0" bIns="0" rtlCol="0" anchor="t"/>
           <a:lstStyle/>
           <a:p>
-            <a:pPr indent="0" marL="0">
+            <a:pPr marL="0" indent="0">
               <a:buNone/>
             </a:pPr>
             <a:r>
@@ -3012,6 +2758,13 @@
             <a:prstDash val="solid"/>
           </a:ln>
         </p:spPr>
+        <p:txBody>
+          <a:bodyPr/>
+          <a:lstStyle/>
+          <a:p>
+            <a:endParaRPr lang="pt-BR"/>
+          </a:p>
+        </p:txBody>
       </p:sp>
       <p:sp>
         <p:nvSpPr>
@@ -3034,7 +2787,7 @@
           <a:bodyPr wrap="square" lIns="0" tIns="0" rIns="0" bIns="0" rtlCol="0" anchor="t"/>
           <a:lstStyle/>
           <a:p>
-            <a:pPr indent="0" marL="0">
+            <a:pPr marL="0" indent="0">
               <a:buNone/>
             </a:pPr>
             <a:r>
@@ -3073,7 +2826,7 @@
           <a:bodyPr wrap="square" lIns="0" tIns="0" rIns="0" bIns="0" rtlCol="0" anchor="t"/>
           <a:lstStyle/>
           <a:p>
-            <a:pPr indent="0" marL="0">
+            <a:pPr marL="0" indent="0">
               <a:buNone/>
             </a:pPr>
             <a:r>
@@ -3116,6 +2869,13 @@
             <a:prstDash val="solid"/>
           </a:ln>
         </p:spPr>
+        <p:txBody>
+          <a:bodyPr/>
+          <a:lstStyle/>
+          <a:p>
+            <a:endParaRPr lang="pt-BR"/>
+          </a:p>
+        </p:txBody>
       </p:sp>
       <p:sp>
         <p:nvSpPr>
@@ -3138,7 +2898,7 @@
           <a:bodyPr wrap="square" lIns="0" tIns="0" rIns="0" bIns="0" rtlCol="0" anchor="t"/>
           <a:lstStyle/>
           <a:p>
-            <a:pPr indent="0" marL="0">
+            <a:pPr marL="0" indent="0">
               <a:buNone/>
             </a:pPr>
             <a:r>
@@ -3177,7 +2937,7 @@
           <a:bodyPr wrap="square" lIns="0" tIns="0" rIns="0" bIns="0" rtlCol="0" anchor="t"/>
           <a:lstStyle/>
           <a:p>
-            <a:pPr indent="0" marL="0">
+            <a:pPr marL="0" indent="0">
               <a:buNone/>
             </a:pPr>
             <a:r>
@@ -3220,6 +2980,13 @@
             <a:prstDash val="solid"/>
           </a:ln>
         </p:spPr>
+        <p:txBody>
+          <a:bodyPr/>
+          <a:lstStyle/>
+          <a:p>
+            <a:endParaRPr lang="pt-BR"/>
+          </a:p>
+        </p:txBody>
       </p:sp>
       <p:sp>
         <p:nvSpPr>
@@ -3242,7 +3009,7 @@
           <a:bodyPr wrap="square" lIns="0" tIns="0" rIns="0" bIns="0" rtlCol="0" anchor="t"/>
           <a:lstStyle/>
           <a:p>
-            <a:pPr indent="0" marL="0">
+            <a:pPr marL="0" indent="0">
               <a:buNone/>
             </a:pPr>
             <a:r>
@@ -3281,7 +3048,7 @@
           <a:bodyPr wrap="square" lIns="0" tIns="0" rIns="0" bIns="0" rtlCol="0" anchor="t"/>
           <a:lstStyle/>
           <a:p>
-            <a:pPr indent="0" marL="0">
+            <a:pPr marL="0" indent="0">
               <a:buNone/>
             </a:pPr>
             <a:r>
@@ -3293,778 +3060,6 @@
               <a:t>devolvidas à equipe por mês</a:t>
             </a:r>
             <a:endParaRPr lang="en-US" sz="1200" dirty="0"/>
-          </a:p>
-        </p:txBody>
-      </p:sp>
-    </p:spTree>
-  </p:cSld>
-  <p:clrMapOvr>
-    <a:masterClrMapping/>
-  </p:clrMapOvr>
-</p:sld>
-</file>
-
-<file path=ppt/slides/slide10.xml><?xml version="1.0" encoding="utf-8"?>
-<p:sld xmlns:a="http://schemas.openxmlformats.org/drawingml/2006/main" xmlns:r="http://schemas.openxmlformats.org/officeDocument/2006/relationships" xmlns:p="http://schemas.openxmlformats.org/presentationml/2006/main">
-  <p:cSld name="Slide 10">
-    <p:spTree>
-      <p:nvGrpSpPr>
-        <p:cNvPr id="1" name=""/>
-        <p:cNvGrpSpPr/>
-        <p:nvPr/>
-      </p:nvGrpSpPr>
-      <p:grpSpPr>
-        <a:xfrm>
-          <a:off x="0" y="0"/>
-          <a:ext cx="0" cy="0"/>
-          <a:chOff x="0" y="0"/>
-          <a:chExt cx="0" cy="0"/>
-        </a:xfrm>
-      </p:grpSpPr>
-      <p:sp>
-        <p:nvSpPr>
-          <p:cNvPr id="2" name="Text 0"/>
-          <p:cNvSpPr/>
-          <p:nvPr>
-            <p:ph idx="100" type="title" hasCustomPrompt="1"/>
-          </p:nvPr>
-        </p:nvSpPr>
-        <p:spPr>
-          <a:xfrm>
-            <a:off x="548640" y="365760"/>
-            <a:ext cx="8046720" cy="685800"/>
-          </a:xfrm>
-          <a:prstGeom prst="rect">
-            <a:avLst/>
-          </a:prstGeom>
-          <a:noFill/>
-          <a:ln/>
-        </p:spPr>
-        <p:txBody>
-          <a:bodyPr wrap="square" lIns="0" tIns="0" rIns="0" bIns="0" rtlCol="0" anchor="ctr"/>
-          <a:lstStyle/>
-          <a:p>
-            <a:pPr algn="l" indent="0" marL="0">
-              <a:buNone/>
-            </a:pPr>
-            <a:r>
-              <a:rPr lang="en-US" sz="3000" b="1" dirty="0">
-                <a:solidFill>
-                  <a:schemeClr val="bg1"/>
-                </a:solidFill>
-              </a:rPr>
-              <a:t>Próximos passos: a decisão que pedimos</a:t>
-            </a:r>
-            <a:endParaRPr lang="en-US" sz="3000" dirty="0"/>
-          </a:p>
-        </p:txBody>
-      </p:sp>
-      <p:sp>
-        <p:nvSpPr>
-          <p:cNvPr id="3" name="Pedido 1 (cartão)"/>
-          <p:cNvSpPr/>
-          <p:nvPr/>
-        </p:nvSpPr>
-        <p:spPr>
-          <a:xfrm>
-            <a:off x="548640" y="1325880"/>
-            <a:ext cx="3886200" cy="1280160"/>
-          </a:xfrm>
-          <a:prstGeom prst="roundRect">
-            <a:avLst>
-              <a:gd name="adj" fmla="val 7143"/>
-            </a:avLst>
-          </a:prstGeom>
-          <a:solidFill>
-            <a:schemeClr val="bg1">
-              <a:alpha val="10000"/>
-            </a:schemeClr>
-          </a:solidFill>
-          <a:ln w="9525">
-            <a:solidFill>
-              <a:schemeClr val="accent3"/>
-            </a:solidFill>
-            <a:prstDash val="solid"/>
-          </a:ln>
-        </p:spPr>
-      </p:sp>
-      <p:sp>
-        <p:nvSpPr>
-          <p:cNvPr id="4" name="Pedido 1 (círculo)"/>
-          <p:cNvSpPr/>
-          <p:nvPr/>
-        </p:nvSpPr>
-        <p:spPr>
-          <a:xfrm>
-            <a:off x="749808" y="1554480"/>
-            <a:ext cx="548640" cy="548640"/>
-          </a:xfrm>
-          <a:prstGeom prst="ellipse">
-            <a:avLst/>
-          </a:prstGeom>
-          <a:solidFill>
-            <a:schemeClr val="accent2"/>
-          </a:solidFill>
-          <a:ln/>
-        </p:spPr>
-      </p:sp>
-      <p:sp>
-        <p:nvSpPr>
-          <p:cNvPr id="5" name="Pedido 1 (rótulo)"/>
-          <p:cNvSpPr txBox="1"/>
-          <p:nvPr/>
-        </p:nvSpPr>
-        <p:spPr>
-          <a:xfrm>
-            <a:off x="749808" y="1554480"/>
-            <a:ext cx="548640" cy="548640"/>
-          </a:xfrm>
-          <a:prstGeom prst="rect">
-            <a:avLst/>
-          </a:prstGeom>
-          <a:noFill/>
-          <a:ln/>
-        </p:spPr>
-        <p:txBody>
-          <a:bodyPr wrap="square" lIns="0" tIns="0" rIns="0" bIns="0" rtlCol="0" anchor="ctr"/>
-          <a:lstStyle/>
-          <a:p>
-            <a:pPr algn="ctr" indent="0" marL="0">
-              <a:buNone/>
-            </a:pPr>
-            <a:r>
-              <a:rPr lang="en-US" sz="1300" b="1" dirty="0">
-                <a:solidFill>
-                  <a:schemeClr val="bg1"/>
-                </a:solidFill>
-              </a:rPr>
-              <a:t>1</a:t>
-            </a:r>
-            <a:endParaRPr lang="en-US" sz="1300" dirty="0"/>
-          </a:p>
-        </p:txBody>
-      </p:sp>
-      <p:sp>
-        <p:nvSpPr>
-          <p:cNvPr id="6" name="Pedido 1 (título)"/>
-          <p:cNvSpPr txBox="1"/>
-          <p:nvPr/>
-        </p:nvSpPr>
-        <p:spPr>
-          <a:xfrm>
-            <a:off x="1463040" y="1508760"/>
-            <a:ext cx="2834640" cy="502920"/>
-          </a:xfrm>
-          <a:prstGeom prst="rect">
-            <a:avLst/>
-          </a:prstGeom>
-          <a:noFill/>
-          <a:ln/>
-        </p:spPr>
-        <p:txBody>
-          <a:bodyPr wrap="square" lIns="0" tIns="0" rIns="0" bIns="0" rtlCol="0" anchor="ctr"/>
-          <a:lstStyle/>
-          <a:p>
-            <a:pPr indent="0" marL="0">
-              <a:buNone/>
-            </a:pPr>
-            <a:r>
-              <a:rPr lang="en-US" sz="1500" b="1" dirty="0">
-                <a:solidFill>
-                  <a:schemeClr val="bg1"/>
-                </a:solidFill>
-              </a:rPr>
-              <a:t>Aprovar o CDLoad como plataforma oficial</a:t>
-            </a:r>
-            <a:endParaRPr lang="en-US" sz="1500" dirty="0"/>
-          </a:p>
-        </p:txBody>
-      </p:sp>
-      <p:sp>
-        <p:nvSpPr>
-          <p:cNvPr id="7" name="Pedido 1 (descrição)"/>
-          <p:cNvSpPr txBox="1"/>
-          <p:nvPr/>
-        </p:nvSpPr>
-        <p:spPr>
-          <a:xfrm>
-            <a:off x="1463040" y="2039112"/>
-            <a:ext cx="2834640" cy="457200"/>
-          </a:xfrm>
-          <a:prstGeom prst="rect">
-            <a:avLst/>
-          </a:prstGeom>
-          <a:noFill/>
-          <a:ln/>
-        </p:spPr>
-        <p:txBody>
-          <a:bodyPr wrap="square" lIns="0" tIns="0" rIns="0" bIns="0" rtlCol="0" anchor="t"/>
-          <a:lstStyle/>
-          <a:p>
-            <a:pPr indent="0" marL="0">
-              <a:buNone/>
-            </a:pPr>
-            <a:r>
-              <a:rPr lang="en-US" sz="1200" dirty="0">
-                <a:solidFill>
-                  <a:schemeClr val="accent3"/>
-                </a:solidFill>
-              </a:rPr>
-              <a:t>Fonte única de dados e relatórios do Núcleo de Inteligência.</a:t>
-            </a:r>
-            <a:endParaRPr lang="en-US" sz="1200" dirty="0"/>
-          </a:p>
-        </p:txBody>
-      </p:sp>
-      <p:sp>
-        <p:nvSpPr>
-          <p:cNvPr id="8" name="Pedido 2 (cartão)"/>
-          <p:cNvSpPr/>
-          <p:nvPr/>
-        </p:nvSpPr>
-        <p:spPr>
-          <a:xfrm>
-            <a:off x="4617720" y="1325880"/>
-            <a:ext cx="3886200" cy="1280160"/>
-          </a:xfrm>
-          <a:prstGeom prst="roundRect">
-            <a:avLst>
-              <a:gd name="adj" fmla="val 7143"/>
-            </a:avLst>
-          </a:prstGeom>
-          <a:solidFill>
-            <a:schemeClr val="bg1">
-              <a:alpha val="10000"/>
-            </a:schemeClr>
-          </a:solidFill>
-          <a:ln w="9525">
-            <a:solidFill>
-              <a:schemeClr val="accent3"/>
-            </a:solidFill>
-            <a:prstDash val="solid"/>
-          </a:ln>
-        </p:spPr>
-      </p:sp>
-      <p:sp>
-        <p:nvSpPr>
-          <p:cNvPr id="9" name="Pedido 2 (círculo)"/>
-          <p:cNvSpPr/>
-          <p:nvPr/>
-        </p:nvSpPr>
-        <p:spPr>
-          <a:xfrm>
-            <a:off x="4818888" y="1554480"/>
-            <a:ext cx="548640" cy="548640"/>
-          </a:xfrm>
-          <a:prstGeom prst="ellipse">
-            <a:avLst/>
-          </a:prstGeom>
-          <a:solidFill>
-            <a:schemeClr val="accent2"/>
-          </a:solidFill>
-          <a:ln/>
-        </p:spPr>
-      </p:sp>
-      <p:sp>
-        <p:nvSpPr>
-          <p:cNvPr id="10" name="Pedido 2 (rótulo)"/>
-          <p:cNvSpPr txBox="1"/>
-          <p:nvPr/>
-        </p:nvSpPr>
-        <p:spPr>
-          <a:xfrm>
-            <a:off x="4818888" y="1554480"/>
-            <a:ext cx="548640" cy="548640"/>
-          </a:xfrm>
-          <a:prstGeom prst="rect">
-            <a:avLst/>
-          </a:prstGeom>
-          <a:noFill/>
-          <a:ln/>
-        </p:spPr>
-        <p:txBody>
-          <a:bodyPr wrap="square" lIns="0" tIns="0" rIns="0" bIns="0" rtlCol="0" anchor="ctr"/>
-          <a:lstStyle/>
-          <a:p>
-            <a:pPr algn="ctr" indent="0" marL="0">
-              <a:buNone/>
-            </a:pPr>
-            <a:r>
-              <a:rPr lang="en-US" sz="1300" b="1" dirty="0">
-                <a:solidFill>
-                  <a:schemeClr val="bg1"/>
-                </a:solidFill>
-              </a:rPr>
-              <a:t>2</a:t>
-            </a:r>
-            <a:endParaRPr lang="en-US" sz="1300" dirty="0"/>
-          </a:p>
-        </p:txBody>
-      </p:sp>
-      <p:sp>
-        <p:nvSpPr>
-          <p:cNvPr id="11" name="Pedido 2 (título)"/>
-          <p:cNvSpPr txBox="1"/>
-          <p:nvPr/>
-        </p:nvSpPr>
-        <p:spPr>
-          <a:xfrm>
-            <a:off x="5532120" y="1508760"/>
-            <a:ext cx="2834640" cy="502920"/>
-          </a:xfrm>
-          <a:prstGeom prst="rect">
-            <a:avLst/>
-          </a:prstGeom>
-          <a:noFill/>
-          <a:ln/>
-        </p:spPr>
-        <p:txBody>
-          <a:bodyPr wrap="square" lIns="0" tIns="0" rIns="0" bIns="0" rtlCol="0" anchor="ctr"/>
-          <a:lstStyle/>
-          <a:p>
-            <a:pPr indent="0" marL="0">
-              <a:buNone/>
-            </a:pPr>
-            <a:r>
-              <a:rPr lang="en-US" sz="1500" b="1" dirty="0">
-                <a:solidFill>
-                  <a:schemeClr val="bg1"/>
-                </a:solidFill>
-              </a:rPr>
-              <a:t>Aprovar o orçamento de ferramentas</a:t>
-            </a:r>
-            <a:endParaRPr lang="en-US" sz="1500" dirty="0"/>
-          </a:p>
-        </p:txBody>
-      </p:sp>
-      <p:sp>
-        <p:nvSpPr>
-          <p:cNvPr id="12" name="Pedido 2 (descrição)"/>
-          <p:cNvSpPr txBox="1"/>
-          <p:nvPr/>
-        </p:nvSpPr>
-        <p:spPr>
-          <a:xfrm>
-            <a:off x="5532120" y="2039112"/>
-            <a:ext cx="2834640" cy="457200"/>
-          </a:xfrm>
-          <a:prstGeom prst="rect">
-            <a:avLst/>
-          </a:prstGeom>
-          <a:noFill/>
-          <a:ln/>
-        </p:spPr>
-        <p:txBody>
-          <a:bodyPr wrap="square" lIns="0" tIns="0" rIns="0" bIns="0" rtlCol="0" anchor="t"/>
-          <a:lstStyle/>
-          <a:p>
-            <a:pPr indent="0" marL="0">
-              <a:buNone/>
-            </a:pPr>
-            <a:r>
-              <a:rPr lang="en-US" sz="1200" dirty="0">
-                <a:solidFill>
-                  <a:schemeClr val="accent3"/>
-                </a:solidFill>
-              </a:rPr>
-              <a:t>R$ 4,4 mil/ano (cenário com 1 licença de Power BI).</a:t>
-            </a:r>
-            <a:endParaRPr lang="en-US" sz="1200" dirty="0"/>
-          </a:p>
-        </p:txBody>
-      </p:sp>
-      <p:sp>
-        <p:nvSpPr>
-          <p:cNvPr id="13" name="Pedido 3 (cartão)"/>
-          <p:cNvSpPr/>
-          <p:nvPr/>
-        </p:nvSpPr>
-        <p:spPr>
-          <a:xfrm>
-            <a:off x="548640" y="2788920"/>
-            <a:ext cx="3886200" cy="1280160"/>
-          </a:xfrm>
-          <a:prstGeom prst="roundRect">
-            <a:avLst>
-              <a:gd name="adj" fmla="val 7143"/>
-            </a:avLst>
-          </a:prstGeom>
-          <a:solidFill>
-            <a:schemeClr val="bg1">
-              <a:alpha val="10000"/>
-            </a:schemeClr>
-          </a:solidFill>
-          <a:ln w="9525">
-            <a:solidFill>
-              <a:schemeClr val="accent3"/>
-            </a:solidFill>
-            <a:prstDash val="solid"/>
-          </a:ln>
-        </p:spPr>
-      </p:sp>
-      <p:sp>
-        <p:nvSpPr>
-          <p:cNvPr id="14" name="Pedido 3 (círculo)"/>
-          <p:cNvSpPr/>
-          <p:nvPr/>
-        </p:nvSpPr>
-        <p:spPr>
-          <a:xfrm>
-            <a:off x="749808" y="3017520"/>
-            <a:ext cx="548640" cy="548640"/>
-          </a:xfrm>
-          <a:prstGeom prst="ellipse">
-            <a:avLst/>
-          </a:prstGeom>
-          <a:solidFill>
-            <a:schemeClr val="accent2"/>
-          </a:solidFill>
-          <a:ln/>
-        </p:spPr>
-      </p:sp>
-      <p:sp>
-        <p:nvSpPr>
-          <p:cNvPr id="15" name="Pedido 3 (rótulo)"/>
-          <p:cNvSpPr txBox="1"/>
-          <p:nvPr/>
-        </p:nvSpPr>
-        <p:spPr>
-          <a:xfrm>
-            <a:off x="749808" y="3017520"/>
-            <a:ext cx="548640" cy="548640"/>
-          </a:xfrm>
-          <a:prstGeom prst="rect">
-            <a:avLst/>
-          </a:prstGeom>
-          <a:noFill/>
-          <a:ln/>
-        </p:spPr>
-        <p:txBody>
-          <a:bodyPr wrap="square" lIns="0" tIns="0" rIns="0" bIns="0" rtlCol="0" anchor="ctr"/>
-          <a:lstStyle/>
-          <a:p>
-            <a:pPr algn="ctr" indent="0" marL="0">
-              <a:buNone/>
-            </a:pPr>
-            <a:r>
-              <a:rPr lang="en-US" sz="1300" b="1" dirty="0">
-                <a:solidFill>
-                  <a:schemeClr val="bg1"/>
-                </a:solidFill>
-              </a:rPr>
-              <a:t>3</a:t>
-            </a:r>
-            <a:endParaRPr lang="en-US" sz="1300" dirty="0"/>
-          </a:p>
-        </p:txBody>
-      </p:sp>
-      <p:sp>
-        <p:nvSpPr>
-          <p:cNvPr id="16" name="Pedido 3 (título)"/>
-          <p:cNvSpPr txBox="1"/>
-          <p:nvPr/>
-        </p:nvSpPr>
-        <p:spPr>
-          <a:xfrm>
-            <a:off x="1463040" y="2971800"/>
-            <a:ext cx="2834640" cy="502920"/>
-          </a:xfrm>
-          <a:prstGeom prst="rect">
-            <a:avLst/>
-          </a:prstGeom>
-          <a:noFill/>
-          <a:ln/>
-        </p:spPr>
-        <p:txBody>
-          <a:bodyPr wrap="square" lIns="0" tIns="0" rIns="0" bIns="0" rtlCol="0" anchor="ctr"/>
-          <a:lstStyle/>
-          <a:p>
-            <a:pPr indent="0" marL="0">
-              <a:buNone/>
-            </a:pPr>
-            <a:r>
-              <a:rPr lang="en-US" sz="1500" b="1" dirty="0">
-                <a:solidFill>
-                  <a:schemeClr val="bg1"/>
-                </a:solidFill>
-              </a:rPr>
-              <a:t>Definir um patrocinador na diretoria</a:t>
-            </a:r>
-            <a:endParaRPr lang="en-US" sz="1500" dirty="0"/>
-          </a:p>
-        </p:txBody>
-      </p:sp>
-      <p:sp>
-        <p:nvSpPr>
-          <p:cNvPr id="17" name="Pedido 3 (descrição)"/>
-          <p:cNvSpPr txBox="1"/>
-          <p:nvPr/>
-        </p:nvSpPr>
-        <p:spPr>
-          <a:xfrm>
-            <a:off x="1463040" y="3502152"/>
-            <a:ext cx="2834640" cy="457200"/>
-          </a:xfrm>
-          <a:prstGeom prst="rect">
-            <a:avLst/>
-          </a:prstGeom>
-          <a:noFill/>
-          <a:ln/>
-        </p:spPr>
-        <p:txBody>
-          <a:bodyPr wrap="square" lIns="0" tIns="0" rIns="0" bIns="0" rtlCol="0" anchor="t"/>
-          <a:lstStyle/>
-          <a:p>
-            <a:pPr indent="0" marL="0">
-              <a:buNone/>
-            </a:pPr>
-            <a:r>
-              <a:rPr lang="en-US" sz="1200" dirty="0">
-                <a:solidFill>
-                  <a:schemeClr val="accent3"/>
-                </a:solidFill>
-              </a:rPr>
-              <a:t>Responsável por priorizar o roadmap e a adoção pelas áreas.</a:t>
-            </a:r>
-            <a:endParaRPr lang="en-US" sz="1200" dirty="0"/>
-          </a:p>
-        </p:txBody>
-      </p:sp>
-      <p:sp>
-        <p:nvSpPr>
-          <p:cNvPr id="18" name="Pedido 4 (cartão)"/>
-          <p:cNvSpPr/>
-          <p:nvPr/>
-        </p:nvSpPr>
-        <p:spPr>
-          <a:xfrm>
-            <a:off x="4617720" y="2788920"/>
-            <a:ext cx="3886200" cy="1280160"/>
-          </a:xfrm>
-          <a:prstGeom prst="roundRect">
-            <a:avLst>
-              <a:gd name="adj" fmla="val 7143"/>
-            </a:avLst>
-          </a:prstGeom>
-          <a:solidFill>
-            <a:schemeClr val="bg1">
-              <a:alpha val="10000"/>
-            </a:schemeClr>
-          </a:solidFill>
-          <a:ln w="9525">
-            <a:solidFill>
-              <a:schemeClr val="accent3"/>
-            </a:solidFill>
-            <a:prstDash val="solid"/>
-          </a:ln>
-        </p:spPr>
-      </p:sp>
-      <p:sp>
-        <p:nvSpPr>
-          <p:cNvPr id="19" name="Pedido 4 (círculo)"/>
-          <p:cNvSpPr/>
-          <p:nvPr/>
-        </p:nvSpPr>
-        <p:spPr>
-          <a:xfrm>
-            <a:off x="4818888" y="3017520"/>
-            <a:ext cx="548640" cy="548640"/>
-          </a:xfrm>
-          <a:prstGeom prst="ellipse">
-            <a:avLst/>
-          </a:prstGeom>
-          <a:solidFill>
-            <a:schemeClr val="accent2"/>
-          </a:solidFill>
-          <a:ln/>
-        </p:spPr>
-      </p:sp>
-      <p:sp>
-        <p:nvSpPr>
-          <p:cNvPr id="20" name="Pedido 4 (rótulo)"/>
-          <p:cNvSpPr txBox="1"/>
-          <p:nvPr/>
-        </p:nvSpPr>
-        <p:spPr>
-          <a:xfrm>
-            <a:off x="4818888" y="3017520"/>
-            <a:ext cx="548640" cy="548640"/>
-          </a:xfrm>
-          <a:prstGeom prst="rect">
-            <a:avLst/>
-          </a:prstGeom>
-          <a:noFill/>
-          <a:ln/>
-        </p:spPr>
-        <p:txBody>
-          <a:bodyPr wrap="square" lIns="0" tIns="0" rIns="0" bIns="0" rtlCol="0" anchor="ctr"/>
-          <a:lstStyle/>
-          <a:p>
-            <a:pPr algn="ctr" indent="0" marL="0">
-              <a:buNone/>
-            </a:pPr>
-            <a:r>
-              <a:rPr lang="en-US" sz="1300" b="1" dirty="0">
-                <a:solidFill>
-                  <a:schemeClr val="bg1"/>
-                </a:solidFill>
-              </a:rPr>
-              <a:t>4</a:t>
-            </a:r>
-            <a:endParaRPr lang="en-US" sz="1300" dirty="0"/>
-          </a:p>
-        </p:txBody>
-      </p:sp>
-      <p:sp>
-        <p:nvSpPr>
-          <p:cNvPr id="21" name="Pedido 4 (título)"/>
-          <p:cNvSpPr txBox="1"/>
-          <p:nvPr/>
-        </p:nvSpPr>
-        <p:spPr>
-          <a:xfrm>
-            <a:off x="5532120" y="2971800"/>
-            <a:ext cx="2834640" cy="502920"/>
-          </a:xfrm>
-          <a:prstGeom prst="rect">
-            <a:avLst/>
-          </a:prstGeom>
-          <a:noFill/>
-          <a:ln/>
-        </p:spPr>
-        <p:txBody>
-          <a:bodyPr wrap="square" lIns="0" tIns="0" rIns="0" bIns="0" rtlCol="0" anchor="ctr"/>
-          <a:lstStyle/>
-          <a:p>
-            <a:pPr indent="0" marL="0">
-              <a:buNone/>
-            </a:pPr>
-            <a:r>
-              <a:rPr lang="en-US" sz="1500" b="1" dirty="0">
-                <a:solidFill>
-                  <a:schemeClr val="bg1"/>
-                </a:solidFill>
-              </a:rPr>
-              <a:t>Autorizar a oferta às CDLs parceiras</a:t>
-            </a:r>
-            <a:endParaRPr lang="en-US" sz="1500" dirty="0"/>
-          </a:p>
-        </p:txBody>
-      </p:sp>
-      <p:sp>
-        <p:nvSpPr>
-          <p:cNvPr id="22" name="Pedido 4 (descrição)"/>
-          <p:cNvSpPr txBox="1"/>
-          <p:nvPr/>
-        </p:nvSpPr>
-        <p:spPr>
-          <a:xfrm>
-            <a:off x="5532120" y="3502152"/>
-            <a:ext cx="2834640" cy="457200"/>
-          </a:xfrm>
-          <a:prstGeom prst="rect">
-            <a:avLst/>
-          </a:prstGeom>
-          <a:noFill/>
-          <a:ln/>
-        </p:spPr>
-        <p:txBody>
-          <a:bodyPr wrap="square" lIns="0" tIns="0" rIns="0" bIns="0" rtlCol="0" anchor="t"/>
-          <a:lstStyle/>
-          <a:p>
-            <a:pPr indent="0" marL="0">
-              <a:buNone/>
-            </a:pPr>
-            <a:r>
-              <a:rPr lang="en-US" sz="1200" dirty="0">
-                <a:solidFill>
-                  <a:schemeClr val="accent3"/>
-                </a:solidFill>
-              </a:rPr>
-              <a:t>Meta de 4 planos de consultoria para cobrir o custo anual.</a:t>
-            </a:r>
-            <a:endParaRPr lang="en-US" sz="1200" dirty="0"/>
-          </a:p>
-        </p:txBody>
-      </p:sp>
-      <p:sp>
-        <p:nvSpPr>
-          <p:cNvPr id="23" name="Prazo da decisão"/>
-          <p:cNvSpPr txBox="1"/>
-          <p:nvPr/>
-        </p:nvSpPr>
-        <p:spPr>
-          <a:xfrm>
-            <a:off x="548640" y="4343400"/>
-            <a:ext cx="8046720" cy="320040"/>
-          </a:xfrm>
-          <a:prstGeom prst="rect">
-            <a:avLst/>
-          </a:prstGeom>
-          <a:noFill/>
-          <a:ln/>
-        </p:spPr>
-        <p:txBody>
-          <a:bodyPr wrap="square" lIns="0" tIns="0" rIns="0" bIns="0" rtlCol="0" anchor="t"/>
-          <a:lstStyle/>
-          <a:p>
-            <a:pPr indent="0" marL="0">
-              <a:buNone/>
-            </a:pPr>
-            <a:r>
-              <a:rPr lang="en-US" sz="1200" i="1" dirty="0">
-                <a:solidFill>
-                  <a:schemeClr val="accent3"/>
-                </a:solidFill>
-              </a:rPr>
-              <a:t>Prazo sugerido para a decisão: até 30/11/2026, para iniciar a Fase 3 em janeiro.</a:t>
-            </a:r>
-            <a:endParaRPr lang="en-US" sz="1200" dirty="0"/>
-          </a:p>
-        </p:txBody>
-      </p:sp>
-      <p:sp>
-        <p:nvSpPr>
-          <p:cNvPr id="25" name="Slide Number Placeholder 0"/>
-          <p:cNvSpPr>
-            <a:spLocks noGrp="1"/>
-          </p:cNvSpPr>
-          <p:nvPr>
-            <p:ph type="sldNum" sz="quarter" idx="4294967295"/>
-          </p:nvPr>
-        </p:nvSpPr>
-        <p:spPr>
-          <a:xfrm>
-            <a:off x="8229600" y="4773168"/>
-            <a:ext cx="365760" cy="228600"/>
-          </a:xfrm>
-          <a:prstGeom prst="rect">
-            <a:avLst/>
-          </a:prstGeom>
-          <a:extLst>
-            <a:ext uri="{C572A759-6A51-4108-AA02-DFA0A04FC94B}">
-              <ma14:wrappingTextBoxFlag xmlns:ma14="http://schemas.microsoft.com/office/mac/drawingml/2011/main" val="0"/>
-            </a:ext>
-          </a:extLst>
-        </p:spPr>
-        <p:txBody>
-          <a:bodyPr/>
-          <a:lstStyle>
-            <a:lvl1pPr>
-              <a:defRPr sz="900">
-                <a:solidFill>
-                  <a:schemeClr val="accent3"/>
-                </a:solidFill>
-              </a:defRPr>
-            </a:lvl1pPr>
-          </a:lstStyle>
-          <a:p>
-            <a:pPr algn="r"/>
-            <a:fld id="{F7021451-1387-4CA6-816F-3879F97B5CBC}" type="slidenum">
-              <a:rPr b="0" lang="en-US"/>
-              <a:t>10</a:t>
-            </a:fld>
-            <a:endParaRPr lang="en-US"/>
           </a:p>
         </p:txBody>
       </p:sp>
@@ -4096,9 +3091,11 @@
       <p:sp>
         <p:nvSpPr>
           <p:cNvPr id="2" name="Text 0"/>
-          <p:cNvSpPr/>
+          <p:cNvSpPr>
+            <a:spLocks noGrp="1"/>
+          </p:cNvSpPr>
           <p:nvPr>
-            <p:ph idx="100" type="title" hasCustomPrompt="1"/>
+            <p:ph type="title" idx="100" hasCustomPrompt="1"/>
           </p:nvPr>
         </p:nvSpPr>
         <p:spPr>
@@ -4116,7 +3113,7 @@
           <a:bodyPr wrap="square" lIns="0" tIns="0" rIns="0" bIns="0" rtlCol="0" anchor="ctr"/>
           <a:lstStyle/>
           <a:p>
-            <a:pPr algn="l" indent="0" marL="0">
+            <a:pPr marL="0" indent="0" algn="l">
               <a:buNone/>
             </a:pPr>
             <a:r>
@@ -4152,13 +3149,20 @@
           </a:solidFill>
           <a:ln/>
           <a:effectLst>
-            <a:outerShdw sx="100000" sy="100000" kx="0" ky="0" algn="bl" rotWithShape="0" blurRad="76200" dist="25400" dir="5400000">
+            <a:outerShdw blurRad="76200" dist="25400" dir="5400000" algn="bl" rotWithShape="0">
               <a:srgbClr val="0F1E3D">
                 <a:alpha val="12000"/>
               </a:srgbClr>
             </a:outerShdw>
           </a:effectLst>
         </p:spPr>
+        <p:txBody>
+          <a:bodyPr/>
+          <a:lstStyle/>
+          <a:p>
+            <a:endParaRPr lang="pt-BR"/>
+          </a:p>
+        </p:txBody>
       </p:sp>
       <p:sp>
         <p:nvSpPr>
@@ -4179,6 +3183,13 @@
           </a:solidFill>
           <a:ln/>
         </p:spPr>
+        <p:txBody>
+          <a:bodyPr/>
+          <a:lstStyle/>
+          <a:p>
+            <a:endParaRPr lang="pt-BR"/>
+          </a:p>
+        </p:txBody>
       </p:sp>
       <p:sp>
         <p:nvSpPr>
@@ -4201,7 +3212,7 @@
           <a:bodyPr wrap="square" lIns="0" tIns="0" rIns="0" bIns="0" rtlCol="0" anchor="ctr"/>
           <a:lstStyle/>
           <a:p>
-            <a:pPr algn="ctr" indent="0" marL="0">
+            <a:pPr marL="0" indent="0" algn="ctr">
               <a:buNone/>
             </a:pPr>
             <a:r>
@@ -4237,7 +3248,7 @@
           <a:bodyPr wrap="square" lIns="0" tIns="0" rIns="0" bIns="0" rtlCol="0" anchor="ctr"/>
           <a:lstStyle/>
           <a:p>
-            <a:pPr indent="0" marL="0">
+            <a:pPr marL="0" indent="0">
               <a:buNone/>
             </a:pPr>
             <a:r>
@@ -4273,7 +3284,7 @@
           <a:bodyPr wrap="square" lIns="0" tIns="0" rIns="0" bIns="0" rtlCol="0" anchor="t"/>
           <a:lstStyle/>
           <a:p>
-            <a:pPr indent="0" marL="0">
+            <a:pPr marL="0" indent="0">
               <a:buNone/>
             </a:pPr>
             <a:r>
@@ -4309,13 +3320,20 @@
           </a:solidFill>
           <a:ln/>
           <a:effectLst>
-            <a:outerShdw sx="100000" sy="100000" kx="0" ky="0" algn="bl" rotWithShape="0" blurRad="76200" dist="25400" dir="5400000">
+            <a:outerShdw blurRad="76200" dist="25400" dir="5400000" algn="bl" rotWithShape="0">
               <a:srgbClr val="0F1E3D">
                 <a:alpha val="12000"/>
               </a:srgbClr>
             </a:outerShdw>
           </a:effectLst>
         </p:spPr>
+        <p:txBody>
+          <a:bodyPr/>
+          <a:lstStyle/>
+          <a:p>
+            <a:endParaRPr lang="pt-BR"/>
+          </a:p>
+        </p:txBody>
       </p:sp>
       <p:sp>
         <p:nvSpPr>
@@ -4336,6 +3354,13 @@
           </a:solidFill>
           <a:ln/>
         </p:spPr>
+        <p:txBody>
+          <a:bodyPr/>
+          <a:lstStyle/>
+          <a:p>
+            <a:endParaRPr lang="pt-BR"/>
+          </a:p>
+        </p:txBody>
       </p:sp>
       <p:sp>
         <p:nvSpPr>
@@ -4358,7 +3383,7 @@
           <a:bodyPr wrap="square" lIns="0" tIns="0" rIns="0" bIns="0" rtlCol="0" anchor="ctr"/>
           <a:lstStyle/>
           <a:p>
-            <a:pPr algn="ctr" indent="0" marL="0">
+            <a:pPr marL="0" indent="0" algn="ctr">
               <a:buNone/>
             </a:pPr>
             <a:r>
@@ -4394,7 +3419,7 @@
           <a:bodyPr wrap="square" lIns="0" tIns="0" rIns="0" bIns="0" rtlCol="0" anchor="ctr"/>
           <a:lstStyle/>
           <a:p>
-            <a:pPr indent="0" marL="0">
+            <a:pPr marL="0" indent="0">
               <a:buNone/>
             </a:pPr>
             <a:r>
@@ -4430,7 +3455,7 @@
           <a:bodyPr wrap="square" lIns="0" tIns="0" rIns="0" bIns="0" rtlCol="0" anchor="t"/>
           <a:lstStyle/>
           <a:p>
-            <a:pPr indent="0" marL="0">
+            <a:pPr marL="0" indent="0">
               <a:buNone/>
             </a:pPr>
             <a:r>
@@ -4466,13 +3491,20 @@
           </a:solidFill>
           <a:ln/>
           <a:effectLst>
-            <a:outerShdw sx="100000" sy="100000" kx="0" ky="0" algn="bl" rotWithShape="0" blurRad="76200" dist="25400" dir="5400000">
+            <a:outerShdw blurRad="76200" dist="25400" dir="5400000" algn="bl" rotWithShape="0">
               <a:srgbClr val="0F1E3D">
                 <a:alpha val="12000"/>
               </a:srgbClr>
             </a:outerShdw>
           </a:effectLst>
         </p:spPr>
+        <p:txBody>
+          <a:bodyPr/>
+          <a:lstStyle/>
+          <a:p>
+            <a:endParaRPr lang="pt-BR"/>
+          </a:p>
+        </p:txBody>
       </p:sp>
       <p:sp>
         <p:nvSpPr>
@@ -4493,6 +3525,13 @@
           </a:solidFill>
           <a:ln/>
         </p:spPr>
+        <p:txBody>
+          <a:bodyPr/>
+          <a:lstStyle/>
+          <a:p>
+            <a:endParaRPr lang="pt-BR"/>
+          </a:p>
+        </p:txBody>
       </p:sp>
       <p:sp>
         <p:nvSpPr>
@@ -4515,7 +3554,7 @@
           <a:bodyPr wrap="square" lIns="0" tIns="0" rIns="0" bIns="0" rtlCol="0" anchor="ctr"/>
           <a:lstStyle/>
           <a:p>
-            <a:pPr algn="ctr" indent="0" marL="0">
+            <a:pPr marL="0" indent="0" algn="ctr">
               <a:buNone/>
             </a:pPr>
             <a:r>
@@ -4551,7 +3590,7 @@
           <a:bodyPr wrap="square" lIns="0" tIns="0" rIns="0" bIns="0" rtlCol="0" anchor="ctr"/>
           <a:lstStyle/>
           <a:p>
-            <a:pPr indent="0" marL="0">
+            <a:pPr marL="0" indent="0">
               <a:buNone/>
             </a:pPr>
             <a:r>
@@ -4587,7 +3626,7 @@
           <a:bodyPr wrap="square" lIns="0" tIns="0" rIns="0" bIns="0" rtlCol="0" anchor="t"/>
           <a:lstStyle/>
           <a:p>
-            <a:pPr indent="0" marL="0">
+            <a:pPr marL="0" indent="0">
               <a:buNone/>
             </a:pPr>
             <a:r>
@@ -4623,13 +3662,20 @@
           </a:solidFill>
           <a:ln/>
           <a:effectLst>
-            <a:outerShdw sx="100000" sy="100000" kx="0" ky="0" algn="bl" rotWithShape="0" blurRad="76200" dist="25400" dir="5400000">
+            <a:outerShdw blurRad="76200" dist="25400" dir="5400000" algn="bl" rotWithShape="0">
               <a:srgbClr val="0F1E3D">
                 <a:alpha val="12000"/>
               </a:srgbClr>
             </a:outerShdw>
           </a:effectLst>
         </p:spPr>
+        <p:txBody>
+          <a:bodyPr/>
+          <a:lstStyle/>
+          <a:p>
+            <a:endParaRPr lang="pt-BR"/>
+          </a:p>
+        </p:txBody>
       </p:sp>
       <p:sp>
         <p:nvSpPr>
@@ -4650,6 +3696,13 @@
           </a:solidFill>
           <a:ln/>
         </p:spPr>
+        <p:txBody>
+          <a:bodyPr/>
+          <a:lstStyle/>
+          <a:p>
+            <a:endParaRPr lang="pt-BR"/>
+          </a:p>
+        </p:txBody>
       </p:sp>
       <p:sp>
         <p:nvSpPr>
@@ -4672,7 +3725,7 @@
           <a:bodyPr wrap="square" lIns="0" tIns="0" rIns="0" bIns="0" rtlCol="0" anchor="ctr"/>
           <a:lstStyle/>
           <a:p>
-            <a:pPr algn="ctr" indent="0" marL="0">
+            <a:pPr marL="0" indent="0" algn="ctr">
               <a:buNone/>
             </a:pPr>
             <a:r>
@@ -4708,7 +3761,7 @@
           <a:bodyPr wrap="square" lIns="0" tIns="0" rIns="0" bIns="0" rtlCol="0" anchor="ctr"/>
           <a:lstStyle/>
           <a:p>
-            <a:pPr indent="0" marL="0">
+            <a:pPr marL="0" indent="0">
               <a:buNone/>
             </a:pPr>
             <a:r>
@@ -4744,7 +3797,7 @@
           <a:bodyPr wrap="square" lIns="0" tIns="0" rIns="0" bIns="0" rtlCol="0" anchor="t"/>
           <a:lstStyle/>
           <a:p>
-            <a:pPr indent="0" marL="0">
+            <a:pPr marL="0" indent="0">
               <a:buNone/>
             </a:pPr>
             <a:r>
@@ -4780,13 +3833,20 @@
           </a:solidFill>
           <a:ln/>
           <a:effectLst>
-            <a:outerShdw sx="100000" sy="100000" kx="0" ky="0" algn="bl" rotWithShape="0" blurRad="76200" dist="25400" dir="5400000">
+            <a:outerShdw blurRad="76200" dist="25400" dir="5400000" algn="bl" rotWithShape="0">
               <a:srgbClr val="0F1E3D">
                 <a:alpha val="12000"/>
               </a:srgbClr>
             </a:outerShdw>
           </a:effectLst>
         </p:spPr>
+        <p:txBody>
+          <a:bodyPr/>
+          <a:lstStyle/>
+          <a:p>
+            <a:endParaRPr lang="pt-BR"/>
+          </a:p>
+        </p:txBody>
       </p:sp>
       <p:sp>
         <p:nvSpPr>
@@ -4809,7 +3869,7 @@
           <a:bodyPr wrap="square" lIns="0" tIns="0" rIns="0" bIns="0" rtlCol="0" anchor="t"/>
           <a:lstStyle/>
           <a:p>
-            <a:pPr indent="0" marL="0">
+            <a:pPr marL="0" indent="0">
               <a:buNone/>
             </a:pPr>
             <a:r>
@@ -4845,7 +3905,7 @@
           <a:bodyPr wrap="square" lIns="0" tIns="0" rIns="0" bIns="0" rtlCol="0" anchor="t"/>
           <a:lstStyle/>
           <a:p>
-            <a:pPr indent="0" marL="0">
+            <a:pPr marL="0" indent="0">
               <a:buNone/>
             </a:pPr>
             <a:r>
@@ -4884,7 +3944,7 @@
           <a:bodyPr wrap="square" lIns="0" tIns="0" rIns="0" bIns="0" rtlCol="0" anchor="t"/>
           <a:lstStyle/>
           <a:p>
-            <a:pPr indent="0" marL="0">
+            <a:pPr marL="0" indent="0">
               <a:buNone/>
             </a:pPr>
             <a:r>
@@ -4920,7 +3980,7 @@
           <a:bodyPr wrap="square" lIns="0" tIns="0" rIns="0" bIns="0" rtlCol="0" anchor="t"/>
           <a:lstStyle/>
           <a:p>
-            <a:pPr indent="0" marL="0">
+            <a:pPr marL="0" indent="0">
               <a:buNone/>
             </a:pPr>
             <a:r>
@@ -4959,7 +4019,7 @@
           <a:bodyPr wrap="square" lIns="0" tIns="0" rIns="0" bIns="0" rtlCol="0" anchor="t"/>
           <a:lstStyle/>
           <a:p>
-            <a:pPr indent="0" marL="0">
+            <a:pPr marL="0" indent="0">
               <a:buNone/>
             </a:pPr>
             <a:r>
@@ -4976,7 +4036,7 @@
       </p:sp>
       <p:sp>
         <p:nvSpPr>
-          <p:cNvPr id="25" name="Slide Number Placeholder 0"/>
+          <p:cNvPr id="29" name="Slide Number Placeholder 0"/>
           <p:cNvSpPr>
             <a:spLocks noGrp="1"/>
           </p:cNvSpPr>
@@ -4994,7 +4054,7 @@
           </a:prstGeom>
           <a:extLst>
             <a:ext uri="{C572A759-6A51-4108-AA02-DFA0A04FC94B}">
-              <ma14:wrappingTextBoxFlag xmlns:ma14="http://schemas.microsoft.com/office/mac/drawingml/2011/main" val="0"/>
+              <ma14:wrappingTextBoxFlag xmlns:ma14="http://schemas.microsoft.com/office/mac/drawingml/2011/main" xmlns="" val="0"/>
             </a:ext>
           </a:extLst>
         </p:spPr>
@@ -5012,7 +4072,7 @@
           <a:p>
             <a:pPr algn="r"/>
             <a:fld id="{F7021451-1387-4CA6-816F-3879F97B5CBC}" type="slidenum">
-              <a:rPr b="0" lang="en-US"/>
+              <a:rPr lang="en-US" b="0"/>
               <a:t>2</a:t>
             </a:fld>
             <a:endParaRPr lang="en-US"/>
@@ -5047,9 +4107,11 @@
       <p:sp>
         <p:nvSpPr>
           <p:cNvPr id="2" name="Text 0"/>
-          <p:cNvSpPr/>
+          <p:cNvSpPr>
+            <a:spLocks noGrp="1"/>
+          </p:cNvSpPr>
           <p:nvPr>
-            <p:ph idx="100" type="title" hasCustomPrompt="1"/>
+            <p:ph type="title" idx="100" hasCustomPrompt="1"/>
           </p:nvPr>
         </p:nvSpPr>
         <p:spPr>
@@ -5067,7 +4129,7 @@
           <a:bodyPr wrap="square" lIns="0" tIns="0" rIns="0" bIns="0" rtlCol="0" anchor="ctr"/>
           <a:lstStyle/>
           <a:p>
-            <a:pPr algn="l" indent="0" marL="0">
+            <a:pPr marL="0" indent="0" algn="l">
               <a:buNone/>
             </a:pPr>
             <a:r>
@@ -5103,7 +4165,7 @@
           <a:bodyPr wrap="square" lIns="0" tIns="0" rIns="0" bIns="0" rtlCol="0" anchor="t"/>
           <a:lstStyle/>
           <a:p>
-            <a:pPr indent="0" marL="0">
+            <a:pPr marL="0" indent="0">
               <a:spcAft>
                 <a:spcPts val="1000"/>
               </a:spcAft>
@@ -5211,6 +4273,13 @@
           </a:solidFill>
           <a:ln/>
         </p:spPr>
+        <p:txBody>
+          <a:bodyPr/>
+          <a:lstStyle/>
+          <a:p>
+            <a:endParaRPr lang="pt-BR"/>
+          </a:p>
+        </p:txBody>
       </p:sp>
       <p:sp>
         <p:nvSpPr>
@@ -5233,7 +4302,7 @@
           <a:bodyPr wrap="square" lIns="0" tIns="0" rIns="0" bIns="0" rtlCol="0" anchor="ctr"/>
           <a:lstStyle/>
           <a:p>
-            <a:pPr algn="ctr" indent="0" marL="0">
+            <a:pPr marL="0" indent="0" algn="ctr">
               <a:buNone/>
             </a:pPr>
             <a:r>
@@ -5269,6 +4338,13 @@
           </a:solidFill>
           <a:ln/>
         </p:spPr>
+        <p:txBody>
+          <a:bodyPr/>
+          <a:lstStyle/>
+          <a:p>
+            <a:endParaRPr lang="pt-BR"/>
+          </a:p>
+        </p:txBody>
       </p:sp>
       <p:sp>
         <p:nvSpPr>
@@ -5291,7 +4367,7 @@
           <a:bodyPr wrap="square" lIns="0" tIns="0" rIns="0" bIns="0" rtlCol="0" anchor="ctr"/>
           <a:lstStyle/>
           <a:p>
-            <a:pPr algn="ctr" indent="0" marL="0">
+            <a:pPr marL="0" indent="0" algn="ctr">
               <a:buNone/>
             </a:pPr>
             <a:r>
@@ -5327,6 +4403,13 @@
           </a:solidFill>
           <a:ln/>
         </p:spPr>
+        <p:txBody>
+          <a:bodyPr/>
+          <a:lstStyle/>
+          <a:p>
+            <a:endParaRPr lang="pt-BR"/>
+          </a:p>
+        </p:txBody>
       </p:sp>
       <p:sp>
         <p:nvSpPr>
@@ -5349,7 +4432,7 @@
           <a:bodyPr wrap="square" lIns="0" tIns="0" rIns="0" bIns="0" rtlCol="0" anchor="ctr"/>
           <a:lstStyle/>
           <a:p>
-            <a:pPr algn="ctr" indent="0" marL="0">
+            <a:pPr marL="0" indent="0" algn="ctr">
               <a:buNone/>
             </a:pPr>
             <a:r>
@@ -5385,6 +4468,13 @@
           </a:solidFill>
           <a:ln/>
         </p:spPr>
+        <p:txBody>
+          <a:bodyPr/>
+          <a:lstStyle/>
+          <a:p>
+            <a:endParaRPr lang="pt-BR"/>
+          </a:p>
+        </p:txBody>
       </p:sp>
       <p:sp>
         <p:nvSpPr>
@@ -5407,7 +4497,7 @@
           <a:bodyPr wrap="square" lIns="0" tIns="0" rIns="0" bIns="0" rtlCol="0" anchor="ctr"/>
           <a:lstStyle/>
           <a:p>
-            <a:pPr algn="ctr" indent="0" marL="0">
+            <a:pPr marL="0" indent="0" algn="ctr">
               <a:buNone/>
             </a:pPr>
             <a:r>
@@ -5443,13 +4533,20 @@
           </a:solidFill>
           <a:ln/>
           <a:effectLst>
-            <a:outerShdw sx="100000" sy="100000" kx="0" ky="0" algn="bl" rotWithShape="0" blurRad="76200" dist="25400" dir="5400000">
+            <a:outerShdw blurRad="76200" dist="25400" dir="5400000" algn="bl" rotWithShape="0">
               <a:srgbClr val="0F1E3D">
                 <a:alpha val="12000"/>
               </a:srgbClr>
             </a:outerShdw>
           </a:effectLst>
         </p:spPr>
+        <p:txBody>
+          <a:bodyPr/>
+          <a:lstStyle/>
+          <a:p>
+            <a:endParaRPr lang="pt-BR"/>
+          </a:p>
+        </p:txBody>
       </p:sp>
       <p:sp>
         <p:nvSpPr>
@@ -5472,7 +4569,7 @@
           <a:bodyPr wrap="square" lIns="0" tIns="0" rIns="0" bIns="0" rtlCol="0" anchor="ctr"/>
           <a:lstStyle/>
           <a:p>
-            <a:pPr algn="ctr" indent="0" marL="0">
+            <a:pPr marL="0" indent="0" algn="ctr">
               <a:buNone/>
             </a:pPr>
             <a:r>
@@ -5486,7 +4583,7 @@
             <a:endParaRPr lang="en-US" sz="1500" dirty="0"/>
           </a:p>
           <a:p>
-            <a:pPr algn="ctr" indent="0" marL="0">
+            <a:pPr marL="0" indent="0" algn="ctr">
               <a:buNone/>
             </a:pPr>
             <a:r>
@@ -5522,6 +4619,13 @@
           </a:solidFill>
           <a:ln/>
         </p:spPr>
+        <p:txBody>
+          <a:bodyPr/>
+          <a:lstStyle/>
+          <a:p>
+            <a:endParaRPr lang="pt-BR"/>
+          </a:p>
+        </p:txBody>
       </p:sp>
       <p:sp>
         <p:nvSpPr>
@@ -5544,7 +4648,7 @@
           <a:bodyPr wrap="square" lIns="0" tIns="0" rIns="0" bIns="0" rtlCol="0" anchor="ctr"/>
           <a:lstStyle/>
           <a:p>
-            <a:pPr algn="ctr" indent="0" marL="0">
+            <a:pPr marL="0" indent="0" algn="ctr">
               <a:buNone/>
             </a:pPr>
             <a:r>
@@ -5580,6 +4684,13 @@
           </a:solidFill>
           <a:ln/>
         </p:spPr>
+        <p:txBody>
+          <a:bodyPr/>
+          <a:lstStyle/>
+          <a:p>
+            <a:endParaRPr lang="pt-BR"/>
+          </a:p>
+        </p:txBody>
       </p:sp>
       <p:sp>
         <p:nvSpPr>
@@ -5602,7 +4713,7 @@
           <a:bodyPr wrap="square" lIns="0" tIns="0" rIns="0" bIns="0" rtlCol="0" anchor="ctr"/>
           <a:lstStyle/>
           <a:p>
-            <a:pPr algn="ctr" indent="0" marL="0">
+            <a:pPr marL="0" indent="0" algn="ctr">
               <a:buNone/>
             </a:pPr>
             <a:r>
@@ -5638,6 +4749,13 @@
           </a:solidFill>
           <a:ln/>
         </p:spPr>
+        <p:txBody>
+          <a:bodyPr/>
+          <a:lstStyle/>
+          <a:p>
+            <a:endParaRPr lang="pt-BR"/>
+          </a:p>
+        </p:txBody>
       </p:sp>
       <p:sp>
         <p:nvSpPr>
@@ -5660,7 +4778,7 @@
           <a:bodyPr wrap="square" lIns="0" tIns="0" rIns="0" bIns="0" rtlCol="0" anchor="ctr"/>
           <a:lstStyle/>
           <a:p>
-            <a:pPr algn="ctr" indent="0" marL="0">
+            <a:pPr marL="0" indent="0" algn="ctr">
               <a:buNone/>
             </a:pPr>
             <a:r>
@@ -5696,6 +4814,13 @@
           </a:solidFill>
           <a:ln/>
         </p:spPr>
+        <p:txBody>
+          <a:bodyPr/>
+          <a:lstStyle/>
+          <a:p>
+            <a:endParaRPr lang="pt-BR"/>
+          </a:p>
+        </p:txBody>
       </p:sp>
       <p:sp>
         <p:nvSpPr>
@@ -5718,7 +4843,7 @@
           <a:bodyPr wrap="square" lIns="0" tIns="0" rIns="0" bIns="0" rtlCol="0" anchor="ctr"/>
           <a:lstStyle/>
           <a:p>
-            <a:pPr algn="ctr" indent="0" marL="0">
+            <a:pPr marL="0" indent="0" algn="ctr">
               <a:buNone/>
             </a:pPr>
             <a:r>
@@ -5752,6 +4877,13 @@
           </a:solidFill>
           <a:ln/>
         </p:spPr>
+        <p:txBody>
+          <a:bodyPr/>
+          <a:lstStyle/>
+          <a:p>
+            <a:endParaRPr lang="pt-BR"/>
+          </a:p>
+        </p:txBody>
       </p:sp>
       <p:sp>
         <p:nvSpPr>
@@ -5772,6 +4904,13 @@
           </a:solidFill>
           <a:ln/>
         </p:spPr>
+        <p:txBody>
+          <a:bodyPr/>
+          <a:lstStyle/>
+          <a:p>
+            <a:endParaRPr lang="pt-BR"/>
+          </a:p>
+        </p:txBody>
       </p:sp>
       <p:sp>
         <p:nvSpPr>
@@ -5793,7 +4932,7 @@
           </a:prstGeom>
           <a:extLst>
             <a:ext uri="{C572A759-6A51-4108-AA02-DFA0A04FC94B}">
-              <ma14:wrappingTextBoxFlag xmlns:ma14="http://schemas.microsoft.com/office/mac/drawingml/2011/main" val="0"/>
+              <ma14:wrappingTextBoxFlag xmlns:ma14="http://schemas.microsoft.com/office/mac/drawingml/2011/main" xmlns="" val="0"/>
             </a:ext>
           </a:extLst>
         </p:spPr>
@@ -5811,7 +4950,7 @@
           <a:p>
             <a:pPr algn="r"/>
             <a:fld id="{F7021451-1387-4CA6-816F-3879F97B5CBC}" type="slidenum">
-              <a:rPr b="0" lang="en-US"/>
+              <a:rPr lang="en-US" b="0"/>
               <a:t>3</a:t>
             </a:fld>
             <a:endParaRPr lang="en-US"/>
@@ -5827,6 +4966,2451 @@
 </file>
 
 <file path=ppt/slides/slide4.xml><?xml version="1.0" encoding="utf-8"?>
+<p:sld xmlns:a="http://schemas.openxmlformats.org/drawingml/2006/main" xmlns:r="http://schemas.openxmlformats.org/officeDocument/2006/relationships" xmlns:p="http://schemas.openxmlformats.org/presentationml/2006/main">
+  <p:cSld name="Slide 7">
+    <p:spTree>
+      <p:nvGrpSpPr>
+        <p:cNvPr id="1" name=""/>
+        <p:cNvGrpSpPr/>
+        <p:nvPr/>
+      </p:nvGrpSpPr>
+      <p:grpSpPr>
+        <a:xfrm>
+          <a:off x="0" y="0"/>
+          <a:ext cx="0" cy="0"/>
+          <a:chOff x="0" y="0"/>
+          <a:chExt cx="0" cy="0"/>
+        </a:xfrm>
+      </p:grpSpPr>
+      <p:sp>
+        <p:nvSpPr>
+          <p:cNvPr id="2" name="Text 0"/>
+          <p:cNvSpPr>
+            <a:spLocks noGrp="1"/>
+          </p:cNvSpPr>
+          <p:nvPr>
+            <p:ph type="title" idx="100" hasCustomPrompt="1"/>
+          </p:nvPr>
+        </p:nvSpPr>
+        <p:spPr>
+          <a:xfrm>
+            <a:off x="457200" y="274320"/>
+            <a:ext cx="8229600" cy="594360"/>
+          </a:xfrm>
+          <a:prstGeom prst="rect">
+            <a:avLst/>
+          </a:prstGeom>
+          <a:noFill/>
+          <a:ln/>
+        </p:spPr>
+        <p:txBody>
+          <a:bodyPr wrap="square" lIns="0" tIns="0" rIns="0" bIns="0" rtlCol="0" anchor="ctr"/>
+          <a:lstStyle/>
+          <a:p>
+            <a:pPr marL="0" indent="0" algn="l">
+              <a:buNone/>
+            </a:pPr>
+            <a:r>
+              <a:rPr lang="en-US" sz="2200" b="1" dirty="0">
+                <a:solidFill>
+                  <a:schemeClr val="tx2"/>
+                </a:solidFill>
+              </a:rPr>
+              <a:t>Impacto qualitativo: cultura, segurança e escala</a:t>
+            </a:r>
+            <a:endParaRPr lang="en-US" sz="2200" dirty="0"/>
+          </a:p>
+        </p:txBody>
+      </p:sp>
+      <p:sp>
+        <p:nvSpPr>
+          <p:cNvPr id="3" name="Cultura (cartão)"/>
+          <p:cNvSpPr/>
+          <p:nvPr/>
+        </p:nvSpPr>
+        <p:spPr>
+          <a:xfrm>
+            <a:off x="457200" y="1097280"/>
+            <a:ext cx="2606040" cy="3429000"/>
+          </a:xfrm>
+          <a:prstGeom prst="roundRect">
+            <a:avLst>
+              <a:gd name="adj" fmla="val 4211"/>
+            </a:avLst>
+          </a:prstGeom>
+          <a:solidFill>
+            <a:schemeClr val="bg2"/>
+          </a:solidFill>
+          <a:ln/>
+          <a:effectLst>
+            <a:outerShdw blurRad="76200" dist="25400" dir="5400000" algn="bl" rotWithShape="0">
+              <a:srgbClr val="0F1E3D">
+                <a:alpha val="12000"/>
+              </a:srgbClr>
+            </a:outerShdw>
+          </a:effectLst>
+        </p:spPr>
+        <p:txBody>
+          <a:bodyPr/>
+          <a:lstStyle/>
+          <a:p>
+            <a:endParaRPr lang="pt-BR"/>
+          </a:p>
+        </p:txBody>
+      </p:sp>
+      <p:sp>
+        <p:nvSpPr>
+          <p:cNvPr id="4" name="Cultura (círculo)"/>
+          <p:cNvSpPr/>
+          <p:nvPr/>
+        </p:nvSpPr>
+        <p:spPr>
+          <a:xfrm>
+            <a:off x="685800" y="1280160"/>
+            <a:ext cx="548640" cy="548640"/>
+          </a:xfrm>
+          <a:prstGeom prst="ellipse">
+            <a:avLst/>
+          </a:prstGeom>
+          <a:solidFill>
+            <a:schemeClr val="accent1"/>
+          </a:solidFill>
+          <a:ln/>
+        </p:spPr>
+        <p:txBody>
+          <a:bodyPr/>
+          <a:lstStyle/>
+          <a:p>
+            <a:endParaRPr lang="pt-BR"/>
+          </a:p>
+        </p:txBody>
+      </p:sp>
+      <p:sp>
+        <p:nvSpPr>
+          <p:cNvPr id="5" name="Cultura (rótulo)"/>
+          <p:cNvSpPr txBox="1"/>
+          <p:nvPr/>
+        </p:nvSpPr>
+        <p:spPr>
+          <a:xfrm>
+            <a:off x="685800" y="1280160"/>
+            <a:ext cx="548640" cy="548640"/>
+          </a:xfrm>
+          <a:prstGeom prst="rect">
+            <a:avLst/>
+          </a:prstGeom>
+          <a:noFill/>
+          <a:ln/>
+        </p:spPr>
+        <p:txBody>
+          <a:bodyPr wrap="square" lIns="0" tIns="0" rIns="0" bIns="0" rtlCol="0" anchor="ctr"/>
+          <a:lstStyle/>
+          <a:p>
+            <a:pPr marL="0" indent="0" algn="ctr">
+              <a:buNone/>
+            </a:pPr>
+            <a:r>
+              <a:rPr lang="en-US" sz="1300" b="1" dirty="0">
+                <a:solidFill>
+                  <a:schemeClr val="bg1"/>
+                </a:solidFill>
+              </a:rPr>
+              <a:t>C</a:t>
+            </a:r>
+            <a:endParaRPr lang="en-US" sz="1300" dirty="0"/>
+          </a:p>
+        </p:txBody>
+      </p:sp>
+      <p:sp>
+        <p:nvSpPr>
+          <p:cNvPr id="6" name="Cultura (título)"/>
+          <p:cNvSpPr txBox="1"/>
+          <p:nvPr/>
+        </p:nvSpPr>
+        <p:spPr>
+          <a:xfrm>
+            <a:off x="685800" y="1938528"/>
+            <a:ext cx="2194560" cy="365760"/>
+          </a:xfrm>
+          <a:prstGeom prst="rect">
+            <a:avLst/>
+          </a:prstGeom>
+          <a:noFill/>
+          <a:ln/>
+        </p:spPr>
+        <p:txBody>
+          <a:bodyPr wrap="square" lIns="0" tIns="0" rIns="0" bIns="0" rtlCol="0" anchor="t"/>
+          <a:lstStyle/>
+          <a:p>
+            <a:pPr marL="0" indent="0">
+              <a:buNone/>
+            </a:pPr>
+            <a:r>
+              <a:rPr lang="en-US" sz="1800" b="1" dirty="0">
+                <a:solidFill>
+                  <a:schemeClr val="tx2"/>
+                </a:solidFill>
+              </a:rPr>
+              <a:t>Cultura</a:t>
+            </a:r>
+            <a:endParaRPr lang="en-US" sz="1800" dirty="0"/>
+          </a:p>
+        </p:txBody>
+      </p:sp>
+      <p:sp>
+        <p:nvSpPr>
+          <p:cNvPr id="7" name="Cultura (subtítulo)"/>
+          <p:cNvSpPr txBox="1"/>
+          <p:nvPr/>
+        </p:nvSpPr>
+        <p:spPr>
+          <a:xfrm>
+            <a:off x="685800" y="2304288"/>
+            <a:ext cx="2194560" cy="320040"/>
+          </a:xfrm>
+          <a:prstGeom prst="rect">
+            <a:avLst/>
+          </a:prstGeom>
+          <a:noFill/>
+          <a:ln/>
+        </p:spPr>
+        <p:txBody>
+          <a:bodyPr wrap="square" lIns="0" tIns="0" rIns="0" bIns="0" rtlCol="0" anchor="t"/>
+          <a:lstStyle/>
+          <a:p>
+            <a:pPr marL="0" indent="0">
+              <a:buNone/>
+            </a:pPr>
+            <a:r>
+              <a:rPr lang="en-US" sz="1200" i="1" dirty="0">
+                <a:solidFill>
+                  <a:schemeClr val="accent6"/>
+                </a:solidFill>
+              </a:rPr>
+              <a:t>Decisão baseada em dados</a:t>
+            </a:r>
+            <a:endParaRPr lang="en-US" sz="1200" dirty="0"/>
+          </a:p>
+        </p:txBody>
+      </p:sp>
+      <p:sp>
+        <p:nvSpPr>
+          <p:cNvPr id="8" name="Cultura (lista)"/>
+          <p:cNvSpPr txBox="1"/>
+          <p:nvPr/>
+        </p:nvSpPr>
+        <p:spPr>
+          <a:xfrm>
+            <a:off x="685800" y="2697480"/>
+            <a:ext cx="2240280" cy="1737360"/>
+          </a:xfrm>
+          <a:prstGeom prst="rect">
+            <a:avLst/>
+          </a:prstGeom>
+          <a:noFill/>
+          <a:ln/>
+        </p:spPr>
+        <p:txBody>
+          <a:bodyPr wrap="square" lIns="0" tIns="0" rIns="0" bIns="0" rtlCol="0" anchor="t"/>
+          <a:lstStyle/>
+          <a:p>
+            <a:pPr marL="342900" indent="-342900">
+              <a:spcAft>
+                <a:spcPts val="600"/>
+              </a:spcAft>
+              <a:buSzPct val="100000"/>
+              <a:buChar char="•"/>
+            </a:pPr>
+            <a:r>
+              <a:rPr lang="en-US" sz="1150" dirty="0">
+                <a:solidFill>
+                  <a:schemeClr val="tx1"/>
+                </a:solidFill>
+              </a:rPr>
+              <a:t>Diretoria consulta os números direto, sem esperar planilha</a:t>
+            </a:r>
+            <a:endParaRPr lang="en-US" sz="1150" dirty="0"/>
+          </a:p>
+          <a:p>
+            <a:pPr marL="342900" indent="-342900">
+              <a:spcAft>
+                <a:spcPts val="600"/>
+              </a:spcAft>
+              <a:buSzPct val="100000"/>
+              <a:buChar char="•"/>
+            </a:pPr>
+            <a:r>
+              <a:rPr lang="en-US" sz="1150" dirty="0">
+                <a:solidFill>
+                  <a:schemeClr val="tx1"/>
+                </a:solidFill>
+              </a:rPr>
+              <a:t>Mesma fonte para todos: fim das versões conflitantes</a:t>
+            </a:r>
+            <a:endParaRPr lang="en-US" sz="1150" dirty="0"/>
+          </a:p>
+          <a:p>
+            <a:pPr marL="342900" indent="-342900">
+              <a:spcAft>
+                <a:spcPts val="600"/>
+              </a:spcAft>
+              <a:buSzPct val="100000"/>
+              <a:buChar char="•"/>
+            </a:pPr>
+            <a:r>
+              <a:rPr lang="en-US" sz="1150" dirty="0">
+                <a:solidFill>
+                  <a:schemeClr val="tx1"/>
+                </a:solidFill>
+              </a:rPr>
+              <a:t>Equipe foca em análise, não em coleta</a:t>
+            </a:r>
+            <a:endParaRPr lang="en-US" sz="1150" dirty="0"/>
+          </a:p>
+        </p:txBody>
+      </p:sp>
+      <p:sp>
+        <p:nvSpPr>
+          <p:cNvPr id="9" name="Segurança (cartão)"/>
+          <p:cNvSpPr/>
+          <p:nvPr/>
+        </p:nvSpPr>
+        <p:spPr>
+          <a:xfrm>
+            <a:off x="3246120" y="1097280"/>
+            <a:ext cx="2606040" cy="3429000"/>
+          </a:xfrm>
+          <a:prstGeom prst="roundRect">
+            <a:avLst>
+              <a:gd name="adj" fmla="val 4211"/>
+            </a:avLst>
+          </a:prstGeom>
+          <a:solidFill>
+            <a:schemeClr val="bg2"/>
+          </a:solidFill>
+          <a:ln/>
+          <a:effectLst>
+            <a:outerShdw blurRad="76200" dist="25400" dir="5400000" algn="bl" rotWithShape="0">
+              <a:srgbClr val="0F1E3D">
+                <a:alpha val="12000"/>
+              </a:srgbClr>
+            </a:outerShdw>
+          </a:effectLst>
+        </p:spPr>
+        <p:txBody>
+          <a:bodyPr/>
+          <a:lstStyle/>
+          <a:p>
+            <a:endParaRPr lang="pt-BR"/>
+          </a:p>
+        </p:txBody>
+      </p:sp>
+      <p:sp>
+        <p:nvSpPr>
+          <p:cNvPr id="10" name="Segurança (círculo)"/>
+          <p:cNvSpPr/>
+          <p:nvPr/>
+        </p:nvSpPr>
+        <p:spPr>
+          <a:xfrm>
+            <a:off x="3474720" y="1280160"/>
+            <a:ext cx="548640" cy="548640"/>
+          </a:xfrm>
+          <a:prstGeom prst="ellipse">
+            <a:avLst/>
+          </a:prstGeom>
+          <a:solidFill>
+            <a:schemeClr val="accent2"/>
+          </a:solidFill>
+          <a:ln/>
+        </p:spPr>
+        <p:txBody>
+          <a:bodyPr/>
+          <a:lstStyle/>
+          <a:p>
+            <a:endParaRPr lang="pt-BR"/>
+          </a:p>
+        </p:txBody>
+      </p:sp>
+      <p:sp>
+        <p:nvSpPr>
+          <p:cNvPr id="11" name="Segurança (rótulo)"/>
+          <p:cNvSpPr txBox="1"/>
+          <p:nvPr/>
+        </p:nvSpPr>
+        <p:spPr>
+          <a:xfrm>
+            <a:off x="3474720" y="1280160"/>
+            <a:ext cx="548640" cy="548640"/>
+          </a:xfrm>
+          <a:prstGeom prst="rect">
+            <a:avLst/>
+          </a:prstGeom>
+          <a:noFill/>
+          <a:ln/>
+        </p:spPr>
+        <p:txBody>
+          <a:bodyPr wrap="square" lIns="0" tIns="0" rIns="0" bIns="0" rtlCol="0" anchor="ctr"/>
+          <a:lstStyle/>
+          <a:p>
+            <a:pPr marL="0" indent="0" algn="ctr">
+              <a:buNone/>
+            </a:pPr>
+            <a:r>
+              <a:rPr lang="en-US" sz="1300" b="1" dirty="0">
+                <a:solidFill>
+                  <a:schemeClr val="bg1"/>
+                </a:solidFill>
+              </a:rPr>
+              <a:t>S</a:t>
+            </a:r>
+            <a:endParaRPr lang="en-US" sz="1300" dirty="0"/>
+          </a:p>
+        </p:txBody>
+      </p:sp>
+      <p:sp>
+        <p:nvSpPr>
+          <p:cNvPr id="12" name="Segurança (título)"/>
+          <p:cNvSpPr txBox="1"/>
+          <p:nvPr/>
+        </p:nvSpPr>
+        <p:spPr>
+          <a:xfrm>
+            <a:off x="3474720" y="1938528"/>
+            <a:ext cx="2194560" cy="365760"/>
+          </a:xfrm>
+          <a:prstGeom prst="rect">
+            <a:avLst/>
+          </a:prstGeom>
+          <a:noFill/>
+          <a:ln/>
+        </p:spPr>
+        <p:txBody>
+          <a:bodyPr wrap="square" lIns="0" tIns="0" rIns="0" bIns="0" rtlCol="0" anchor="t"/>
+          <a:lstStyle/>
+          <a:p>
+            <a:pPr marL="0" indent="0">
+              <a:buNone/>
+            </a:pPr>
+            <a:r>
+              <a:rPr lang="en-US" sz="1800" b="1" dirty="0">
+                <a:solidFill>
+                  <a:schemeClr val="tx2"/>
+                </a:solidFill>
+              </a:rPr>
+              <a:t>Segurança</a:t>
+            </a:r>
+            <a:endParaRPr lang="en-US" sz="1800" dirty="0"/>
+          </a:p>
+        </p:txBody>
+      </p:sp>
+      <p:sp>
+        <p:nvSpPr>
+          <p:cNvPr id="13" name="Segurança (subtítulo)"/>
+          <p:cNvSpPr txBox="1"/>
+          <p:nvPr/>
+        </p:nvSpPr>
+        <p:spPr>
+          <a:xfrm>
+            <a:off x="3474720" y="2304288"/>
+            <a:ext cx="2194560" cy="320040"/>
+          </a:xfrm>
+          <a:prstGeom prst="rect">
+            <a:avLst/>
+          </a:prstGeom>
+          <a:noFill/>
+          <a:ln/>
+        </p:spPr>
+        <p:txBody>
+          <a:bodyPr wrap="square" lIns="0" tIns="0" rIns="0" bIns="0" rtlCol="0" anchor="t"/>
+          <a:lstStyle/>
+          <a:p>
+            <a:pPr marL="0" indent="0">
+              <a:buNone/>
+            </a:pPr>
+            <a:r>
+              <a:rPr lang="en-US" sz="1200" i="1" dirty="0">
+                <a:solidFill>
+                  <a:schemeClr val="accent6"/>
+                </a:solidFill>
+              </a:rPr>
+              <a:t>Acesso controlado e LGPD</a:t>
+            </a:r>
+            <a:endParaRPr lang="en-US" sz="1200" dirty="0"/>
+          </a:p>
+        </p:txBody>
+      </p:sp>
+      <p:sp>
+        <p:nvSpPr>
+          <p:cNvPr id="14" name="Segurança (lista)"/>
+          <p:cNvSpPr txBox="1"/>
+          <p:nvPr/>
+        </p:nvSpPr>
+        <p:spPr>
+          <a:xfrm>
+            <a:off x="3474720" y="2697480"/>
+            <a:ext cx="2240280" cy="1737360"/>
+          </a:xfrm>
+          <a:prstGeom prst="rect">
+            <a:avLst/>
+          </a:prstGeom>
+          <a:noFill/>
+          <a:ln/>
+        </p:spPr>
+        <p:txBody>
+          <a:bodyPr wrap="square" lIns="0" tIns="0" rIns="0" bIns="0" rtlCol="0" anchor="t"/>
+          <a:lstStyle/>
+          <a:p>
+            <a:pPr marL="342900" indent="-342900">
+              <a:spcAft>
+                <a:spcPts val="600"/>
+              </a:spcAft>
+              <a:buSzPct val="100000"/>
+              <a:buChar char="•"/>
+            </a:pPr>
+            <a:r>
+              <a:rPr lang="en-US" sz="1150" dirty="0">
+                <a:solidFill>
+                  <a:schemeClr val="tx1"/>
+                </a:solidFill>
+              </a:rPr>
+              <a:t>Login individual e permissão por seção</a:t>
+            </a:r>
+            <a:endParaRPr lang="en-US" sz="1150" dirty="0"/>
+          </a:p>
+          <a:p>
+            <a:pPr marL="342900" indent="-342900">
+              <a:spcAft>
+                <a:spcPts val="600"/>
+              </a:spcAft>
+              <a:buSzPct val="100000"/>
+              <a:buChar char="•"/>
+            </a:pPr>
+            <a:r>
+              <a:rPr lang="en-US" sz="1150" dirty="0">
+                <a:solidFill>
+                  <a:schemeClr val="tx1"/>
+                </a:solidFill>
+              </a:rPr>
+              <a:t>Regras de acesso por linha no banco (RLS)</a:t>
+            </a:r>
+            <a:endParaRPr lang="en-US" sz="1150" dirty="0"/>
+          </a:p>
+          <a:p>
+            <a:pPr marL="342900" indent="-342900">
+              <a:spcAft>
+                <a:spcPts val="600"/>
+              </a:spcAft>
+              <a:buSzPct val="100000"/>
+              <a:buChar char="•"/>
+            </a:pPr>
+            <a:r>
+              <a:rPr lang="en-US" sz="1150" dirty="0">
+                <a:solidFill>
+                  <a:schemeClr val="tx1"/>
+                </a:solidFill>
+              </a:rPr>
+              <a:t>Dados pessoais de formulários protegidos</a:t>
+            </a:r>
+            <a:endParaRPr lang="en-US" sz="1150" dirty="0"/>
+          </a:p>
+        </p:txBody>
+      </p:sp>
+      <p:sp>
+        <p:nvSpPr>
+          <p:cNvPr id="15" name="Escala (cartão)"/>
+          <p:cNvSpPr/>
+          <p:nvPr/>
+        </p:nvSpPr>
+        <p:spPr>
+          <a:xfrm>
+            <a:off x="6035040" y="1097280"/>
+            <a:ext cx="2606040" cy="3429000"/>
+          </a:xfrm>
+          <a:prstGeom prst="roundRect">
+            <a:avLst>
+              <a:gd name="adj" fmla="val 4211"/>
+            </a:avLst>
+          </a:prstGeom>
+          <a:solidFill>
+            <a:schemeClr val="bg2"/>
+          </a:solidFill>
+          <a:ln/>
+          <a:effectLst>
+            <a:outerShdw blurRad="76200" dist="25400" dir="5400000" algn="bl" rotWithShape="0">
+              <a:srgbClr val="0F1E3D">
+                <a:alpha val="12000"/>
+              </a:srgbClr>
+            </a:outerShdw>
+          </a:effectLst>
+        </p:spPr>
+        <p:txBody>
+          <a:bodyPr/>
+          <a:lstStyle/>
+          <a:p>
+            <a:endParaRPr lang="pt-BR"/>
+          </a:p>
+        </p:txBody>
+      </p:sp>
+      <p:sp>
+        <p:nvSpPr>
+          <p:cNvPr id="16" name="Escala (círculo)"/>
+          <p:cNvSpPr/>
+          <p:nvPr/>
+        </p:nvSpPr>
+        <p:spPr>
+          <a:xfrm>
+            <a:off x="6263640" y="1280160"/>
+            <a:ext cx="548640" cy="548640"/>
+          </a:xfrm>
+          <a:prstGeom prst="ellipse">
+            <a:avLst/>
+          </a:prstGeom>
+          <a:solidFill>
+            <a:schemeClr val="accent4"/>
+          </a:solidFill>
+          <a:ln/>
+        </p:spPr>
+        <p:txBody>
+          <a:bodyPr/>
+          <a:lstStyle/>
+          <a:p>
+            <a:endParaRPr lang="pt-BR"/>
+          </a:p>
+        </p:txBody>
+      </p:sp>
+      <p:sp>
+        <p:nvSpPr>
+          <p:cNvPr id="17" name="Escala (rótulo)"/>
+          <p:cNvSpPr txBox="1"/>
+          <p:nvPr/>
+        </p:nvSpPr>
+        <p:spPr>
+          <a:xfrm>
+            <a:off x="6263640" y="1280160"/>
+            <a:ext cx="548640" cy="548640"/>
+          </a:xfrm>
+          <a:prstGeom prst="rect">
+            <a:avLst/>
+          </a:prstGeom>
+          <a:noFill/>
+          <a:ln/>
+        </p:spPr>
+        <p:txBody>
+          <a:bodyPr wrap="square" lIns="0" tIns="0" rIns="0" bIns="0" rtlCol="0" anchor="ctr"/>
+          <a:lstStyle/>
+          <a:p>
+            <a:pPr marL="0" indent="0" algn="ctr">
+              <a:buNone/>
+            </a:pPr>
+            <a:r>
+              <a:rPr lang="en-US" sz="1300" b="1" dirty="0">
+                <a:solidFill>
+                  <a:schemeClr val="bg1"/>
+                </a:solidFill>
+              </a:rPr>
+              <a:t>E</a:t>
+            </a:r>
+            <a:endParaRPr lang="en-US" sz="1300" dirty="0"/>
+          </a:p>
+        </p:txBody>
+      </p:sp>
+      <p:sp>
+        <p:nvSpPr>
+          <p:cNvPr id="18" name="Escala (título)"/>
+          <p:cNvSpPr txBox="1"/>
+          <p:nvPr/>
+        </p:nvSpPr>
+        <p:spPr>
+          <a:xfrm>
+            <a:off x="6263640" y="1938528"/>
+            <a:ext cx="2194560" cy="365760"/>
+          </a:xfrm>
+          <a:prstGeom prst="rect">
+            <a:avLst/>
+          </a:prstGeom>
+          <a:noFill/>
+          <a:ln/>
+        </p:spPr>
+        <p:txBody>
+          <a:bodyPr wrap="square" lIns="0" tIns="0" rIns="0" bIns="0" rtlCol="0" anchor="t"/>
+          <a:lstStyle/>
+          <a:p>
+            <a:pPr marL="0" indent="0">
+              <a:buNone/>
+            </a:pPr>
+            <a:r>
+              <a:rPr lang="en-US" sz="1800" b="1" dirty="0">
+                <a:solidFill>
+                  <a:schemeClr val="tx2"/>
+                </a:solidFill>
+              </a:rPr>
+              <a:t>Escala</a:t>
+            </a:r>
+            <a:endParaRPr lang="en-US" sz="1800" dirty="0"/>
+          </a:p>
+        </p:txBody>
+      </p:sp>
+      <p:sp>
+        <p:nvSpPr>
+          <p:cNvPr id="19" name="Escala (subtítulo)"/>
+          <p:cNvSpPr txBox="1"/>
+          <p:nvPr/>
+        </p:nvSpPr>
+        <p:spPr>
+          <a:xfrm>
+            <a:off x="6263640" y="2304288"/>
+            <a:ext cx="2194560" cy="320040"/>
+          </a:xfrm>
+          <a:prstGeom prst="rect">
+            <a:avLst/>
+          </a:prstGeom>
+          <a:noFill/>
+          <a:ln/>
+        </p:spPr>
+        <p:txBody>
+          <a:bodyPr wrap="square" lIns="0" tIns="0" rIns="0" bIns="0" rtlCol="0" anchor="t"/>
+          <a:lstStyle/>
+          <a:p>
+            <a:pPr marL="0" indent="0">
+              <a:buNone/>
+            </a:pPr>
+            <a:r>
+              <a:rPr lang="en-US" sz="1200" i="1" dirty="0">
+                <a:solidFill>
+                  <a:schemeClr val="accent6"/>
+                </a:solidFill>
+              </a:rPr>
+              <a:t>Cresce sem custo proporcional</a:t>
+            </a:r>
+            <a:endParaRPr lang="en-US" sz="1200" dirty="0"/>
+          </a:p>
+        </p:txBody>
+      </p:sp>
+      <p:sp>
+        <p:nvSpPr>
+          <p:cNvPr id="20" name="Escala (lista)"/>
+          <p:cNvSpPr txBox="1"/>
+          <p:nvPr/>
+        </p:nvSpPr>
+        <p:spPr>
+          <a:xfrm>
+            <a:off x="6263640" y="2697480"/>
+            <a:ext cx="2240280" cy="1737360"/>
+          </a:xfrm>
+          <a:prstGeom prst="rect">
+            <a:avLst/>
+          </a:prstGeom>
+          <a:noFill/>
+          <a:ln/>
+        </p:spPr>
+        <p:txBody>
+          <a:bodyPr wrap="square" lIns="0" tIns="0" rIns="0" bIns="0" rtlCol="0" anchor="t"/>
+          <a:lstStyle/>
+          <a:p>
+            <a:pPr marL="342900" indent="-342900">
+              <a:spcAft>
+                <a:spcPts val="600"/>
+              </a:spcAft>
+              <a:buSzPct val="100000"/>
+              <a:buChar char="•"/>
+            </a:pPr>
+            <a:r>
+              <a:rPr lang="en-US" sz="1150" dirty="0">
+                <a:solidFill>
+                  <a:schemeClr val="tx1"/>
+                </a:solidFill>
+              </a:rPr>
+              <a:t>Novos usuários sem nova licença por pessoa</a:t>
+            </a:r>
+            <a:endParaRPr lang="en-US" sz="1150" dirty="0"/>
+          </a:p>
+          <a:p>
+            <a:pPr marL="342900" indent="-342900">
+              <a:spcAft>
+                <a:spcPts val="600"/>
+              </a:spcAft>
+              <a:buSzPct val="100000"/>
+              <a:buChar char="•"/>
+            </a:pPr>
+            <a:r>
+              <a:rPr lang="en-US" sz="1150" dirty="0">
+                <a:solidFill>
+                  <a:schemeClr val="tx1"/>
+                </a:solidFill>
+              </a:rPr>
+              <a:t>Novos indicadores entram no mesmo painel</a:t>
+            </a:r>
+            <a:endParaRPr lang="en-US" sz="1150" dirty="0"/>
+          </a:p>
+          <a:p>
+            <a:pPr marL="342900" indent="-342900">
+              <a:spcAft>
+                <a:spcPts val="600"/>
+              </a:spcAft>
+              <a:buSzPct val="100000"/>
+              <a:buChar char="•"/>
+            </a:pPr>
+            <a:r>
+              <a:rPr lang="en-US" sz="1150" dirty="0">
+                <a:solidFill>
+                  <a:schemeClr val="tx1"/>
+                </a:solidFill>
+              </a:rPr>
+              <a:t>Base para atender outras CDLs (consultoria)</a:t>
+            </a:r>
+            <a:endParaRPr lang="en-US" sz="1150" dirty="0"/>
+          </a:p>
+        </p:txBody>
+      </p:sp>
+      <p:sp>
+        <p:nvSpPr>
+          <p:cNvPr id="25" name="Slide Number Placeholder 0"/>
+          <p:cNvSpPr>
+            <a:spLocks noGrp="1"/>
+          </p:cNvSpPr>
+          <p:nvPr>
+            <p:ph type="sldNum" sz="quarter" idx="4294967295"/>
+          </p:nvPr>
+        </p:nvSpPr>
+        <p:spPr>
+          <a:xfrm>
+            <a:off x="8321040" y="4773168"/>
+            <a:ext cx="365760" cy="228600"/>
+          </a:xfrm>
+          <a:prstGeom prst="rect">
+            <a:avLst/>
+          </a:prstGeom>
+          <a:extLst>
+            <a:ext uri="{C572A759-6A51-4108-AA02-DFA0A04FC94B}">
+              <ma14:wrappingTextBoxFlag xmlns:ma14="http://schemas.microsoft.com/office/mac/drawingml/2011/main" xmlns="" val="0"/>
+            </a:ext>
+          </a:extLst>
+        </p:spPr>
+        <p:txBody>
+          <a:bodyPr/>
+          <a:lstStyle>
+            <a:lvl1pPr>
+              <a:defRPr sz="900">
+                <a:solidFill>
+                  <a:schemeClr val="accent6"/>
+                </a:solidFill>
+              </a:defRPr>
+            </a:lvl1pPr>
+          </a:lstStyle>
+          <a:p>
+            <a:pPr algn="r"/>
+            <a:fld id="{F7021451-1387-4CA6-816F-3879F97B5CBC}" type="slidenum">
+              <a:rPr lang="en-US" b="0"/>
+              <a:t>4</a:t>
+            </a:fld>
+            <a:endParaRPr lang="en-US"/>
+          </a:p>
+        </p:txBody>
+      </p:sp>
+    </p:spTree>
+  </p:cSld>
+  <p:clrMapOvr>
+    <a:masterClrMapping/>
+  </p:clrMapOvr>
+</p:sld>
+</file>
+
+<file path=ppt/slides/slide5.xml><?xml version="1.0" encoding="utf-8"?>
+<p:sld xmlns:a="http://schemas.openxmlformats.org/drawingml/2006/main" xmlns:r="http://schemas.openxmlformats.org/officeDocument/2006/relationships" xmlns:p="http://schemas.openxmlformats.org/presentationml/2006/main">
+  <p:cSld name="Slide 8">
+    <p:spTree>
+      <p:nvGrpSpPr>
+        <p:cNvPr id="1" name=""/>
+        <p:cNvGrpSpPr/>
+        <p:nvPr/>
+      </p:nvGrpSpPr>
+      <p:grpSpPr>
+        <a:xfrm>
+          <a:off x="0" y="0"/>
+          <a:ext cx="0" cy="0"/>
+          <a:chOff x="0" y="0"/>
+          <a:chExt cx="0" cy="0"/>
+        </a:xfrm>
+      </p:grpSpPr>
+      <p:sp>
+        <p:nvSpPr>
+          <p:cNvPr id="2" name="Text 0"/>
+          <p:cNvSpPr>
+            <a:spLocks noGrp="1"/>
+          </p:cNvSpPr>
+          <p:nvPr>
+            <p:ph type="title" idx="100" hasCustomPrompt="1"/>
+          </p:nvPr>
+        </p:nvSpPr>
+        <p:spPr>
+          <a:xfrm>
+            <a:off x="457200" y="274320"/>
+            <a:ext cx="8229600" cy="594360"/>
+          </a:xfrm>
+          <a:prstGeom prst="rect">
+            <a:avLst/>
+          </a:prstGeom>
+          <a:noFill/>
+          <a:ln/>
+        </p:spPr>
+        <p:txBody>
+          <a:bodyPr wrap="square" lIns="0" tIns="0" rIns="0" bIns="0" rtlCol="0" anchor="ctr"/>
+          <a:lstStyle/>
+          <a:p>
+            <a:pPr marL="0" indent="0" algn="l">
+              <a:buNone/>
+            </a:pPr>
+            <a:r>
+              <a:rPr lang="en-US" sz="2200" b="1" dirty="0">
+                <a:solidFill>
+                  <a:schemeClr val="tx2"/>
+                </a:solidFill>
+              </a:rPr>
+              <a:t>Plano de implementação e cronograma</a:t>
+            </a:r>
+            <a:endParaRPr lang="en-US" sz="2200" dirty="0"/>
+          </a:p>
+        </p:txBody>
+      </p:sp>
+      <p:sp>
+        <p:nvSpPr>
+          <p:cNvPr id="3" name="Linha do tempo"/>
+          <p:cNvSpPr/>
+          <p:nvPr/>
+        </p:nvSpPr>
+        <p:spPr>
+          <a:xfrm>
+            <a:off x="731520" y="1691640"/>
+            <a:ext cx="7680960" cy="0"/>
+          </a:xfrm>
+          <a:prstGeom prst="line">
+            <a:avLst/>
+          </a:prstGeom>
+          <a:noFill/>
+          <a:ln w="38100">
+            <a:solidFill>
+              <a:schemeClr val="accent3"/>
+            </a:solidFill>
+            <a:prstDash val="solid"/>
+          </a:ln>
+        </p:spPr>
+        <p:txBody>
+          <a:bodyPr/>
+          <a:lstStyle/>
+          <a:p>
+            <a:endParaRPr lang="pt-BR"/>
+          </a:p>
+        </p:txBody>
+      </p:sp>
+      <p:sp>
+        <p:nvSpPr>
+          <p:cNvPr id="4" name="Fase 1 (marco)"/>
+          <p:cNvSpPr/>
+          <p:nvPr/>
+        </p:nvSpPr>
+        <p:spPr>
+          <a:xfrm>
+            <a:off x="1261872" y="1536192"/>
+            <a:ext cx="310896" cy="310896"/>
+          </a:xfrm>
+          <a:prstGeom prst="ellipse">
+            <a:avLst/>
+          </a:prstGeom>
+          <a:solidFill>
+            <a:schemeClr val="accent2"/>
+          </a:solidFill>
+          <a:ln w="25400">
+            <a:solidFill>
+              <a:schemeClr val="bg1"/>
+            </a:solidFill>
+            <a:prstDash val="solid"/>
+          </a:ln>
+        </p:spPr>
+        <p:txBody>
+          <a:bodyPr/>
+          <a:lstStyle/>
+          <a:p>
+            <a:endParaRPr lang="pt-BR"/>
+          </a:p>
+        </p:txBody>
+      </p:sp>
+      <p:sp>
+        <p:nvSpPr>
+          <p:cNvPr id="5" name="Fase 1 (período)"/>
+          <p:cNvSpPr txBox="1"/>
+          <p:nvPr/>
+        </p:nvSpPr>
+        <p:spPr>
+          <a:xfrm>
+            <a:off x="457200" y="1051560"/>
+            <a:ext cx="1920240" cy="320040"/>
+          </a:xfrm>
+          <a:prstGeom prst="rect">
+            <a:avLst/>
+          </a:prstGeom>
+          <a:noFill/>
+          <a:ln/>
+        </p:spPr>
+        <p:txBody>
+          <a:bodyPr wrap="square" lIns="0" tIns="0" rIns="0" bIns="0" rtlCol="0" anchor="t"/>
+          <a:lstStyle/>
+          <a:p>
+            <a:pPr marL="0" indent="0" algn="ctr">
+              <a:buNone/>
+            </a:pPr>
+            <a:r>
+              <a:rPr lang="en-US" sz="1100" b="1" dirty="0">
+                <a:solidFill>
+                  <a:schemeClr val="accent6"/>
+                </a:solidFill>
+              </a:rPr>
+              <a:t>Fase 1 · Out/2026</a:t>
+            </a:r>
+            <a:endParaRPr lang="en-US" sz="1100" dirty="0"/>
+          </a:p>
+        </p:txBody>
+      </p:sp>
+      <p:sp>
+        <p:nvSpPr>
+          <p:cNvPr id="6" name="Fase 1 (cartão)"/>
+          <p:cNvSpPr/>
+          <p:nvPr/>
+        </p:nvSpPr>
+        <p:spPr>
+          <a:xfrm>
+            <a:off x="457200" y="2057400"/>
+            <a:ext cx="1920240" cy="2468880"/>
+          </a:xfrm>
+          <a:prstGeom prst="roundRect">
+            <a:avLst>
+              <a:gd name="adj" fmla="val 5714"/>
+            </a:avLst>
+          </a:prstGeom>
+          <a:solidFill>
+            <a:schemeClr val="bg2"/>
+          </a:solidFill>
+          <a:ln/>
+          <a:effectLst>
+            <a:outerShdw blurRad="76200" dist="25400" dir="5400000" algn="bl" rotWithShape="0">
+              <a:srgbClr val="0F1E3D">
+                <a:alpha val="12000"/>
+              </a:srgbClr>
+            </a:outerShdw>
+          </a:effectLst>
+        </p:spPr>
+        <p:txBody>
+          <a:bodyPr/>
+          <a:lstStyle/>
+          <a:p>
+            <a:endParaRPr lang="pt-BR"/>
+          </a:p>
+        </p:txBody>
+      </p:sp>
+      <p:sp>
+        <p:nvSpPr>
+          <p:cNvPr id="7" name="Fase 1 (nome)"/>
+          <p:cNvSpPr txBox="1"/>
+          <p:nvPr/>
+        </p:nvSpPr>
+        <p:spPr>
+          <a:xfrm>
+            <a:off x="621792" y="2176272"/>
+            <a:ext cx="1645920" cy="365760"/>
+          </a:xfrm>
+          <a:prstGeom prst="rect">
+            <a:avLst/>
+          </a:prstGeom>
+          <a:noFill/>
+          <a:ln/>
+        </p:spPr>
+        <p:txBody>
+          <a:bodyPr wrap="square" lIns="0" tIns="0" rIns="0" bIns="0" rtlCol="0" anchor="t"/>
+          <a:lstStyle/>
+          <a:p>
+            <a:pPr marL="0" indent="0">
+              <a:buNone/>
+            </a:pPr>
+            <a:r>
+              <a:rPr lang="en-US" sz="1600" b="1" dirty="0">
+                <a:solidFill>
+                  <a:schemeClr val="tx2"/>
+                </a:solidFill>
+              </a:rPr>
+              <a:t>Fundação</a:t>
+            </a:r>
+            <a:endParaRPr lang="en-US" sz="1600" dirty="0"/>
+          </a:p>
+        </p:txBody>
+      </p:sp>
+      <p:sp>
+        <p:nvSpPr>
+          <p:cNvPr id="8" name="Fase 1 (status, fundo)"/>
+          <p:cNvSpPr/>
+          <p:nvPr/>
+        </p:nvSpPr>
+        <p:spPr>
+          <a:xfrm>
+            <a:off x="621792" y="2578608"/>
+            <a:ext cx="1143000" cy="274320"/>
+          </a:xfrm>
+          <a:prstGeom prst="roundRect">
+            <a:avLst>
+              <a:gd name="adj" fmla="val 26667"/>
+            </a:avLst>
+          </a:prstGeom>
+          <a:solidFill>
+            <a:schemeClr val="accent2"/>
+          </a:solidFill>
+          <a:ln/>
+        </p:spPr>
+        <p:txBody>
+          <a:bodyPr/>
+          <a:lstStyle/>
+          <a:p>
+            <a:endParaRPr lang="pt-BR"/>
+          </a:p>
+        </p:txBody>
+      </p:sp>
+      <p:sp>
+        <p:nvSpPr>
+          <p:cNvPr id="9" name="Fase 1 (status)"/>
+          <p:cNvSpPr txBox="1"/>
+          <p:nvPr/>
+        </p:nvSpPr>
+        <p:spPr>
+          <a:xfrm>
+            <a:off x="621792" y="2578608"/>
+            <a:ext cx="1143000" cy="274320"/>
+          </a:xfrm>
+          <a:prstGeom prst="rect">
+            <a:avLst/>
+          </a:prstGeom>
+          <a:noFill/>
+          <a:ln/>
+        </p:spPr>
+        <p:txBody>
+          <a:bodyPr wrap="square" lIns="0" tIns="0" rIns="0" bIns="0" rtlCol="0" anchor="ctr"/>
+          <a:lstStyle/>
+          <a:p>
+            <a:pPr marL="0" indent="0" algn="ctr">
+              <a:buNone/>
+            </a:pPr>
+            <a:r>
+              <a:rPr lang="en-US" sz="1000" b="1" dirty="0">
+                <a:solidFill>
+                  <a:schemeClr val="bg1"/>
+                </a:solidFill>
+              </a:rPr>
+              <a:t>Concluída</a:t>
+            </a:r>
+            <a:endParaRPr lang="en-US" sz="1000" dirty="0"/>
+          </a:p>
+        </p:txBody>
+      </p:sp>
+      <p:sp>
+        <p:nvSpPr>
+          <p:cNvPr id="10" name="Fase 1 (entregas)"/>
+          <p:cNvSpPr txBox="1"/>
+          <p:nvPr/>
+        </p:nvSpPr>
+        <p:spPr>
+          <a:xfrm>
+            <a:off x="566928" y="2971800"/>
+            <a:ext cx="1737360" cy="1463040"/>
+          </a:xfrm>
+          <a:prstGeom prst="rect">
+            <a:avLst/>
+          </a:prstGeom>
+          <a:noFill/>
+          <a:ln/>
+        </p:spPr>
+        <p:txBody>
+          <a:bodyPr wrap="square" lIns="0" tIns="0" rIns="0" bIns="0" rtlCol="0" anchor="t"/>
+          <a:lstStyle/>
+          <a:p>
+            <a:pPr marL="171450" indent="-171450">
+              <a:spcAft>
+                <a:spcPts val="400"/>
+              </a:spcAft>
+              <a:buSzPct val="100000"/>
+              <a:buFont typeface="Arial" panose="020B0604020202020204" pitchFamily="34" charset="0"/>
+              <a:buChar char="•"/>
+            </a:pPr>
+            <a:r>
+              <a:rPr lang="en-US" sz="1100" dirty="0">
+                <a:solidFill>
+                  <a:schemeClr val="tx1"/>
+                </a:solidFill>
+              </a:rPr>
+              <a:t>Plataforma com login</a:t>
+            </a:r>
+            <a:endParaRPr lang="en-US" sz="1100" dirty="0"/>
+          </a:p>
+          <a:p>
+            <a:pPr marL="171450" indent="-171450">
+              <a:spcAft>
+                <a:spcPts val="400"/>
+              </a:spcAft>
+              <a:buSzPct val="100000"/>
+              <a:buFont typeface="Arial" panose="020B0604020202020204" pitchFamily="34" charset="0"/>
+              <a:buChar char="•"/>
+            </a:pPr>
+            <a:r>
+              <a:rPr lang="en-US" sz="1100" dirty="0">
+                <a:solidFill>
+                  <a:schemeClr val="tx1"/>
+                </a:solidFill>
+              </a:rPr>
+              <a:t>Dashboard Panorama Econ.</a:t>
+            </a:r>
+            <a:endParaRPr lang="en-US" sz="1100" dirty="0"/>
+          </a:p>
+          <a:p>
+            <a:pPr marL="171450" indent="-171450">
+              <a:spcAft>
+                <a:spcPts val="400"/>
+              </a:spcAft>
+              <a:buSzPct val="100000"/>
+              <a:buFont typeface="Arial" panose="020B0604020202020204" pitchFamily="34" charset="0"/>
+              <a:buChar char="•"/>
+            </a:pPr>
+            <a:r>
+              <a:rPr lang="en-US" sz="1100" dirty="0" err="1">
+                <a:solidFill>
+                  <a:schemeClr val="tx1"/>
+                </a:solidFill>
+              </a:rPr>
+              <a:t>Relatórios</a:t>
+            </a:r>
+            <a:r>
+              <a:rPr lang="en-US" sz="1100" dirty="0">
+                <a:solidFill>
+                  <a:schemeClr val="tx1"/>
+                </a:solidFill>
+              </a:rPr>
+              <a:t> (</a:t>
+            </a:r>
+            <a:r>
+              <a:rPr lang="en-US" sz="1100" dirty="0" err="1">
+                <a:solidFill>
+                  <a:schemeClr val="tx1"/>
+                </a:solidFill>
+              </a:rPr>
+              <a:t>documentação</a:t>
+            </a:r>
+            <a:r>
+              <a:rPr lang="en-US" sz="1100" dirty="0">
+                <a:solidFill>
+                  <a:schemeClr val="tx1"/>
+                </a:solidFill>
+              </a:rPr>
+              <a:t>)</a:t>
+            </a:r>
+          </a:p>
+          <a:p>
+            <a:pPr marL="171450" indent="-171450">
+              <a:spcAft>
+                <a:spcPts val="400"/>
+              </a:spcAft>
+              <a:buSzPct val="100000"/>
+              <a:buFont typeface="Arial" panose="020B0604020202020204" pitchFamily="34" charset="0"/>
+              <a:buChar char="•"/>
+            </a:pPr>
+            <a:r>
+              <a:rPr lang="en-US" sz="1100" dirty="0">
+                <a:solidFill>
+                  <a:schemeClr val="tx1"/>
+                </a:solidFill>
+              </a:rPr>
+              <a:t>Clipping News</a:t>
+            </a:r>
+          </a:p>
+          <a:p>
+            <a:pPr marL="171450" indent="-171450">
+              <a:spcAft>
+                <a:spcPts val="400"/>
+              </a:spcAft>
+              <a:buSzPct val="100000"/>
+              <a:buFont typeface="Arial" panose="020B0604020202020204" pitchFamily="34" charset="0"/>
+              <a:buChar char="•"/>
+            </a:pPr>
+            <a:r>
+              <a:rPr lang="en-US" sz="1100" dirty="0">
+                <a:solidFill>
+                  <a:schemeClr val="tx1"/>
+                </a:solidFill>
+              </a:rPr>
+              <a:t>Survey</a:t>
+            </a:r>
+            <a:r>
+              <a:rPr lang="en-US" sz="1100" dirty="0"/>
+              <a:t> e</a:t>
+            </a:r>
+            <a:r>
+              <a:rPr lang="en-US" sz="1100" dirty="0">
+                <a:solidFill>
+                  <a:schemeClr val="tx1"/>
+                </a:solidFill>
+              </a:rPr>
+              <a:t> Estoque</a:t>
+            </a:r>
+          </a:p>
+          <a:p>
+            <a:pPr marL="171450" indent="-171450">
+              <a:spcAft>
+                <a:spcPts val="400"/>
+              </a:spcAft>
+              <a:buSzPct val="100000"/>
+              <a:buFont typeface="Arial" panose="020B0604020202020204" pitchFamily="34" charset="0"/>
+              <a:buChar char="•"/>
+            </a:pPr>
+            <a:r>
+              <a:rPr lang="en-US" sz="1100" dirty="0"/>
+              <a:t>Controle de Estoque</a:t>
+            </a:r>
+          </a:p>
+        </p:txBody>
+      </p:sp>
+      <p:sp>
+        <p:nvSpPr>
+          <p:cNvPr id="11" name="Fase 2 (marco)"/>
+          <p:cNvSpPr/>
+          <p:nvPr/>
+        </p:nvSpPr>
+        <p:spPr>
+          <a:xfrm>
+            <a:off x="3364992" y="1536192"/>
+            <a:ext cx="310896" cy="310896"/>
+          </a:xfrm>
+          <a:prstGeom prst="ellipse">
+            <a:avLst/>
+          </a:prstGeom>
+          <a:solidFill>
+            <a:schemeClr val="accent1"/>
+          </a:solidFill>
+          <a:ln w="25400">
+            <a:solidFill>
+              <a:schemeClr val="bg1"/>
+            </a:solidFill>
+            <a:prstDash val="solid"/>
+          </a:ln>
+        </p:spPr>
+        <p:txBody>
+          <a:bodyPr/>
+          <a:lstStyle/>
+          <a:p>
+            <a:endParaRPr lang="pt-BR"/>
+          </a:p>
+        </p:txBody>
+      </p:sp>
+      <p:sp>
+        <p:nvSpPr>
+          <p:cNvPr id="12" name="Fase 2 (período)"/>
+          <p:cNvSpPr txBox="1"/>
+          <p:nvPr/>
+        </p:nvSpPr>
+        <p:spPr>
+          <a:xfrm>
+            <a:off x="2560320" y="1051560"/>
+            <a:ext cx="1920240" cy="320040"/>
+          </a:xfrm>
+          <a:prstGeom prst="rect">
+            <a:avLst/>
+          </a:prstGeom>
+          <a:noFill/>
+          <a:ln/>
+        </p:spPr>
+        <p:txBody>
+          <a:bodyPr wrap="square" lIns="0" tIns="0" rIns="0" bIns="0" rtlCol="0" anchor="t"/>
+          <a:lstStyle/>
+          <a:p>
+            <a:pPr marL="0" indent="0" algn="ctr">
+              <a:buNone/>
+            </a:pPr>
+            <a:r>
+              <a:rPr lang="en-US" sz="1100" b="1" dirty="0">
+                <a:solidFill>
+                  <a:schemeClr val="accent6"/>
+                </a:solidFill>
+              </a:rPr>
+              <a:t>Fase 2 · Nov/2026</a:t>
+            </a:r>
+            <a:endParaRPr lang="en-US" sz="1100" dirty="0"/>
+          </a:p>
+        </p:txBody>
+      </p:sp>
+      <p:sp>
+        <p:nvSpPr>
+          <p:cNvPr id="13" name="Fase 2 (cartão)"/>
+          <p:cNvSpPr/>
+          <p:nvPr/>
+        </p:nvSpPr>
+        <p:spPr>
+          <a:xfrm>
+            <a:off x="2560320" y="2057400"/>
+            <a:ext cx="1920240" cy="2468880"/>
+          </a:xfrm>
+          <a:prstGeom prst="roundRect">
+            <a:avLst>
+              <a:gd name="adj" fmla="val 5714"/>
+            </a:avLst>
+          </a:prstGeom>
+          <a:solidFill>
+            <a:schemeClr val="bg2"/>
+          </a:solidFill>
+          <a:ln/>
+          <a:effectLst>
+            <a:outerShdw blurRad="76200" dist="25400" dir="5400000" algn="bl" rotWithShape="0">
+              <a:srgbClr val="0F1E3D">
+                <a:alpha val="12000"/>
+              </a:srgbClr>
+            </a:outerShdw>
+          </a:effectLst>
+        </p:spPr>
+        <p:txBody>
+          <a:bodyPr/>
+          <a:lstStyle/>
+          <a:p>
+            <a:endParaRPr lang="pt-BR"/>
+          </a:p>
+        </p:txBody>
+      </p:sp>
+      <p:sp>
+        <p:nvSpPr>
+          <p:cNvPr id="14" name="Fase 2 (nome)"/>
+          <p:cNvSpPr txBox="1"/>
+          <p:nvPr/>
+        </p:nvSpPr>
+        <p:spPr>
+          <a:xfrm>
+            <a:off x="2724912" y="2176272"/>
+            <a:ext cx="1645920" cy="365760"/>
+          </a:xfrm>
+          <a:prstGeom prst="rect">
+            <a:avLst/>
+          </a:prstGeom>
+          <a:noFill/>
+          <a:ln/>
+        </p:spPr>
+        <p:txBody>
+          <a:bodyPr wrap="square" lIns="0" tIns="0" rIns="0" bIns="0" rtlCol="0" anchor="t"/>
+          <a:lstStyle/>
+          <a:p>
+            <a:pPr marL="0" indent="0">
+              <a:buNone/>
+            </a:pPr>
+            <a:r>
+              <a:rPr lang="en-US" sz="1600" b="1" dirty="0">
+                <a:solidFill>
+                  <a:schemeClr val="tx2"/>
+                </a:solidFill>
+              </a:rPr>
+              <a:t>Consolidação</a:t>
+            </a:r>
+            <a:endParaRPr lang="en-US" sz="1600" dirty="0"/>
+          </a:p>
+        </p:txBody>
+      </p:sp>
+      <p:sp>
+        <p:nvSpPr>
+          <p:cNvPr id="17" name="Fase 2 (entregas)"/>
+          <p:cNvSpPr txBox="1"/>
+          <p:nvPr/>
+        </p:nvSpPr>
+        <p:spPr>
+          <a:xfrm>
+            <a:off x="2670048" y="2971800"/>
+            <a:ext cx="1737360" cy="1463040"/>
+          </a:xfrm>
+          <a:prstGeom prst="rect">
+            <a:avLst/>
+          </a:prstGeom>
+          <a:noFill/>
+          <a:ln/>
+        </p:spPr>
+        <p:txBody>
+          <a:bodyPr wrap="square" lIns="0" tIns="0" rIns="0" bIns="0" rtlCol="0" anchor="t"/>
+          <a:lstStyle/>
+          <a:p>
+            <a:pPr marL="171450" indent="-171450">
+              <a:spcAft>
+                <a:spcPts val="400"/>
+              </a:spcAft>
+              <a:buSzPct val="100000"/>
+              <a:buFont typeface="Arial" panose="020B0604020202020204" pitchFamily="34" charset="0"/>
+              <a:buChar char="•"/>
+            </a:pPr>
+            <a:r>
+              <a:rPr lang="en-US" sz="1100" dirty="0">
+                <a:solidFill>
+                  <a:schemeClr val="tx1"/>
+                </a:solidFill>
+              </a:rPr>
+              <a:t>Survey em tempo real</a:t>
+            </a:r>
+            <a:endParaRPr lang="en-US" sz="1100" dirty="0"/>
+          </a:p>
+          <a:p>
+            <a:pPr marL="171450" indent="-171450">
+              <a:spcAft>
+                <a:spcPts val="400"/>
+              </a:spcAft>
+              <a:buSzPct val="100000"/>
+              <a:buFont typeface="Arial" panose="020B0604020202020204" pitchFamily="34" charset="0"/>
+              <a:buChar char="•"/>
+            </a:pPr>
+            <a:r>
+              <a:rPr lang="en-US" sz="1100" dirty="0">
+                <a:solidFill>
+                  <a:schemeClr val="tx1"/>
+                </a:solidFill>
+              </a:rPr>
+              <a:t>Mapa de empresas por CEP</a:t>
+            </a:r>
+            <a:endParaRPr lang="en-US" sz="1100" dirty="0"/>
+          </a:p>
+          <a:p>
+            <a:pPr marL="171450" indent="-171450">
+              <a:spcAft>
+                <a:spcPts val="400"/>
+              </a:spcAft>
+              <a:buSzPct val="100000"/>
+              <a:buFont typeface="Arial" panose="020B0604020202020204" pitchFamily="34" charset="0"/>
+              <a:buChar char="•"/>
+            </a:pPr>
+            <a:r>
+              <a:rPr lang="en-US" sz="1100" dirty="0">
+                <a:solidFill>
+                  <a:schemeClr val="tx1"/>
+                </a:solidFill>
+              </a:rPr>
+              <a:t>Testes e organização do Código</a:t>
+            </a:r>
+          </a:p>
+          <a:p>
+            <a:pPr marL="171450" indent="-171450">
+              <a:spcAft>
+                <a:spcPts val="400"/>
+              </a:spcAft>
+              <a:buSzPct val="100000"/>
+              <a:buFont typeface="Arial" panose="020B0604020202020204" pitchFamily="34" charset="0"/>
+              <a:buChar char="•"/>
+            </a:pPr>
+            <a:r>
+              <a:rPr lang="en-US" sz="1100" dirty="0" err="1"/>
+              <a:t>Implementação</a:t>
+            </a:r>
+            <a:r>
+              <a:rPr lang="en-US" sz="1100" dirty="0"/>
+              <a:t> do Estoque</a:t>
+            </a:r>
+          </a:p>
+          <a:p>
+            <a:pPr marL="171450" indent="-171450">
+              <a:spcAft>
+                <a:spcPts val="400"/>
+              </a:spcAft>
+              <a:buSzPct val="100000"/>
+              <a:buFont typeface="Arial" panose="020B0604020202020204" pitchFamily="34" charset="0"/>
+              <a:buChar char="•"/>
+            </a:pPr>
+            <a:r>
+              <a:rPr lang="en-US" sz="1100" dirty="0" err="1"/>
+              <a:t>Gerador</a:t>
+            </a:r>
+            <a:r>
+              <a:rPr lang="en-US" sz="1100" dirty="0"/>
+              <a:t> de </a:t>
+            </a:r>
+            <a:r>
+              <a:rPr lang="en-US" sz="1100" dirty="0" err="1"/>
+              <a:t>Relatórios</a:t>
+            </a:r>
+            <a:r>
+              <a:rPr lang="en-US" sz="1100" dirty="0"/>
+              <a:t> (pdf)</a:t>
+            </a:r>
+          </a:p>
+        </p:txBody>
+      </p:sp>
+      <p:sp>
+        <p:nvSpPr>
+          <p:cNvPr id="18" name="Fase 3 (marco)"/>
+          <p:cNvSpPr/>
+          <p:nvPr/>
+        </p:nvSpPr>
+        <p:spPr>
+          <a:xfrm>
+            <a:off x="5468112" y="1536192"/>
+            <a:ext cx="310896" cy="310896"/>
+          </a:xfrm>
+          <a:prstGeom prst="ellipse">
+            <a:avLst/>
+          </a:prstGeom>
+          <a:solidFill>
+            <a:schemeClr val="accent4"/>
+          </a:solidFill>
+          <a:ln w="25400">
+            <a:solidFill>
+              <a:schemeClr val="bg1"/>
+            </a:solidFill>
+            <a:prstDash val="solid"/>
+          </a:ln>
+        </p:spPr>
+        <p:txBody>
+          <a:bodyPr/>
+          <a:lstStyle/>
+          <a:p>
+            <a:endParaRPr lang="pt-BR"/>
+          </a:p>
+        </p:txBody>
+      </p:sp>
+      <p:sp>
+        <p:nvSpPr>
+          <p:cNvPr id="19" name="Fase 3 (período)"/>
+          <p:cNvSpPr txBox="1"/>
+          <p:nvPr/>
+        </p:nvSpPr>
+        <p:spPr>
+          <a:xfrm>
+            <a:off x="4663440" y="1051560"/>
+            <a:ext cx="1920240" cy="320040"/>
+          </a:xfrm>
+          <a:prstGeom prst="rect">
+            <a:avLst/>
+          </a:prstGeom>
+          <a:noFill/>
+          <a:ln/>
+        </p:spPr>
+        <p:txBody>
+          <a:bodyPr wrap="square" lIns="0" tIns="0" rIns="0" bIns="0" rtlCol="0" anchor="t"/>
+          <a:lstStyle/>
+          <a:p>
+            <a:pPr marL="0" indent="0" algn="ctr">
+              <a:buNone/>
+            </a:pPr>
+            <a:r>
+              <a:rPr lang="en-US" sz="1100" b="1" dirty="0">
+                <a:solidFill>
+                  <a:schemeClr val="accent6"/>
+                </a:solidFill>
+              </a:rPr>
+              <a:t>Fase 3 · Dez/2027</a:t>
+            </a:r>
+            <a:endParaRPr lang="en-US" sz="1100" dirty="0"/>
+          </a:p>
+        </p:txBody>
+      </p:sp>
+      <p:sp>
+        <p:nvSpPr>
+          <p:cNvPr id="20" name="Fase 3 (cartão)"/>
+          <p:cNvSpPr/>
+          <p:nvPr/>
+        </p:nvSpPr>
+        <p:spPr>
+          <a:xfrm>
+            <a:off x="4663440" y="2057400"/>
+            <a:ext cx="1920240" cy="2468880"/>
+          </a:xfrm>
+          <a:prstGeom prst="roundRect">
+            <a:avLst>
+              <a:gd name="adj" fmla="val 5714"/>
+            </a:avLst>
+          </a:prstGeom>
+          <a:solidFill>
+            <a:schemeClr val="bg2"/>
+          </a:solidFill>
+          <a:ln/>
+          <a:effectLst>
+            <a:outerShdw blurRad="76200" dist="25400" dir="5400000" algn="bl" rotWithShape="0">
+              <a:srgbClr val="0F1E3D">
+                <a:alpha val="12000"/>
+              </a:srgbClr>
+            </a:outerShdw>
+          </a:effectLst>
+        </p:spPr>
+        <p:txBody>
+          <a:bodyPr/>
+          <a:lstStyle/>
+          <a:p>
+            <a:endParaRPr lang="pt-BR"/>
+          </a:p>
+        </p:txBody>
+      </p:sp>
+      <p:sp>
+        <p:nvSpPr>
+          <p:cNvPr id="21" name="Fase 3 (nome)"/>
+          <p:cNvSpPr txBox="1"/>
+          <p:nvPr/>
+        </p:nvSpPr>
+        <p:spPr>
+          <a:xfrm>
+            <a:off x="4828032" y="2176272"/>
+            <a:ext cx="1645920" cy="365760"/>
+          </a:xfrm>
+          <a:prstGeom prst="rect">
+            <a:avLst/>
+          </a:prstGeom>
+          <a:noFill/>
+          <a:ln/>
+        </p:spPr>
+        <p:txBody>
+          <a:bodyPr wrap="square" lIns="0" tIns="0" rIns="0" bIns="0" rtlCol="0" anchor="t"/>
+          <a:lstStyle/>
+          <a:p>
+            <a:pPr marL="0" indent="0">
+              <a:buNone/>
+            </a:pPr>
+            <a:r>
+              <a:rPr lang="en-US" sz="1600" b="1" dirty="0">
+                <a:solidFill>
+                  <a:schemeClr val="tx2"/>
+                </a:solidFill>
+              </a:rPr>
+              <a:t>Expansão</a:t>
+            </a:r>
+            <a:endParaRPr lang="en-US" sz="1600" dirty="0"/>
+          </a:p>
+        </p:txBody>
+      </p:sp>
+      <p:sp>
+        <p:nvSpPr>
+          <p:cNvPr id="22" name="Fase 3 (status, fundo)"/>
+          <p:cNvSpPr/>
+          <p:nvPr/>
+        </p:nvSpPr>
+        <p:spPr>
+          <a:xfrm>
+            <a:off x="4828032" y="2578608"/>
+            <a:ext cx="1143000" cy="274320"/>
+          </a:xfrm>
+          <a:prstGeom prst="roundRect">
+            <a:avLst>
+              <a:gd name="adj" fmla="val 26667"/>
+            </a:avLst>
+          </a:prstGeom>
+          <a:solidFill>
+            <a:schemeClr val="accent4"/>
+          </a:solidFill>
+          <a:ln/>
+        </p:spPr>
+        <p:txBody>
+          <a:bodyPr/>
+          <a:lstStyle/>
+          <a:p>
+            <a:endParaRPr lang="pt-BR"/>
+          </a:p>
+        </p:txBody>
+      </p:sp>
+      <p:sp>
+        <p:nvSpPr>
+          <p:cNvPr id="23" name="Fase 3 (status)"/>
+          <p:cNvSpPr txBox="1"/>
+          <p:nvPr/>
+        </p:nvSpPr>
+        <p:spPr>
+          <a:xfrm>
+            <a:off x="4828032" y="2578608"/>
+            <a:ext cx="1143000" cy="274320"/>
+          </a:xfrm>
+          <a:prstGeom prst="rect">
+            <a:avLst/>
+          </a:prstGeom>
+          <a:noFill/>
+          <a:ln/>
+        </p:spPr>
+        <p:txBody>
+          <a:bodyPr wrap="square" lIns="0" tIns="0" rIns="0" bIns="0" rtlCol="0" anchor="ctr"/>
+          <a:lstStyle/>
+          <a:p>
+            <a:pPr marL="0" indent="0" algn="ctr">
+              <a:buNone/>
+            </a:pPr>
+            <a:r>
+              <a:rPr lang="en-US" sz="1000" b="1" dirty="0">
+                <a:solidFill>
+                  <a:schemeClr val="bg1"/>
+                </a:solidFill>
+              </a:rPr>
+              <a:t>Planejada</a:t>
+            </a:r>
+            <a:endParaRPr lang="en-US" sz="1000" dirty="0"/>
+          </a:p>
+        </p:txBody>
+      </p:sp>
+      <p:sp>
+        <p:nvSpPr>
+          <p:cNvPr id="24" name="Fase 3 (entregas)"/>
+          <p:cNvSpPr txBox="1"/>
+          <p:nvPr/>
+        </p:nvSpPr>
+        <p:spPr>
+          <a:xfrm>
+            <a:off x="4773168" y="2971800"/>
+            <a:ext cx="1737360" cy="1463040"/>
+          </a:xfrm>
+          <a:prstGeom prst="rect">
+            <a:avLst/>
+          </a:prstGeom>
+          <a:noFill/>
+          <a:ln/>
+        </p:spPr>
+        <p:txBody>
+          <a:bodyPr wrap="square" lIns="0" tIns="0" rIns="0" bIns="0" rtlCol="0" anchor="t"/>
+          <a:lstStyle/>
+          <a:p>
+            <a:pPr marL="171450" indent="-171450">
+              <a:spcAft>
+                <a:spcPts val="400"/>
+              </a:spcAft>
+              <a:buSzPct val="100000"/>
+              <a:buFont typeface="Arial" panose="020B0604020202020204" pitchFamily="34" charset="0"/>
+              <a:buChar char="•"/>
+            </a:pPr>
+            <a:r>
+              <a:rPr lang="en-US" sz="1100" dirty="0">
+                <a:solidFill>
+                  <a:schemeClr val="tx1"/>
+                </a:solidFill>
+              </a:rPr>
+              <a:t>WhatsApp e campanhas</a:t>
+            </a:r>
+            <a:endParaRPr lang="en-US" sz="1100" dirty="0"/>
+          </a:p>
+          <a:p>
+            <a:pPr marL="171450" indent="-171450">
+              <a:spcAft>
+                <a:spcPts val="400"/>
+              </a:spcAft>
+              <a:buSzPct val="100000"/>
+              <a:buFont typeface="Arial" panose="020B0604020202020204" pitchFamily="34" charset="0"/>
+              <a:buChar char="•"/>
+            </a:pPr>
+            <a:r>
+              <a:rPr lang="en-US" sz="1100" dirty="0" err="1">
+                <a:solidFill>
+                  <a:schemeClr val="tx1"/>
+                </a:solidFill>
+              </a:rPr>
+              <a:t>Treinamento</a:t>
+            </a:r>
+            <a:r>
+              <a:rPr lang="en-US" sz="1100" dirty="0">
+                <a:solidFill>
+                  <a:schemeClr val="tx1"/>
+                </a:solidFill>
+              </a:rPr>
+              <a:t> das </a:t>
+            </a:r>
+            <a:r>
+              <a:rPr lang="en-US" sz="1100" dirty="0" err="1">
+                <a:solidFill>
+                  <a:schemeClr val="tx1"/>
+                </a:solidFill>
+              </a:rPr>
+              <a:t>áreas</a:t>
+            </a:r>
+            <a:endParaRPr lang="en-US" sz="1100" dirty="0">
+              <a:solidFill>
+                <a:schemeClr val="tx1"/>
+              </a:solidFill>
+            </a:endParaRPr>
+          </a:p>
+          <a:p>
+            <a:pPr marL="171450" indent="-171450">
+              <a:spcAft>
+                <a:spcPts val="400"/>
+              </a:spcAft>
+              <a:buSzPct val="100000"/>
+              <a:buFont typeface="Arial" panose="020B0604020202020204" pitchFamily="34" charset="0"/>
+              <a:buChar char="•"/>
+            </a:pPr>
+            <a:r>
+              <a:rPr lang="en-US" sz="1100" dirty="0" err="1"/>
+              <a:t>Aprovar</a:t>
+            </a:r>
+            <a:r>
+              <a:rPr lang="en-US" sz="1100" dirty="0"/>
+              <a:t> </a:t>
+            </a:r>
+            <a:r>
+              <a:rPr lang="en-US" sz="1100" dirty="0" err="1"/>
+              <a:t>apresentação</a:t>
+            </a:r>
+            <a:r>
+              <a:rPr lang="en-US" sz="1100" dirty="0"/>
+              <a:t> official </a:t>
+            </a:r>
+            <a:r>
+              <a:rPr lang="en-US" sz="1100" dirty="0" err="1"/>
+              <a:t>ao</a:t>
+            </a:r>
+            <a:r>
+              <a:rPr lang="en-US" sz="1100" dirty="0"/>
+              <a:t> time</a:t>
+            </a:r>
+          </a:p>
+          <a:p>
+            <a:pPr marL="171450" indent="-171450">
+              <a:spcAft>
+                <a:spcPts val="400"/>
+              </a:spcAft>
+              <a:buSzPct val="100000"/>
+              <a:buFont typeface="Arial" panose="020B0604020202020204" pitchFamily="34" charset="0"/>
+              <a:buChar char="•"/>
+            </a:pPr>
+            <a:r>
+              <a:rPr lang="en-US" sz="1100" dirty="0" err="1"/>
+              <a:t>Aprovar</a:t>
+            </a:r>
+            <a:r>
+              <a:rPr lang="en-US" sz="1100" dirty="0"/>
+              <a:t> </a:t>
+            </a:r>
+            <a:r>
+              <a:rPr lang="en-US" sz="1100" dirty="0" err="1"/>
+              <a:t>Orçamento</a:t>
+            </a:r>
+            <a:endParaRPr lang="en-US" sz="1100" dirty="0"/>
+          </a:p>
+          <a:p>
+            <a:pPr marL="171450" indent="-171450">
+              <a:spcAft>
+                <a:spcPts val="400"/>
+              </a:spcAft>
+              <a:buSzPct val="100000"/>
+              <a:buFont typeface="Arial" panose="020B0604020202020204" pitchFamily="34" charset="0"/>
+              <a:buChar char="•"/>
+            </a:pPr>
+            <a:r>
+              <a:rPr lang="en-US" sz="1100" dirty="0" err="1"/>
+              <a:t>Autorizar</a:t>
+            </a:r>
+            <a:r>
+              <a:rPr lang="en-US" sz="1100" dirty="0"/>
+              <a:t> </a:t>
+            </a:r>
+            <a:r>
+              <a:rPr lang="en-US" sz="1100" dirty="0" err="1"/>
+              <a:t>oferta</a:t>
+            </a:r>
+            <a:r>
+              <a:rPr lang="en-US" sz="1100" dirty="0"/>
+              <a:t> externa</a:t>
+            </a:r>
+          </a:p>
+        </p:txBody>
+      </p:sp>
+      <p:sp>
+        <p:nvSpPr>
+          <p:cNvPr id="25" name="Fase 4 (marco)"/>
+          <p:cNvSpPr/>
+          <p:nvPr/>
+        </p:nvSpPr>
+        <p:spPr>
+          <a:xfrm>
+            <a:off x="7571232" y="1536192"/>
+            <a:ext cx="310896" cy="310896"/>
+          </a:xfrm>
+          <a:prstGeom prst="ellipse">
+            <a:avLst/>
+          </a:prstGeom>
+          <a:solidFill>
+            <a:schemeClr val="accent6"/>
+          </a:solidFill>
+          <a:ln w="25400">
+            <a:solidFill>
+              <a:schemeClr val="bg1"/>
+            </a:solidFill>
+            <a:prstDash val="solid"/>
+          </a:ln>
+        </p:spPr>
+        <p:txBody>
+          <a:bodyPr/>
+          <a:lstStyle/>
+          <a:p>
+            <a:endParaRPr lang="pt-BR"/>
+          </a:p>
+        </p:txBody>
+      </p:sp>
+      <p:sp>
+        <p:nvSpPr>
+          <p:cNvPr id="26" name="Fase 4 (período)"/>
+          <p:cNvSpPr txBox="1"/>
+          <p:nvPr/>
+        </p:nvSpPr>
+        <p:spPr>
+          <a:xfrm>
+            <a:off x="6766560" y="1051560"/>
+            <a:ext cx="1920240" cy="320040"/>
+          </a:xfrm>
+          <a:prstGeom prst="rect">
+            <a:avLst/>
+          </a:prstGeom>
+          <a:noFill/>
+          <a:ln/>
+        </p:spPr>
+        <p:txBody>
+          <a:bodyPr wrap="square" lIns="0" tIns="0" rIns="0" bIns="0" rtlCol="0" anchor="t"/>
+          <a:lstStyle/>
+          <a:p>
+            <a:pPr marL="0" indent="0" algn="ctr">
+              <a:buNone/>
+            </a:pPr>
+            <a:r>
+              <a:rPr lang="en-US" sz="1100" b="1" dirty="0">
+                <a:solidFill>
+                  <a:schemeClr val="accent6"/>
+                </a:solidFill>
+              </a:rPr>
+              <a:t>Fase 4 · 2º tri/2027</a:t>
+            </a:r>
+            <a:endParaRPr lang="en-US" sz="1100" dirty="0"/>
+          </a:p>
+        </p:txBody>
+      </p:sp>
+      <p:sp>
+        <p:nvSpPr>
+          <p:cNvPr id="27" name="Fase 4 (cartão)"/>
+          <p:cNvSpPr/>
+          <p:nvPr/>
+        </p:nvSpPr>
+        <p:spPr>
+          <a:xfrm>
+            <a:off x="6766560" y="2057400"/>
+            <a:ext cx="1920240" cy="2468880"/>
+          </a:xfrm>
+          <a:prstGeom prst="roundRect">
+            <a:avLst>
+              <a:gd name="adj" fmla="val 5714"/>
+            </a:avLst>
+          </a:prstGeom>
+          <a:solidFill>
+            <a:schemeClr val="bg2"/>
+          </a:solidFill>
+          <a:ln/>
+          <a:effectLst>
+            <a:outerShdw blurRad="76200" dist="25400" dir="5400000" algn="bl" rotWithShape="0">
+              <a:srgbClr val="0F1E3D">
+                <a:alpha val="12000"/>
+              </a:srgbClr>
+            </a:outerShdw>
+          </a:effectLst>
+        </p:spPr>
+        <p:txBody>
+          <a:bodyPr/>
+          <a:lstStyle/>
+          <a:p>
+            <a:endParaRPr lang="pt-BR"/>
+          </a:p>
+        </p:txBody>
+      </p:sp>
+      <p:sp>
+        <p:nvSpPr>
+          <p:cNvPr id="28" name="Fase 4 (nome)"/>
+          <p:cNvSpPr txBox="1"/>
+          <p:nvPr/>
+        </p:nvSpPr>
+        <p:spPr>
+          <a:xfrm>
+            <a:off x="6931152" y="2176272"/>
+            <a:ext cx="1645920" cy="365760"/>
+          </a:xfrm>
+          <a:prstGeom prst="rect">
+            <a:avLst/>
+          </a:prstGeom>
+          <a:noFill/>
+          <a:ln/>
+        </p:spPr>
+        <p:txBody>
+          <a:bodyPr wrap="square" lIns="0" tIns="0" rIns="0" bIns="0" rtlCol="0" anchor="t"/>
+          <a:lstStyle/>
+          <a:p>
+            <a:pPr marL="0" indent="0">
+              <a:buNone/>
+            </a:pPr>
+            <a:r>
+              <a:rPr lang="en-US" sz="1600" b="1" dirty="0">
+                <a:solidFill>
+                  <a:schemeClr val="tx2"/>
+                </a:solidFill>
+              </a:rPr>
+              <a:t>Escala</a:t>
+            </a:r>
+            <a:endParaRPr lang="en-US" sz="1600" dirty="0"/>
+          </a:p>
+        </p:txBody>
+      </p:sp>
+      <p:sp>
+        <p:nvSpPr>
+          <p:cNvPr id="29" name="Fase 4 (status, fundo)"/>
+          <p:cNvSpPr/>
+          <p:nvPr/>
+        </p:nvSpPr>
+        <p:spPr>
+          <a:xfrm>
+            <a:off x="6931152" y="2578608"/>
+            <a:ext cx="1143000" cy="274320"/>
+          </a:xfrm>
+          <a:prstGeom prst="roundRect">
+            <a:avLst>
+              <a:gd name="adj" fmla="val 26667"/>
+            </a:avLst>
+          </a:prstGeom>
+          <a:solidFill>
+            <a:schemeClr val="accent6"/>
+          </a:solidFill>
+          <a:ln/>
+        </p:spPr>
+        <p:txBody>
+          <a:bodyPr/>
+          <a:lstStyle/>
+          <a:p>
+            <a:endParaRPr lang="pt-BR"/>
+          </a:p>
+        </p:txBody>
+      </p:sp>
+      <p:sp>
+        <p:nvSpPr>
+          <p:cNvPr id="30" name="Fase 4 (status)"/>
+          <p:cNvSpPr txBox="1"/>
+          <p:nvPr/>
+        </p:nvSpPr>
+        <p:spPr>
+          <a:xfrm>
+            <a:off x="6931152" y="2578608"/>
+            <a:ext cx="1143000" cy="274320"/>
+          </a:xfrm>
+          <a:prstGeom prst="rect">
+            <a:avLst/>
+          </a:prstGeom>
+          <a:noFill/>
+          <a:ln/>
+        </p:spPr>
+        <p:txBody>
+          <a:bodyPr wrap="square" lIns="0" tIns="0" rIns="0" bIns="0" rtlCol="0" anchor="ctr"/>
+          <a:lstStyle/>
+          <a:p>
+            <a:pPr marL="0" indent="0" algn="ctr">
+              <a:buNone/>
+            </a:pPr>
+            <a:r>
+              <a:rPr lang="en-US" sz="1000" b="1" dirty="0">
+                <a:solidFill>
+                  <a:schemeClr val="bg1"/>
+                </a:solidFill>
+              </a:rPr>
+              <a:t>Planejada</a:t>
+            </a:r>
+            <a:endParaRPr lang="en-US" sz="1000" dirty="0"/>
+          </a:p>
+        </p:txBody>
+      </p:sp>
+      <p:sp>
+        <p:nvSpPr>
+          <p:cNvPr id="31" name="Fase 4 (entregas)"/>
+          <p:cNvSpPr txBox="1"/>
+          <p:nvPr/>
+        </p:nvSpPr>
+        <p:spPr>
+          <a:xfrm>
+            <a:off x="6876288" y="2971800"/>
+            <a:ext cx="1737360" cy="1463040"/>
+          </a:xfrm>
+          <a:prstGeom prst="rect">
+            <a:avLst/>
+          </a:prstGeom>
+          <a:noFill/>
+          <a:ln/>
+        </p:spPr>
+        <p:txBody>
+          <a:bodyPr wrap="square" lIns="0" tIns="0" rIns="0" bIns="0" rtlCol="0" anchor="t"/>
+          <a:lstStyle/>
+          <a:p>
+            <a:pPr marL="342900" indent="-342900">
+              <a:spcAft>
+                <a:spcPts val="400"/>
+              </a:spcAft>
+              <a:buSzPct val="100000"/>
+              <a:buChar char="•"/>
+            </a:pPr>
+            <a:r>
+              <a:rPr lang="en-US" sz="1100" dirty="0">
+                <a:solidFill>
+                  <a:schemeClr val="tx1"/>
+                </a:solidFill>
+              </a:rPr>
+              <a:t>Oferta às CDLs parceiras</a:t>
+            </a:r>
+            <a:endParaRPr lang="en-US" sz="1100" dirty="0"/>
+          </a:p>
+          <a:p>
+            <a:pPr marL="342900" indent="-342900">
+              <a:spcAft>
+                <a:spcPts val="400"/>
+              </a:spcAft>
+              <a:buSzPct val="100000"/>
+              <a:buChar char="•"/>
+            </a:pPr>
+            <a:r>
+              <a:rPr lang="en-US" sz="1100" dirty="0">
+                <a:solidFill>
+                  <a:schemeClr val="tx1"/>
+                </a:solidFill>
+              </a:rPr>
+              <a:t>Planos de consultoria</a:t>
+            </a:r>
+            <a:endParaRPr lang="en-US" sz="1100" dirty="0"/>
+          </a:p>
+          <a:p>
+            <a:pPr marL="342900" indent="-342900">
+              <a:spcAft>
+                <a:spcPts val="400"/>
+              </a:spcAft>
+              <a:buSzPct val="100000"/>
+              <a:buChar char="•"/>
+            </a:pPr>
+            <a:r>
+              <a:rPr lang="en-US" sz="1100" dirty="0">
+                <a:solidFill>
+                  <a:schemeClr val="tx1"/>
+                </a:solidFill>
+              </a:rPr>
+              <a:t>Análises com IA</a:t>
+            </a:r>
+          </a:p>
+          <a:p>
+            <a:pPr marL="342900" indent="-342900">
+              <a:spcAft>
+                <a:spcPts val="400"/>
+              </a:spcAft>
+              <a:buSzPct val="100000"/>
+              <a:buChar char="•"/>
+            </a:pPr>
+            <a:r>
+              <a:rPr lang="en-US" sz="1100" dirty="0" err="1"/>
+              <a:t>Aprovar</a:t>
+            </a:r>
+            <a:r>
+              <a:rPr lang="en-US" sz="1100" dirty="0"/>
+              <a:t> </a:t>
+            </a:r>
+            <a:r>
+              <a:rPr lang="en-US" sz="1100" dirty="0" err="1"/>
+              <a:t>apresentação</a:t>
+            </a:r>
+            <a:r>
+              <a:rPr lang="en-US" sz="1100" dirty="0"/>
+              <a:t> official </a:t>
+            </a:r>
+            <a:r>
+              <a:rPr lang="en-US" sz="1100" dirty="0" err="1"/>
+              <a:t>ao</a:t>
+            </a:r>
+            <a:r>
+              <a:rPr lang="en-US" sz="1100" dirty="0"/>
+              <a:t> time</a:t>
+            </a:r>
+          </a:p>
+          <a:p>
+            <a:pPr marL="171450" indent="-171450">
+              <a:spcAft>
+                <a:spcPts val="400"/>
+              </a:spcAft>
+              <a:buSzPct val="100000"/>
+              <a:buFont typeface="Arial" panose="020B0604020202020204" pitchFamily="34" charset="0"/>
+              <a:buChar char="•"/>
+            </a:pPr>
+            <a:r>
+              <a:rPr lang="en-US" sz="1100" dirty="0" err="1"/>
+              <a:t>Aprovar</a:t>
+            </a:r>
+            <a:r>
+              <a:rPr lang="en-US" sz="1100" dirty="0"/>
+              <a:t> </a:t>
+            </a:r>
+            <a:r>
+              <a:rPr lang="en-US" sz="1100" dirty="0" err="1"/>
+              <a:t>Orçamento</a:t>
+            </a:r>
+            <a:endParaRPr lang="en-US" sz="1100" dirty="0"/>
+          </a:p>
+          <a:p>
+            <a:pPr marL="171450" indent="-171450">
+              <a:spcAft>
+                <a:spcPts val="400"/>
+              </a:spcAft>
+              <a:buSzPct val="100000"/>
+              <a:buFont typeface="Arial" panose="020B0604020202020204" pitchFamily="34" charset="0"/>
+              <a:buChar char="•"/>
+            </a:pPr>
+            <a:r>
+              <a:rPr lang="en-US" sz="1100" dirty="0" err="1">
+                <a:solidFill>
+                  <a:schemeClr val="tx1"/>
+                </a:solidFill>
+              </a:rPr>
+              <a:t>Autorizar</a:t>
+            </a:r>
+            <a:r>
+              <a:rPr lang="en-US" sz="1100" dirty="0">
+                <a:solidFill>
+                  <a:schemeClr val="tx1"/>
+                </a:solidFill>
+              </a:rPr>
+              <a:t> </a:t>
+            </a:r>
+            <a:r>
+              <a:rPr lang="en-US" sz="1100" dirty="0" err="1">
+                <a:solidFill>
+                  <a:schemeClr val="tx1"/>
+                </a:solidFill>
+              </a:rPr>
+              <a:t>oferta</a:t>
+            </a:r>
+            <a:r>
+              <a:rPr lang="en-US" sz="1100" dirty="0">
+                <a:solidFill>
+                  <a:schemeClr val="tx1"/>
+                </a:solidFill>
+              </a:rPr>
+              <a:t> externa</a:t>
+            </a:r>
+          </a:p>
+        </p:txBody>
+      </p:sp>
+      <p:sp>
+        <p:nvSpPr>
+          <p:cNvPr id="32" name="Slide Number Placeholder 0"/>
+          <p:cNvSpPr>
+            <a:spLocks noGrp="1"/>
+          </p:cNvSpPr>
+          <p:nvPr>
+            <p:ph type="sldNum" sz="quarter" idx="4294967295"/>
+          </p:nvPr>
+        </p:nvSpPr>
+        <p:spPr>
+          <a:xfrm>
+            <a:off x="8321040" y="4773168"/>
+            <a:ext cx="365760" cy="228600"/>
+          </a:xfrm>
+          <a:prstGeom prst="rect">
+            <a:avLst/>
+          </a:prstGeom>
+          <a:extLst>
+            <a:ext uri="{C572A759-6A51-4108-AA02-DFA0A04FC94B}">
+              <ma14:wrappingTextBoxFlag xmlns:ma14="http://schemas.microsoft.com/office/mac/drawingml/2011/main" xmlns="" val="0"/>
+            </a:ext>
+          </a:extLst>
+        </p:spPr>
+        <p:txBody>
+          <a:bodyPr/>
+          <a:lstStyle>
+            <a:lvl1pPr>
+              <a:defRPr sz="900">
+                <a:solidFill>
+                  <a:schemeClr val="accent6"/>
+                </a:solidFill>
+              </a:defRPr>
+            </a:lvl1pPr>
+          </a:lstStyle>
+          <a:p>
+            <a:pPr algn="r"/>
+            <a:fld id="{F7021451-1387-4CA6-816F-3879F97B5CBC}" type="slidenum">
+              <a:rPr lang="en-US" b="0"/>
+              <a:t>5</a:t>
+            </a:fld>
+            <a:endParaRPr lang="en-US"/>
+          </a:p>
+        </p:txBody>
+      </p:sp>
+      <p:sp>
+        <p:nvSpPr>
+          <p:cNvPr id="36" name="Fase 1 (status, fundo)">
+            <a:extLst>
+              <a:ext uri="{FF2B5EF4-FFF2-40B4-BE49-F238E27FC236}">
+                <a16:creationId xmlns:a16="http://schemas.microsoft.com/office/drawing/2014/main" id="{4A660CD6-A274-6ABE-D8EB-01E0A85C66C8}"/>
+              </a:ext>
+            </a:extLst>
+          </p:cNvPr>
+          <p:cNvSpPr/>
+          <p:nvPr/>
+        </p:nvSpPr>
+        <p:spPr>
+          <a:xfrm>
+            <a:off x="2907792" y="2604986"/>
+            <a:ext cx="1143000" cy="274320"/>
+          </a:xfrm>
+          <a:prstGeom prst="roundRect">
+            <a:avLst>
+              <a:gd name="adj" fmla="val 26667"/>
+            </a:avLst>
+          </a:prstGeom>
+          <a:solidFill>
+            <a:schemeClr val="accent2"/>
+          </a:solidFill>
+          <a:ln/>
+        </p:spPr>
+        <p:txBody>
+          <a:bodyPr/>
+          <a:lstStyle/>
+          <a:p>
+            <a:endParaRPr lang="pt-BR"/>
+          </a:p>
+        </p:txBody>
+      </p:sp>
+      <p:sp>
+        <p:nvSpPr>
+          <p:cNvPr id="38" name="Fase 1 (status)">
+            <a:extLst>
+              <a:ext uri="{FF2B5EF4-FFF2-40B4-BE49-F238E27FC236}">
+                <a16:creationId xmlns:a16="http://schemas.microsoft.com/office/drawing/2014/main" id="{6B2A0DC4-8E60-99F7-5E41-01FB04EB09EA}"/>
+              </a:ext>
+            </a:extLst>
+          </p:cNvPr>
+          <p:cNvSpPr txBox="1"/>
+          <p:nvPr/>
+        </p:nvSpPr>
+        <p:spPr>
+          <a:xfrm>
+            <a:off x="2907792" y="2604986"/>
+            <a:ext cx="1143000" cy="274320"/>
+          </a:xfrm>
+          <a:prstGeom prst="rect">
+            <a:avLst/>
+          </a:prstGeom>
+          <a:noFill/>
+          <a:ln/>
+        </p:spPr>
+        <p:txBody>
+          <a:bodyPr wrap="square" lIns="0" tIns="0" rIns="0" bIns="0" rtlCol="0" anchor="ctr"/>
+          <a:lstStyle/>
+          <a:p>
+            <a:pPr marL="0" indent="0" algn="ctr">
+              <a:buNone/>
+            </a:pPr>
+            <a:r>
+              <a:rPr lang="en-US" sz="1000" b="1" dirty="0">
+                <a:solidFill>
+                  <a:schemeClr val="bg1"/>
+                </a:solidFill>
+              </a:rPr>
+              <a:t>Concluída</a:t>
+            </a:r>
+            <a:endParaRPr lang="en-US" sz="1000" dirty="0"/>
+          </a:p>
+        </p:txBody>
+      </p:sp>
+    </p:spTree>
+  </p:cSld>
+  <p:clrMapOvr>
+    <a:masterClrMapping/>
+  </p:clrMapOvr>
+</p:sld>
+</file>
+
+<file path=ppt/slides/slide6.xml><?xml version="1.0" encoding="utf-8"?>
 <p:sld xmlns:a="http://schemas.openxmlformats.org/drawingml/2006/main" xmlns:r="http://schemas.openxmlformats.org/officeDocument/2006/relationships" xmlns:p="http://schemas.openxmlformats.org/presentationml/2006/main">
   <p:cSld name="Slide 4">
     <p:spTree>
@@ -5846,9 +7430,11 @@
       <p:sp>
         <p:nvSpPr>
           <p:cNvPr id="2" name="Text 0"/>
-          <p:cNvSpPr/>
+          <p:cNvSpPr>
+            <a:spLocks noGrp="1"/>
+          </p:cNvSpPr>
           <p:nvPr>
-            <p:ph idx="100" type="title" hasCustomPrompt="1"/>
+            <p:ph type="title" idx="100" hasCustomPrompt="1"/>
           </p:nvPr>
         </p:nvSpPr>
         <p:spPr>
@@ -5866,7 +7452,7 @@
           <a:bodyPr wrap="square" lIns="0" tIns="0" rIns="0" bIns="0" rtlCol="0" anchor="ctr"/>
           <a:lstStyle/>
           <a:p>
-            <a:pPr algn="l" indent="0" marL="0">
+            <a:pPr marL="0" indent="0" algn="l">
               <a:buNone/>
             </a:pPr>
             <a:r>
@@ -5902,13 +7488,20 @@
           </a:solidFill>
           <a:ln/>
           <a:effectLst>
-            <a:outerShdw sx="100000" sy="100000" kx="0" ky="0" algn="bl" rotWithShape="0" blurRad="76200" dist="25400" dir="5400000">
+            <a:outerShdw blurRad="76200" dist="25400" dir="5400000" algn="bl" rotWithShape="0">
               <a:srgbClr val="0F1E3D">
                 <a:alpha val="12000"/>
               </a:srgbClr>
             </a:outerShdw>
           </a:effectLst>
         </p:spPr>
+        <p:txBody>
+          <a:bodyPr/>
+          <a:lstStyle/>
+          <a:p>
+            <a:endParaRPr lang="pt-BR"/>
+          </a:p>
+        </p:txBody>
       </p:sp>
       <p:sp>
         <p:nvSpPr>
@@ -5929,6 +7522,13 @@
           </a:solidFill>
           <a:ln/>
         </p:spPr>
+        <p:txBody>
+          <a:bodyPr/>
+          <a:lstStyle/>
+          <a:p>
+            <a:endParaRPr lang="pt-BR"/>
+          </a:p>
+        </p:txBody>
       </p:sp>
       <p:sp>
         <p:nvSpPr>
@@ -5951,7 +7551,7 @@
           <a:bodyPr wrap="square" lIns="0" tIns="0" rIns="0" bIns="0" rtlCol="0" anchor="ctr"/>
           <a:lstStyle/>
           <a:p>
-            <a:pPr algn="ctr" indent="0" marL="0">
+            <a:pPr marL="0" indent="0" algn="ctr">
               <a:buNone/>
             </a:pPr>
             <a:r>
@@ -5987,7 +7587,7 @@
           <a:bodyPr wrap="square" lIns="0" tIns="0" rIns="0" bIns="0" rtlCol="0" anchor="ctr"/>
           <a:lstStyle/>
           <a:p>
-            <a:pPr indent="0" marL="0">
+            <a:pPr marL="0" indent="0">
               <a:buNone/>
             </a:pPr>
             <a:r>
@@ -6023,7 +7623,7 @@
           <a:bodyPr wrap="square" lIns="0" tIns="0" rIns="0" bIns="0" rtlCol="0" anchor="t"/>
           <a:lstStyle/>
           <a:p>
-            <a:pPr indent="0" marL="0">
+            <a:pPr marL="0" indent="0">
               <a:buNone/>
             </a:pPr>
             <a:r>
@@ -6059,13 +7659,20 @@
           </a:solidFill>
           <a:ln/>
           <a:effectLst>
-            <a:outerShdw sx="100000" sy="100000" kx="0" ky="0" algn="bl" rotWithShape="0" blurRad="76200" dist="25400" dir="5400000">
+            <a:outerShdw blurRad="76200" dist="25400" dir="5400000" algn="bl" rotWithShape="0">
               <a:srgbClr val="0F1E3D">
                 <a:alpha val="12000"/>
               </a:srgbClr>
             </a:outerShdw>
           </a:effectLst>
         </p:spPr>
+        <p:txBody>
+          <a:bodyPr/>
+          <a:lstStyle/>
+          <a:p>
+            <a:endParaRPr lang="pt-BR"/>
+          </a:p>
+        </p:txBody>
       </p:sp>
       <p:sp>
         <p:nvSpPr>
@@ -6086,6 +7693,13 @@
           </a:solidFill>
           <a:ln/>
         </p:spPr>
+        <p:txBody>
+          <a:bodyPr/>
+          <a:lstStyle/>
+          <a:p>
+            <a:endParaRPr lang="pt-BR"/>
+          </a:p>
+        </p:txBody>
       </p:sp>
       <p:sp>
         <p:nvSpPr>
@@ -6108,7 +7722,7 @@
           <a:bodyPr wrap="square" lIns="0" tIns="0" rIns="0" bIns="0" rtlCol="0" anchor="ctr"/>
           <a:lstStyle/>
           <a:p>
-            <a:pPr algn="ctr" indent="0" marL="0">
+            <a:pPr marL="0" indent="0" algn="ctr">
               <a:buNone/>
             </a:pPr>
             <a:r>
@@ -6144,7 +7758,7 @@
           <a:bodyPr wrap="square" lIns="0" tIns="0" rIns="0" bIns="0" rtlCol="0" anchor="ctr"/>
           <a:lstStyle/>
           <a:p>
-            <a:pPr indent="0" marL="0">
+            <a:pPr marL="0" indent="0">
               <a:buNone/>
             </a:pPr>
             <a:r>
@@ -6180,7 +7794,7 @@
           <a:bodyPr wrap="square" lIns="0" tIns="0" rIns="0" bIns="0" rtlCol="0" anchor="t"/>
           <a:lstStyle/>
           <a:p>
-            <a:pPr indent="0" marL="0">
+            <a:pPr marL="0" indent="0">
               <a:buNone/>
             </a:pPr>
             <a:r>
@@ -6216,13 +7830,20 @@
           </a:solidFill>
           <a:ln/>
           <a:effectLst>
-            <a:outerShdw sx="100000" sy="100000" kx="0" ky="0" algn="bl" rotWithShape="0" blurRad="76200" dist="25400" dir="5400000">
+            <a:outerShdw blurRad="76200" dist="25400" dir="5400000" algn="bl" rotWithShape="0">
               <a:srgbClr val="0F1E3D">
                 <a:alpha val="12000"/>
               </a:srgbClr>
             </a:outerShdw>
           </a:effectLst>
         </p:spPr>
+        <p:txBody>
+          <a:bodyPr/>
+          <a:lstStyle/>
+          <a:p>
+            <a:endParaRPr lang="pt-BR"/>
+          </a:p>
+        </p:txBody>
       </p:sp>
       <p:sp>
         <p:nvSpPr>
@@ -6243,6 +7864,13 @@
           </a:solidFill>
           <a:ln/>
         </p:spPr>
+        <p:txBody>
+          <a:bodyPr/>
+          <a:lstStyle/>
+          <a:p>
+            <a:endParaRPr lang="pt-BR"/>
+          </a:p>
+        </p:txBody>
       </p:sp>
       <p:sp>
         <p:nvSpPr>
@@ -6265,7 +7893,7 @@
           <a:bodyPr wrap="square" lIns="0" tIns="0" rIns="0" bIns="0" rtlCol="0" anchor="ctr"/>
           <a:lstStyle/>
           <a:p>
-            <a:pPr algn="ctr" indent="0" marL="0">
+            <a:pPr marL="0" indent="0" algn="ctr">
               <a:buNone/>
             </a:pPr>
             <a:r>
@@ -6301,7 +7929,7 @@
           <a:bodyPr wrap="square" lIns="0" tIns="0" rIns="0" bIns="0" rtlCol="0" anchor="ctr"/>
           <a:lstStyle/>
           <a:p>
-            <a:pPr indent="0" marL="0">
+            <a:pPr marL="0" indent="0">
               <a:buNone/>
             </a:pPr>
             <a:r>
@@ -6337,7 +7965,7 @@
           <a:bodyPr wrap="square" lIns="0" tIns="0" rIns="0" bIns="0" rtlCol="0" anchor="t"/>
           <a:lstStyle/>
           <a:p>
-            <a:pPr indent="0" marL="0">
+            <a:pPr marL="0" indent="0">
               <a:buNone/>
             </a:pPr>
             <a:r>
@@ -6373,13 +8001,20 @@
           </a:solidFill>
           <a:ln/>
           <a:effectLst>
-            <a:outerShdw sx="100000" sy="100000" kx="0" ky="0" algn="bl" rotWithShape="0" blurRad="76200" dist="25400" dir="5400000">
+            <a:outerShdw blurRad="76200" dist="25400" dir="5400000" algn="bl" rotWithShape="0">
               <a:srgbClr val="0F1E3D">
                 <a:alpha val="12000"/>
               </a:srgbClr>
             </a:outerShdw>
           </a:effectLst>
         </p:spPr>
+        <p:txBody>
+          <a:bodyPr/>
+          <a:lstStyle/>
+          <a:p>
+            <a:endParaRPr lang="pt-BR"/>
+          </a:p>
+        </p:txBody>
       </p:sp>
       <p:sp>
         <p:nvSpPr>
@@ -6400,6 +8035,13 @@
           </a:solidFill>
           <a:ln/>
         </p:spPr>
+        <p:txBody>
+          <a:bodyPr/>
+          <a:lstStyle/>
+          <a:p>
+            <a:endParaRPr lang="pt-BR"/>
+          </a:p>
+        </p:txBody>
       </p:sp>
       <p:sp>
         <p:nvSpPr>
@@ -6422,7 +8064,7 @@
           <a:bodyPr wrap="square" lIns="0" tIns="0" rIns="0" bIns="0" rtlCol="0" anchor="ctr"/>
           <a:lstStyle/>
           <a:p>
-            <a:pPr algn="ctr" indent="0" marL="0">
+            <a:pPr marL="0" indent="0" algn="ctr">
               <a:buNone/>
             </a:pPr>
             <a:r>
@@ -6458,7 +8100,7 @@
           <a:bodyPr wrap="square" lIns="0" tIns="0" rIns="0" bIns="0" rtlCol="0" anchor="ctr"/>
           <a:lstStyle/>
           <a:p>
-            <a:pPr indent="0" marL="0">
+            <a:pPr marL="0" indent="0">
               <a:buNone/>
             </a:pPr>
             <a:r>
@@ -6494,7 +8136,7 @@
           <a:bodyPr wrap="square" lIns="0" tIns="0" rIns="0" bIns="0" rtlCol="0" anchor="t"/>
           <a:lstStyle/>
           <a:p>
-            <a:pPr indent="0" marL="0">
+            <a:pPr marL="0" indent="0">
               <a:buNone/>
             </a:pPr>
             <a:r>
@@ -6530,13 +8172,20 @@
           </a:solidFill>
           <a:ln/>
           <a:effectLst>
-            <a:outerShdw sx="100000" sy="100000" kx="0" ky="0" algn="bl" rotWithShape="0" blurRad="76200" dist="25400" dir="5400000">
+            <a:outerShdw blurRad="76200" dist="25400" dir="5400000" algn="bl" rotWithShape="0">
               <a:srgbClr val="0F1E3D">
                 <a:alpha val="12000"/>
               </a:srgbClr>
             </a:outerShdw>
           </a:effectLst>
         </p:spPr>
+        <p:txBody>
+          <a:bodyPr/>
+          <a:lstStyle/>
+          <a:p>
+            <a:endParaRPr lang="pt-BR"/>
+          </a:p>
+        </p:txBody>
       </p:sp>
       <p:sp>
         <p:nvSpPr>
@@ -6557,6 +8206,13 @@
           </a:solidFill>
           <a:ln/>
         </p:spPr>
+        <p:txBody>
+          <a:bodyPr/>
+          <a:lstStyle/>
+          <a:p>
+            <a:endParaRPr lang="pt-BR"/>
+          </a:p>
+        </p:txBody>
       </p:sp>
       <p:sp>
         <p:nvSpPr>
@@ -6579,7 +8235,7 @@
           <a:bodyPr wrap="square" lIns="0" tIns="0" rIns="0" bIns="0" rtlCol="0" anchor="ctr"/>
           <a:lstStyle/>
           <a:p>
-            <a:pPr algn="ctr" indent="0" marL="0">
+            <a:pPr marL="0" indent="0" algn="ctr">
               <a:buNone/>
             </a:pPr>
             <a:r>
@@ -6615,7 +8271,7 @@
           <a:bodyPr wrap="square" lIns="0" tIns="0" rIns="0" bIns="0" rtlCol="0" anchor="ctr"/>
           <a:lstStyle/>
           <a:p>
-            <a:pPr indent="0" marL="0">
+            <a:pPr marL="0" indent="0">
               <a:buNone/>
             </a:pPr>
             <a:r>
@@ -6651,7 +8307,7 @@
           <a:bodyPr wrap="square" lIns="0" tIns="0" rIns="0" bIns="0" rtlCol="0" anchor="t"/>
           <a:lstStyle/>
           <a:p>
-            <a:pPr indent="0" marL="0">
+            <a:pPr marL="0" indent="0">
               <a:buNone/>
             </a:pPr>
             <a:r>
@@ -6687,13 +8343,20 @@
           </a:solidFill>
           <a:ln/>
           <a:effectLst>
-            <a:outerShdw sx="100000" sy="100000" kx="0" ky="0" algn="bl" rotWithShape="0" blurRad="76200" dist="25400" dir="5400000">
+            <a:outerShdw blurRad="76200" dist="25400" dir="5400000" algn="bl" rotWithShape="0">
               <a:srgbClr val="0F1E3D">
                 <a:alpha val="12000"/>
               </a:srgbClr>
             </a:outerShdw>
           </a:effectLst>
         </p:spPr>
+        <p:txBody>
+          <a:bodyPr/>
+          <a:lstStyle/>
+          <a:p>
+            <a:endParaRPr lang="pt-BR"/>
+          </a:p>
+        </p:txBody>
       </p:sp>
       <p:sp>
         <p:nvSpPr>
@@ -6714,6 +8377,13 @@
           </a:solidFill>
           <a:ln/>
         </p:spPr>
+        <p:txBody>
+          <a:bodyPr/>
+          <a:lstStyle/>
+          <a:p>
+            <a:endParaRPr lang="pt-BR"/>
+          </a:p>
+        </p:txBody>
       </p:sp>
       <p:sp>
         <p:nvSpPr>
@@ -6736,7 +8406,7 @@
           <a:bodyPr wrap="square" lIns="0" tIns="0" rIns="0" bIns="0" rtlCol="0" anchor="ctr"/>
           <a:lstStyle/>
           <a:p>
-            <a:pPr algn="ctr" indent="0" marL="0">
+            <a:pPr marL="0" indent="0" algn="ctr">
               <a:buNone/>
             </a:pPr>
             <a:r>
@@ -6772,7 +8442,7 @@
           <a:bodyPr wrap="square" lIns="0" tIns="0" rIns="0" bIns="0" rtlCol="0" anchor="ctr"/>
           <a:lstStyle/>
           <a:p>
-            <a:pPr indent="0" marL="0">
+            <a:pPr marL="0" indent="0">
               <a:buNone/>
             </a:pPr>
             <a:r>
@@ -6808,7 +8478,7 @@
           <a:bodyPr wrap="square" lIns="0" tIns="0" rIns="0" bIns="0" rtlCol="0" anchor="t"/>
           <a:lstStyle/>
           <a:p>
-            <a:pPr indent="0" marL="0">
+            <a:pPr marL="0" indent="0">
               <a:buNone/>
             </a:pPr>
             <a:r>
@@ -6844,13 +8514,20 @@
           </a:solidFill>
           <a:ln/>
           <a:effectLst>
-            <a:outerShdw sx="100000" sy="100000" kx="0" ky="0" algn="bl" rotWithShape="0" blurRad="76200" dist="25400" dir="5400000">
+            <a:outerShdw blurRad="76200" dist="25400" dir="5400000" algn="bl" rotWithShape="0">
               <a:srgbClr val="0F1E3D">
                 <a:alpha val="12000"/>
               </a:srgbClr>
             </a:outerShdw>
           </a:effectLst>
         </p:spPr>
+        <p:txBody>
+          <a:bodyPr/>
+          <a:lstStyle/>
+          <a:p>
+            <a:endParaRPr lang="pt-BR"/>
+          </a:p>
+        </p:txBody>
       </p:sp>
       <p:sp>
         <p:nvSpPr>
@@ -6871,6 +8548,13 @@
           </a:solidFill>
           <a:ln/>
         </p:spPr>
+        <p:txBody>
+          <a:bodyPr/>
+          <a:lstStyle/>
+          <a:p>
+            <a:endParaRPr lang="pt-BR"/>
+          </a:p>
+        </p:txBody>
       </p:sp>
       <p:sp>
         <p:nvSpPr>
@@ -6893,7 +8577,7 @@
           <a:bodyPr wrap="square" lIns="0" tIns="0" rIns="0" bIns="0" rtlCol="0" anchor="ctr"/>
           <a:lstStyle/>
           <a:p>
-            <a:pPr algn="ctr" indent="0" marL="0">
+            <a:pPr marL="0" indent="0" algn="ctr">
               <a:buNone/>
             </a:pPr>
             <a:r>
@@ -6929,7 +8613,7 @@
           <a:bodyPr wrap="square" lIns="0" tIns="0" rIns="0" bIns="0" rtlCol="0" anchor="ctr"/>
           <a:lstStyle/>
           <a:p>
-            <a:pPr indent="0" marL="0">
+            <a:pPr marL="0" indent="0">
               <a:buNone/>
             </a:pPr>
             <a:r>
@@ -6965,7 +8649,7 @@
           <a:bodyPr wrap="square" lIns="0" tIns="0" rIns="0" bIns="0" rtlCol="0" anchor="t"/>
           <a:lstStyle/>
           <a:p>
-            <a:pPr indent="0" marL="0">
+            <a:pPr marL="0" indent="0">
               <a:buNone/>
             </a:pPr>
             <a:r>
@@ -7001,13 +8685,20 @@
           </a:solidFill>
           <a:ln/>
           <a:effectLst>
-            <a:outerShdw sx="100000" sy="100000" kx="0" ky="0" algn="bl" rotWithShape="0" blurRad="76200" dist="25400" dir="5400000">
+            <a:outerShdw blurRad="76200" dist="25400" dir="5400000" algn="bl" rotWithShape="0">
               <a:srgbClr val="0F1E3D">
                 <a:alpha val="12000"/>
               </a:srgbClr>
             </a:outerShdw>
           </a:effectLst>
         </p:spPr>
+        <p:txBody>
+          <a:bodyPr/>
+          <a:lstStyle/>
+          <a:p>
+            <a:endParaRPr lang="pt-BR"/>
+          </a:p>
+        </p:txBody>
       </p:sp>
       <p:sp>
         <p:nvSpPr>
@@ -7028,6 +8719,13 @@
           </a:solidFill>
           <a:ln/>
         </p:spPr>
+        <p:txBody>
+          <a:bodyPr/>
+          <a:lstStyle/>
+          <a:p>
+            <a:endParaRPr lang="pt-BR"/>
+          </a:p>
+        </p:txBody>
       </p:sp>
       <p:sp>
         <p:nvSpPr>
@@ -7050,7 +8748,7 @@
           <a:bodyPr wrap="square" lIns="0" tIns="0" rIns="0" bIns="0" rtlCol="0" anchor="ctr"/>
           <a:lstStyle/>
           <a:p>
-            <a:pPr algn="ctr" indent="0" marL="0">
+            <a:pPr marL="0" indent="0" algn="ctr">
               <a:buNone/>
             </a:pPr>
             <a:r>
@@ -7086,7 +8784,7 @@
           <a:bodyPr wrap="square" lIns="0" tIns="0" rIns="0" bIns="0" rtlCol="0" anchor="ctr"/>
           <a:lstStyle/>
           <a:p>
-            <a:pPr indent="0" marL="0">
+            <a:pPr marL="0" indent="0">
               <a:buNone/>
             </a:pPr>
             <a:r>
@@ -7122,7 +8820,7 @@
           <a:bodyPr wrap="square" lIns="0" tIns="0" rIns="0" bIns="0" rtlCol="0" anchor="t"/>
           <a:lstStyle/>
           <a:p>
-            <a:pPr indent="0" marL="0">
+            <a:pPr marL="0" indent="0">
               <a:buNone/>
             </a:pPr>
             <a:r>
@@ -7158,13 +8856,20 @@
           </a:solidFill>
           <a:ln/>
           <a:effectLst>
-            <a:outerShdw sx="100000" sy="100000" kx="0" ky="0" algn="bl" rotWithShape="0" blurRad="76200" dist="25400" dir="5400000">
+            <a:outerShdw blurRad="76200" dist="25400" dir="5400000" algn="bl" rotWithShape="0">
               <a:srgbClr val="0F1E3D">
                 <a:alpha val="12000"/>
               </a:srgbClr>
             </a:outerShdw>
           </a:effectLst>
         </p:spPr>
+        <p:txBody>
+          <a:bodyPr/>
+          <a:lstStyle/>
+          <a:p>
+            <a:endParaRPr lang="pt-BR"/>
+          </a:p>
+        </p:txBody>
       </p:sp>
       <p:sp>
         <p:nvSpPr>
@@ -7185,6 +8890,13 @@
           </a:solidFill>
           <a:ln/>
         </p:spPr>
+        <p:txBody>
+          <a:bodyPr/>
+          <a:lstStyle/>
+          <a:p>
+            <a:endParaRPr lang="pt-BR"/>
+          </a:p>
+        </p:txBody>
       </p:sp>
       <p:sp>
         <p:nvSpPr>
@@ -7207,7 +8919,7 @@
           <a:bodyPr wrap="square" lIns="0" tIns="0" rIns="0" bIns="0" rtlCol="0" anchor="ctr"/>
           <a:lstStyle/>
           <a:p>
-            <a:pPr algn="ctr" indent="0" marL="0">
+            <a:pPr marL="0" indent="0" algn="ctr">
               <a:buNone/>
             </a:pPr>
             <a:r>
@@ -7243,7 +8955,7 @@
           <a:bodyPr wrap="square" lIns="0" tIns="0" rIns="0" bIns="0" rtlCol="0" anchor="ctr"/>
           <a:lstStyle/>
           <a:p>
-            <a:pPr indent="0" marL="0">
+            <a:pPr marL="0" indent="0">
               <a:buNone/>
             </a:pPr>
             <a:r>
@@ -7279,7 +8991,7 @@
           <a:bodyPr wrap="square" lIns="0" tIns="0" rIns="0" bIns="0" rtlCol="0" anchor="t"/>
           <a:lstStyle/>
           <a:p>
-            <a:pPr indent="0" marL="0">
+            <a:pPr marL="0" indent="0">
               <a:buNone/>
             </a:pPr>
             <a:r>
@@ -7296,7 +9008,7 @@
       </p:sp>
       <p:sp>
         <p:nvSpPr>
-          <p:cNvPr id="25" name="Slide Number Placeholder 0"/>
+          <p:cNvPr id="48" name="Slide Number Placeholder 0"/>
           <p:cNvSpPr>
             <a:spLocks noGrp="1"/>
           </p:cNvSpPr>
@@ -7314,7 +9026,7 @@
           </a:prstGeom>
           <a:extLst>
             <a:ext uri="{C572A759-6A51-4108-AA02-DFA0A04FC94B}">
-              <ma14:wrappingTextBoxFlag xmlns:ma14="http://schemas.microsoft.com/office/mac/drawingml/2011/main" val="0"/>
+              <ma14:wrappingTextBoxFlag xmlns:ma14="http://schemas.microsoft.com/office/mac/drawingml/2011/main" xmlns="" val="0"/>
             </a:ext>
           </a:extLst>
         </p:spPr>
@@ -7332,8 +9044,8 @@
           <a:p>
             <a:pPr algn="r"/>
             <a:fld id="{F7021451-1387-4CA6-816F-3879F97B5CBC}" type="slidenum">
-              <a:rPr b="0" lang="en-US"/>
-              <a:t>4</a:t>
+              <a:rPr lang="en-US" b="0"/>
+              <a:t>6</a:t>
             </a:fld>
             <a:endParaRPr lang="en-US"/>
           </a:p>
@@ -7347,7 +9059,7 @@
 </p:sld>
 </file>
 
-<file path=ppt/slides/slide5.xml><?xml version="1.0" encoding="utf-8"?>
+<file path=ppt/slides/slide7.xml><?xml version="1.0" encoding="utf-8"?>
 <p:sld xmlns:a="http://schemas.openxmlformats.org/drawingml/2006/main" xmlns:r="http://schemas.openxmlformats.org/officeDocument/2006/relationships" xmlns:p="http://schemas.openxmlformats.org/presentationml/2006/main">
   <p:cSld name="Slide 5">
     <p:spTree>
@@ -7367,9 +9079,11 @@
       <p:sp>
         <p:nvSpPr>
           <p:cNvPr id="2" name="Text 0"/>
-          <p:cNvSpPr/>
+          <p:cNvSpPr>
+            <a:spLocks noGrp="1"/>
+          </p:cNvSpPr>
           <p:nvPr>
-            <p:ph idx="100" type="title" hasCustomPrompt="1"/>
+            <p:ph type="title" idx="100" hasCustomPrompt="1"/>
           </p:nvPr>
         </p:nvSpPr>
         <p:spPr>
@@ -7387,7 +9101,7 @@
           <a:bodyPr wrap="square" lIns="0" tIns="0" rIns="0" bIns="0" rtlCol="0" anchor="ctr"/>
           <a:lstStyle/>
           <a:p>
-            <a:pPr algn="l" indent="0" marL="0">
+            <a:pPr marL="0" indent="0" algn="l">
               <a:buNone/>
             </a:pPr>
             <a:r>
@@ -7421,6 +9135,13 @@
           </a:solidFill>
           <a:ln/>
         </p:spPr>
+        <p:txBody>
+          <a:bodyPr/>
+          <a:lstStyle/>
+          <a:p>
+            <a:endParaRPr lang="pt-BR"/>
+          </a:p>
+        </p:txBody>
       </p:sp>
       <p:sp>
         <p:nvSpPr>
@@ -7443,7 +9164,7 @@
           <a:bodyPr wrap="square" lIns="0" tIns="0" rIns="0" bIns="0" rtlCol="0" anchor="ctr"/>
           <a:lstStyle/>
           <a:p>
-            <a:pPr algn="ctr" indent="0" marL="0">
+            <a:pPr marL="0" indent="0" algn="ctr">
               <a:buNone/>
             </a:pPr>
             <a:r>
@@ -7479,7 +9200,7 @@
           <a:bodyPr wrap="square" lIns="0" tIns="0" rIns="0" bIns="0" rtlCol="0" anchor="t"/>
           <a:lstStyle/>
           <a:p>
-            <a:pPr indent="0" marL="0">
+            <a:pPr marL="0" indent="0">
               <a:buNone/>
             </a:pPr>
             <a:r>
@@ -7513,6 +9234,13 @@
           </a:solidFill>
           <a:ln/>
         </p:spPr>
+        <p:txBody>
+          <a:bodyPr/>
+          <a:lstStyle/>
+          <a:p>
+            <a:endParaRPr lang="pt-BR"/>
+          </a:p>
+        </p:txBody>
       </p:sp>
       <p:sp>
         <p:nvSpPr>
@@ -7535,7 +9263,7 @@
           <a:bodyPr wrap="square" lIns="0" tIns="0" rIns="0" bIns="0" rtlCol="0" anchor="ctr"/>
           <a:lstStyle/>
           <a:p>
-            <a:pPr algn="ctr" indent="0" marL="0">
+            <a:pPr marL="0" indent="0" algn="ctr">
               <a:buNone/>
             </a:pPr>
             <a:r>
@@ -7571,7 +9299,7 @@
           <a:bodyPr wrap="square" lIns="0" tIns="0" rIns="0" bIns="0" rtlCol="0" anchor="t"/>
           <a:lstStyle/>
           <a:p>
-            <a:pPr indent="0" marL="0">
+            <a:pPr marL="0" indent="0">
               <a:buNone/>
             </a:pPr>
             <a:r>
@@ -7605,6 +9333,13 @@
           </a:solidFill>
           <a:ln/>
         </p:spPr>
+        <p:txBody>
+          <a:bodyPr/>
+          <a:lstStyle/>
+          <a:p>
+            <a:endParaRPr lang="pt-BR"/>
+          </a:p>
+        </p:txBody>
       </p:sp>
       <p:sp>
         <p:nvSpPr>
@@ -7627,7 +9362,7 @@
           <a:bodyPr wrap="square" lIns="0" tIns="0" rIns="0" bIns="0" rtlCol="0" anchor="ctr"/>
           <a:lstStyle/>
           <a:p>
-            <a:pPr algn="ctr" indent="0" marL="0">
+            <a:pPr marL="0" indent="0" algn="ctr">
               <a:buNone/>
             </a:pPr>
             <a:r>
@@ -7663,7 +9398,7 @@
           <a:bodyPr wrap="square" lIns="0" tIns="0" rIns="0" bIns="0" rtlCol="0" anchor="t"/>
           <a:lstStyle/>
           <a:p>
-            <a:pPr indent="0" marL="0">
+            <a:pPr marL="0" indent="0">
               <a:buNone/>
             </a:pPr>
             <a:r>
@@ -7697,6 +9432,13 @@
           </a:solidFill>
           <a:ln/>
         </p:spPr>
+        <p:txBody>
+          <a:bodyPr/>
+          <a:lstStyle/>
+          <a:p>
+            <a:endParaRPr lang="pt-BR"/>
+          </a:p>
+        </p:txBody>
       </p:sp>
       <p:sp>
         <p:nvSpPr>
@@ -7719,7 +9461,7 @@
           <a:bodyPr wrap="square" lIns="0" tIns="0" rIns="0" bIns="0" rtlCol="0" anchor="ctr"/>
           <a:lstStyle/>
           <a:p>
-            <a:pPr algn="ctr" indent="0" marL="0">
+            <a:pPr marL="0" indent="0" algn="ctr">
               <a:buNone/>
             </a:pPr>
             <a:r>
@@ -7755,7 +9497,7 @@
           <a:bodyPr wrap="square" lIns="0" tIns="0" rIns="0" bIns="0" rtlCol="0" anchor="t"/>
           <a:lstStyle/>
           <a:p>
-            <a:pPr indent="0" marL="0">
+            <a:pPr marL="0" indent="0">
               <a:buNone/>
             </a:pPr>
             <a:r>
@@ -7791,13 +9533,20 @@
           </a:solidFill>
           <a:ln/>
           <a:effectLst>
-            <a:outerShdw sx="100000" sy="100000" kx="0" ky="0" algn="bl" rotWithShape="0" blurRad="76200" dist="25400" dir="5400000">
+            <a:outerShdw blurRad="76200" dist="25400" dir="5400000" algn="bl" rotWithShape="0">
               <a:srgbClr val="0F1E3D">
                 <a:alpha val="12000"/>
               </a:srgbClr>
             </a:outerShdw>
           </a:effectLst>
         </p:spPr>
+        <p:txBody>
+          <a:bodyPr/>
+          <a:lstStyle/>
+          <a:p>
+            <a:endParaRPr lang="pt-BR"/>
+          </a:p>
+        </p:txBody>
       </p:sp>
       <p:sp>
         <p:nvSpPr>
@@ -7820,7 +9569,7 @@
           <a:bodyPr wrap="square" lIns="0" tIns="0" rIns="0" bIns="0" rtlCol="0" anchor="t"/>
           <a:lstStyle/>
           <a:p>
-            <a:pPr indent="0" marL="0">
+            <a:pPr marL="0" indent="0">
               <a:buNone/>
             </a:pPr>
             <a:r>
@@ -7929,13 +9678,20 @@
           </a:solidFill>
           <a:ln/>
           <a:effectLst>
-            <a:outerShdw sx="100000" sy="100000" kx="0" ky="0" algn="bl" rotWithShape="0" blurRad="76200" dist="25400" dir="5400000">
+            <a:outerShdw blurRad="76200" dist="25400" dir="5400000" algn="bl" rotWithShape="0">
               <a:srgbClr val="0F1E3D">
                 <a:alpha val="12000"/>
               </a:srgbClr>
             </a:outerShdw>
           </a:effectLst>
         </p:spPr>
+        <p:txBody>
+          <a:bodyPr/>
+          <a:lstStyle/>
+          <a:p>
+            <a:endParaRPr lang="pt-BR"/>
+          </a:p>
+        </p:txBody>
       </p:sp>
       <p:sp>
         <p:nvSpPr>
@@ -7958,7 +9714,7 @@
           <a:bodyPr wrap="square" lIns="0" tIns="0" rIns="0" bIns="0" rtlCol="0" anchor="t"/>
           <a:lstStyle/>
           <a:p>
-            <a:pPr indent="0" marL="0">
+            <a:pPr marL="0" indent="0">
               <a:buNone/>
             </a:pPr>
             <a:r>
@@ -8066,7 +9822,7 @@
           </a:prstGeom>
           <a:extLst>
             <a:ext uri="{C572A759-6A51-4108-AA02-DFA0A04FC94B}">
-              <ma14:wrappingTextBoxFlag xmlns:ma14="http://schemas.microsoft.com/office/mac/drawingml/2011/main" val="0"/>
+              <ma14:wrappingTextBoxFlag xmlns:ma14="http://schemas.microsoft.com/office/mac/drawingml/2011/main" xmlns="" val="0"/>
             </a:ext>
           </a:extLst>
         </p:spPr>
@@ -8084,8 +9840,8 @@
           <a:p>
             <a:pPr algn="r"/>
             <a:fld id="{F7021451-1387-4CA6-816F-3879F97B5CBC}" type="slidenum">
-              <a:rPr b="0" lang="en-US"/>
-              <a:t>5</a:t>
+              <a:rPr lang="en-US" b="0"/>
+              <a:t>7</a:t>
             </a:fld>
             <a:endParaRPr lang="en-US"/>
           </a:p>
@@ -8099,7 +9855,7 @@
 </p:sld>
 </file>
 
-<file path=ppt/slides/slide6.xml><?xml version="1.0" encoding="utf-8"?>
+<file path=ppt/slides/slide8.xml><?xml version="1.0" encoding="utf-8"?>
 <p:sld xmlns:a="http://schemas.openxmlformats.org/drawingml/2006/main" xmlns:r="http://schemas.openxmlformats.org/officeDocument/2006/relationships" xmlns:p="http://schemas.openxmlformats.org/presentationml/2006/main">
   <p:cSld name="Slide 6">
     <p:spTree>
@@ -8119,9 +9875,11 @@
       <p:sp>
         <p:nvSpPr>
           <p:cNvPr id="2" name="Text 0"/>
-          <p:cNvSpPr/>
+          <p:cNvSpPr>
+            <a:spLocks noGrp="1"/>
+          </p:cNvSpPr>
           <p:nvPr>
-            <p:ph idx="100" type="title" hasCustomPrompt="1"/>
+            <p:ph type="title" idx="100" hasCustomPrompt="1"/>
           </p:nvPr>
         </p:nvSpPr>
         <p:spPr>
@@ -8139,7 +9897,7 @@
           <a:bodyPr wrap="square" lIns="0" tIns="0" rIns="0" bIns="0" rtlCol="0" anchor="ctr"/>
           <a:lstStyle/>
           <a:p>
-            <a:pPr algn="l" indent="0" marL="0">
+            <a:pPr marL="0" indent="0" algn="l">
               <a:buNone/>
             </a:pPr>
             <a:r>
@@ -8156,7 +9914,7 @@
       </p:sp>
       <p:graphicFrame>
         <p:nvGraphicFramePr>
-          <p:cNvPr id="3" name="Gráfico horas por módulo" descr=""/>
+          <p:cNvPr id="3" name="Gráfico horas por módulo"/>
           <p:cNvGraphicFramePr/>
           <p:nvPr/>
         </p:nvGraphicFramePr>
@@ -8164,9 +9922,9 @@
           <a:off x="457200" y="1051560"/>
           <a:ext cx="4937760" cy="3474720"/>
         </p:xfrm>
-        <a:graphic xmlns:a="http://schemas.openxmlformats.org/drawingml/2006/main">
+        <a:graphic>
           <a:graphicData uri="http://schemas.openxmlformats.org/drawingml/2006/chart">
-            <c:chart xmlns:c="http://schemas.openxmlformats.org/drawingml/2006/chart" r:id="rId1"/>
+            <c:chart xmlns:c="http://schemas.openxmlformats.org/drawingml/2006/chart" xmlns:r="http://schemas.openxmlformats.org/officeDocument/2006/relationships" r:id="rId3"/>
           </a:graphicData>
         </a:graphic>
       </p:graphicFrame>
@@ -8191,13 +9949,20 @@
           </a:solidFill>
           <a:ln/>
           <a:effectLst>
-            <a:outerShdw sx="100000" sy="100000" kx="0" ky="0" algn="bl" rotWithShape="0" blurRad="76200" dist="25400" dir="5400000">
+            <a:outerShdw blurRad="76200" dist="25400" dir="5400000" algn="bl" rotWithShape="0">
               <a:srgbClr val="0F1E3D">
                 <a:alpha val="12000"/>
               </a:srgbClr>
             </a:outerShdw>
           </a:effectLst>
         </p:spPr>
+        <p:txBody>
+          <a:bodyPr/>
+          <a:lstStyle/>
+          <a:p>
+            <a:endParaRPr lang="pt-BR"/>
+          </a:p>
+        </p:txBody>
       </p:sp>
       <p:sp>
         <p:nvSpPr>
@@ -8220,7 +9985,7 @@
           <a:bodyPr wrap="square" lIns="0" tIns="0" rIns="0" bIns="0" rtlCol="0" anchor="t"/>
           <a:lstStyle/>
           <a:p>
-            <a:pPr indent="0" marL="0">
+            <a:pPr marL="0" indent="0">
               <a:buNone/>
             </a:pPr>
             <a:r>
@@ -8259,7 +10024,7 @@
           <a:bodyPr wrap="square" lIns="0" tIns="0" rIns="0" bIns="0" rtlCol="0" anchor="t"/>
           <a:lstStyle/>
           <a:p>
-            <a:pPr indent="0" marL="0">
+            <a:pPr marL="0" indent="0">
               <a:buNone/>
             </a:pPr>
             <a:r>
@@ -8295,13 +10060,20 @@
           </a:solidFill>
           <a:ln/>
           <a:effectLst>
-            <a:outerShdw sx="100000" sy="100000" kx="0" ky="0" algn="bl" rotWithShape="0" blurRad="76200" dist="25400" dir="5400000">
+            <a:outerShdw blurRad="76200" dist="25400" dir="5400000" algn="bl" rotWithShape="0">
               <a:srgbClr val="0F1E3D">
                 <a:alpha val="12000"/>
               </a:srgbClr>
             </a:outerShdw>
           </a:effectLst>
         </p:spPr>
+        <p:txBody>
+          <a:bodyPr/>
+          <a:lstStyle/>
+          <a:p>
+            <a:endParaRPr lang="pt-BR"/>
+          </a:p>
+        </p:txBody>
       </p:sp>
       <p:sp>
         <p:nvSpPr>
@@ -8324,7 +10096,7 @@
           <a:bodyPr wrap="square" lIns="0" tIns="0" rIns="0" bIns="0" rtlCol="0" anchor="t"/>
           <a:lstStyle/>
           <a:p>
-            <a:pPr indent="0" marL="0">
+            <a:pPr marL="0" indent="0">
               <a:buNone/>
             </a:pPr>
             <a:r>
@@ -8363,7 +10135,7 @@
           <a:bodyPr wrap="square" lIns="0" tIns="0" rIns="0" bIns="0" rtlCol="0" anchor="t"/>
           <a:lstStyle/>
           <a:p>
-            <a:pPr indent="0" marL="0">
+            <a:pPr marL="0" indent="0">
               <a:buNone/>
             </a:pPr>
             <a:r>
@@ -8399,13 +10171,20 @@
           </a:solidFill>
           <a:ln/>
           <a:effectLst>
-            <a:outerShdw sx="100000" sy="100000" kx="0" ky="0" algn="bl" rotWithShape="0" blurRad="76200" dist="25400" dir="5400000">
+            <a:outerShdw blurRad="76200" dist="25400" dir="5400000" algn="bl" rotWithShape="0">
               <a:srgbClr val="0F1E3D">
                 <a:alpha val="12000"/>
               </a:srgbClr>
             </a:outerShdw>
           </a:effectLst>
         </p:spPr>
+        <p:txBody>
+          <a:bodyPr/>
+          <a:lstStyle/>
+          <a:p>
+            <a:endParaRPr lang="pt-BR"/>
+          </a:p>
+        </p:txBody>
       </p:sp>
       <p:sp>
         <p:nvSpPr>
@@ -8428,7 +10207,7 @@
           <a:bodyPr wrap="square" lIns="0" tIns="0" rIns="0" bIns="0" rtlCol="0" anchor="t"/>
           <a:lstStyle/>
           <a:p>
-            <a:pPr indent="0" marL="0">
+            <a:pPr marL="0" indent="0">
               <a:buNone/>
             </a:pPr>
             <a:r>
@@ -8467,7 +10246,7 @@
           <a:bodyPr wrap="square" lIns="0" tIns="0" rIns="0" bIns="0" rtlCol="0" anchor="t"/>
           <a:lstStyle/>
           <a:p>
-            <a:pPr indent="0" marL="0">
+            <a:pPr marL="0" indent="0">
               <a:buNone/>
             </a:pPr>
             <a:r>
@@ -8502,7 +10281,7 @@
           </a:prstGeom>
           <a:extLst>
             <a:ext uri="{C572A759-6A51-4108-AA02-DFA0A04FC94B}">
-              <ma14:wrappingTextBoxFlag xmlns:ma14="http://schemas.microsoft.com/office/mac/drawingml/2011/main" val="0"/>
+              <ma14:wrappingTextBoxFlag xmlns:ma14="http://schemas.microsoft.com/office/mac/drawingml/2011/main" xmlns="" val="0"/>
             </a:ext>
           </a:extLst>
         </p:spPr>
@@ -8520,1985 +10299,7 @@
           <a:p>
             <a:pPr algn="r"/>
             <a:fld id="{F7021451-1387-4CA6-816F-3879F97B5CBC}" type="slidenum">
-              <a:rPr b="0" lang="en-US"/>
-              <a:t>6</a:t>
-            </a:fld>
-            <a:endParaRPr lang="en-US"/>
-          </a:p>
-        </p:txBody>
-      </p:sp>
-    </p:spTree>
-  </p:cSld>
-  <p:clrMapOvr>
-    <a:masterClrMapping/>
-  </p:clrMapOvr>
-</p:sld>
-</file>
-
-<file path=ppt/slides/slide7.xml><?xml version="1.0" encoding="utf-8"?>
-<p:sld xmlns:a="http://schemas.openxmlformats.org/drawingml/2006/main" xmlns:r="http://schemas.openxmlformats.org/officeDocument/2006/relationships" xmlns:p="http://schemas.openxmlformats.org/presentationml/2006/main">
-  <p:cSld name="Slide 7">
-    <p:spTree>
-      <p:nvGrpSpPr>
-        <p:cNvPr id="1" name=""/>
-        <p:cNvGrpSpPr/>
-        <p:nvPr/>
-      </p:nvGrpSpPr>
-      <p:grpSpPr>
-        <a:xfrm>
-          <a:off x="0" y="0"/>
-          <a:ext cx="0" cy="0"/>
-          <a:chOff x="0" y="0"/>
-          <a:chExt cx="0" cy="0"/>
-        </a:xfrm>
-      </p:grpSpPr>
-      <p:sp>
-        <p:nvSpPr>
-          <p:cNvPr id="2" name="Text 0"/>
-          <p:cNvSpPr/>
-          <p:nvPr>
-            <p:ph idx="100" type="title" hasCustomPrompt="1"/>
-          </p:nvPr>
-        </p:nvSpPr>
-        <p:spPr>
-          <a:xfrm>
-            <a:off x="457200" y="274320"/>
-            <a:ext cx="8229600" cy="594360"/>
-          </a:xfrm>
-          <a:prstGeom prst="rect">
-            <a:avLst/>
-          </a:prstGeom>
-          <a:noFill/>
-          <a:ln/>
-        </p:spPr>
-        <p:txBody>
-          <a:bodyPr wrap="square" lIns="0" tIns="0" rIns="0" bIns="0" rtlCol="0" anchor="ctr"/>
-          <a:lstStyle/>
-          <a:p>
-            <a:pPr algn="l" indent="0" marL="0">
-              <a:buNone/>
-            </a:pPr>
-            <a:r>
-              <a:rPr lang="en-US" sz="2200" b="1" dirty="0">
-                <a:solidFill>
-                  <a:schemeClr val="tx2"/>
-                </a:solidFill>
-              </a:rPr>
-              <a:t>Impacto qualitativo: cultura, segurança e escala</a:t>
-            </a:r>
-            <a:endParaRPr lang="en-US" sz="2200" dirty="0"/>
-          </a:p>
-        </p:txBody>
-      </p:sp>
-      <p:sp>
-        <p:nvSpPr>
-          <p:cNvPr id="3" name="Cultura (cartão)"/>
-          <p:cNvSpPr/>
-          <p:nvPr/>
-        </p:nvSpPr>
-        <p:spPr>
-          <a:xfrm>
-            <a:off x="457200" y="1097280"/>
-            <a:ext cx="2606040" cy="3429000"/>
-          </a:xfrm>
-          <a:prstGeom prst="roundRect">
-            <a:avLst>
-              <a:gd name="adj" fmla="val 4211"/>
-            </a:avLst>
-          </a:prstGeom>
-          <a:solidFill>
-            <a:schemeClr val="bg2"/>
-          </a:solidFill>
-          <a:ln/>
-          <a:effectLst>
-            <a:outerShdw sx="100000" sy="100000" kx="0" ky="0" algn="bl" rotWithShape="0" blurRad="76200" dist="25400" dir="5400000">
-              <a:srgbClr val="0F1E3D">
-                <a:alpha val="12000"/>
-              </a:srgbClr>
-            </a:outerShdw>
-          </a:effectLst>
-        </p:spPr>
-      </p:sp>
-      <p:sp>
-        <p:nvSpPr>
-          <p:cNvPr id="4" name="Cultura (círculo)"/>
-          <p:cNvSpPr/>
-          <p:nvPr/>
-        </p:nvSpPr>
-        <p:spPr>
-          <a:xfrm>
-            <a:off x="685800" y="1280160"/>
-            <a:ext cx="548640" cy="548640"/>
-          </a:xfrm>
-          <a:prstGeom prst="ellipse">
-            <a:avLst/>
-          </a:prstGeom>
-          <a:solidFill>
-            <a:schemeClr val="accent1"/>
-          </a:solidFill>
-          <a:ln/>
-        </p:spPr>
-      </p:sp>
-      <p:sp>
-        <p:nvSpPr>
-          <p:cNvPr id="5" name="Cultura (rótulo)"/>
-          <p:cNvSpPr txBox="1"/>
-          <p:nvPr/>
-        </p:nvSpPr>
-        <p:spPr>
-          <a:xfrm>
-            <a:off x="685800" y="1280160"/>
-            <a:ext cx="548640" cy="548640"/>
-          </a:xfrm>
-          <a:prstGeom prst="rect">
-            <a:avLst/>
-          </a:prstGeom>
-          <a:noFill/>
-          <a:ln/>
-        </p:spPr>
-        <p:txBody>
-          <a:bodyPr wrap="square" lIns="0" tIns="0" rIns="0" bIns="0" rtlCol="0" anchor="ctr"/>
-          <a:lstStyle/>
-          <a:p>
-            <a:pPr algn="ctr" indent="0" marL="0">
-              <a:buNone/>
-            </a:pPr>
-            <a:r>
-              <a:rPr lang="en-US" sz="1300" b="1" dirty="0">
-                <a:solidFill>
-                  <a:schemeClr val="bg1"/>
-                </a:solidFill>
-              </a:rPr>
-              <a:t>C</a:t>
-            </a:r>
-            <a:endParaRPr lang="en-US" sz="1300" dirty="0"/>
-          </a:p>
-        </p:txBody>
-      </p:sp>
-      <p:sp>
-        <p:nvSpPr>
-          <p:cNvPr id="6" name="Cultura (título)"/>
-          <p:cNvSpPr txBox="1"/>
-          <p:nvPr/>
-        </p:nvSpPr>
-        <p:spPr>
-          <a:xfrm>
-            <a:off x="685800" y="1938528"/>
-            <a:ext cx="2194560" cy="365760"/>
-          </a:xfrm>
-          <a:prstGeom prst="rect">
-            <a:avLst/>
-          </a:prstGeom>
-          <a:noFill/>
-          <a:ln/>
-        </p:spPr>
-        <p:txBody>
-          <a:bodyPr wrap="square" lIns="0" tIns="0" rIns="0" bIns="0" rtlCol="0" anchor="t"/>
-          <a:lstStyle/>
-          <a:p>
-            <a:pPr indent="0" marL="0">
-              <a:buNone/>
-            </a:pPr>
-            <a:r>
-              <a:rPr lang="en-US" sz="1800" b="1" dirty="0">
-                <a:solidFill>
-                  <a:schemeClr val="tx2"/>
-                </a:solidFill>
-              </a:rPr>
-              <a:t>Cultura</a:t>
-            </a:r>
-            <a:endParaRPr lang="en-US" sz="1800" dirty="0"/>
-          </a:p>
-        </p:txBody>
-      </p:sp>
-      <p:sp>
-        <p:nvSpPr>
-          <p:cNvPr id="7" name="Cultura (subtítulo)"/>
-          <p:cNvSpPr txBox="1"/>
-          <p:nvPr/>
-        </p:nvSpPr>
-        <p:spPr>
-          <a:xfrm>
-            <a:off x="685800" y="2304288"/>
-            <a:ext cx="2194560" cy="320040"/>
-          </a:xfrm>
-          <a:prstGeom prst="rect">
-            <a:avLst/>
-          </a:prstGeom>
-          <a:noFill/>
-          <a:ln/>
-        </p:spPr>
-        <p:txBody>
-          <a:bodyPr wrap="square" lIns="0" tIns="0" rIns="0" bIns="0" rtlCol="0" anchor="t"/>
-          <a:lstStyle/>
-          <a:p>
-            <a:pPr indent="0" marL="0">
-              <a:buNone/>
-            </a:pPr>
-            <a:r>
-              <a:rPr lang="en-US" sz="1200" i="1" dirty="0">
-                <a:solidFill>
-                  <a:schemeClr val="accent6"/>
-                </a:solidFill>
-              </a:rPr>
-              <a:t>Decisão baseada em dados</a:t>
-            </a:r>
-            <a:endParaRPr lang="en-US" sz="1200" dirty="0"/>
-          </a:p>
-        </p:txBody>
-      </p:sp>
-      <p:sp>
-        <p:nvSpPr>
-          <p:cNvPr id="8" name="Cultura (lista)"/>
-          <p:cNvSpPr txBox="1"/>
-          <p:nvPr/>
-        </p:nvSpPr>
-        <p:spPr>
-          <a:xfrm>
-            <a:off x="685800" y="2697480"/>
-            <a:ext cx="2240280" cy="1737360"/>
-          </a:xfrm>
-          <a:prstGeom prst="rect">
-            <a:avLst/>
-          </a:prstGeom>
-          <a:noFill/>
-          <a:ln/>
-        </p:spPr>
-        <p:txBody>
-          <a:bodyPr wrap="square" lIns="0" tIns="0" rIns="0" bIns="0" rtlCol="0" anchor="t"/>
-          <a:lstStyle/>
-          <a:p>
-            <a:pPr marL="342900" indent="-342900">
-              <a:spcAft>
-                <a:spcPts val="600"/>
-              </a:spcAft>
-              <a:buSzPct val="100000"/>
-              <a:buChar char="•"/>
-            </a:pPr>
-            <a:r>
-              <a:rPr lang="en-US" sz="1150" dirty="0">
-                <a:solidFill>
-                  <a:schemeClr val="tx1"/>
-                </a:solidFill>
-              </a:rPr>
-              <a:t>Diretoria consulta os números direto, sem esperar planilha</a:t>
-            </a:r>
-            <a:endParaRPr lang="en-US" sz="1150" dirty="0"/>
-          </a:p>
-          <a:p>
-            <a:pPr marL="342900" indent="-342900">
-              <a:spcAft>
-                <a:spcPts val="600"/>
-              </a:spcAft>
-              <a:buSzPct val="100000"/>
-              <a:buChar char="•"/>
-            </a:pPr>
-            <a:r>
-              <a:rPr lang="en-US" sz="1150" dirty="0">
-                <a:solidFill>
-                  <a:schemeClr val="tx1"/>
-                </a:solidFill>
-              </a:rPr>
-              <a:t>Mesma fonte para todos: fim das versões conflitantes</a:t>
-            </a:r>
-            <a:endParaRPr lang="en-US" sz="1150" dirty="0"/>
-          </a:p>
-          <a:p>
-            <a:pPr marL="342900" indent="-342900">
-              <a:spcAft>
-                <a:spcPts val="600"/>
-              </a:spcAft>
-              <a:buSzPct val="100000"/>
-              <a:buChar char="•"/>
-            </a:pPr>
-            <a:r>
-              <a:rPr lang="en-US" sz="1150" dirty="0">
-                <a:solidFill>
-                  <a:schemeClr val="tx1"/>
-                </a:solidFill>
-              </a:rPr>
-              <a:t>Equipe foca em análise, não em coleta</a:t>
-            </a:r>
-            <a:endParaRPr lang="en-US" sz="1150" dirty="0"/>
-          </a:p>
-        </p:txBody>
-      </p:sp>
-      <p:sp>
-        <p:nvSpPr>
-          <p:cNvPr id="9" name="Segurança (cartão)"/>
-          <p:cNvSpPr/>
-          <p:nvPr/>
-        </p:nvSpPr>
-        <p:spPr>
-          <a:xfrm>
-            <a:off x="3246120" y="1097280"/>
-            <a:ext cx="2606040" cy="3429000"/>
-          </a:xfrm>
-          <a:prstGeom prst="roundRect">
-            <a:avLst>
-              <a:gd name="adj" fmla="val 4211"/>
-            </a:avLst>
-          </a:prstGeom>
-          <a:solidFill>
-            <a:schemeClr val="bg2"/>
-          </a:solidFill>
-          <a:ln/>
-          <a:effectLst>
-            <a:outerShdw sx="100000" sy="100000" kx="0" ky="0" algn="bl" rotWithShape="0" blurRad="76200" dist="25400" dir="5400000">
-              <a:srgbClr val="0F1E3D">
-                <a:alpha val="12000"/>
-              </a:srgbClr>
-            </a:outerShdw>
-          </a:effectLst>
-        </p:spPr>
-      </p:sp>
-      <p:sp>
-        <p:nvSpPr>
-          <p:cNvPr id="10" name="Segurança (círculo)"/>
-          <p:cNvSpPr/>
-          <p:nvPr/>
-        </p:nvSpPr>
-        <p:spPr>
-          <a:xfrm>
-            <a:off x="3474720" y="1280160"/>
-            <a:ext cx="548640" cy="548640"/>
-          </a:xfrm>
-          <a:prstGeom prst="ellipse">
-            <a:avLst/>
-          </a:prstGeom>
-          <a:solidFill>
-            <a:schemeClr val="accent2"/>
-          </a:solidFill>
-          <a:ln/>
-        </p:spPr>
-      </p:sp>
-      <p:sp>
-        <p:nvSpPr>
-          <p:cNvPr id="11" name="Segurança (rótulo)"/>
-          <p:cNvSpPr txBox="1"/>
-          <p:nvPr/>
-        </p:nvSpPr>
-        <p:spPr>
-          <a:xfrm>
-            <a:off x="3474720" y="1280160"/>
-            <a:ext cx="548640" cy="548640"/>
-          </a:xfrm>
-          <a:prstGeom prst="rect">
-            <a:avLst/>
-          </a:prstGeom>
-          <a:noFill/>
-          <a:ln/>
-        </p:spPr>
-        <p:txBody>
-          <a:bodyPr wrap="square" lIns="0" tIns="0" rIns="0" bIns="0" rtlCol="0" anchor="ctr"/>
-          <a:lstStyle/>
-          <a:p>
-            <a:pPr algn="ctr" indent="0" marL="0">
-              <a:buNone/>
-            </a:pPr>
-            <a:r>
-              <a:rPr lang="en-US" sz="1300" b="1" dirty="0">
-                <a:solidFill>
-                  <a:schemeClr val="bg1"/>
-                </a:solidFill>
-              </a:rPr>
-              <a:t>S</a:t>
-            </a:r>
-            <a:endParaRPr lang="en-US" sz="1300" dirty="0"/>
-          </a:p>
-        </p:txBody>
-      </p:sp>
-      <p:sp>
-        <p:nvSpPr>
-          <p:cNvPr id="12" name="Segurança (título)"/>
-          <p:cNvSpPr txBox="1"/>
-          <p:nvPr/>
-        </p:nvSpPr>
-        <p:spPr>
-          <a:xfrm>
-            <a:off x="3474720" y="1938528"/>
-            <a:ext cx="2194560" cy="365760"/>
-          </a:xfrm>
-          <a:prstGeom prst="rect">
-            <a:avLst/>
-          </a:prstGeom>
-          <a:noFill/>
-          <a:ln/>
-        </p:spPr>
-        <p:txBody>
-          <a:bodyPr wrap="square" lIns="0" tIns="0" rIns="0" bIns="0" rtlCol="0" anchor="t"/>
-          <a:lstStyle/>
-          <a:p>
-            <a:pPr indent="0" marL="0">
-              <a:buNone/>
-            </a:pPr>
-            <a:r>
-              <a:rPr lang="en-US" sz="1800" b="1" dirty="0">
-                <a:solidFill>
-                  <a:schemeClr val="tx2"/>
-                </a:solidFill>
-              </a:rPr>
-              <a:t>Segurança</a:t>
-            </a:r>
-            <a:endParaRPr lang="en-US" sz="1800" dirty="0"/>
-          </a:p>
-        </p:txBody>
-      </p:sp>
-      <p:sp>
-        <p:nvSpPr>
-          <p:cNvPr id="13" name="Segurança (subtítulo)"/>
-          <p:cNvSpPr txBox="1"/>
-          <p:nvPr/>
-        </p:nvSpPr>
-        <p:spPr>
-          <a:xfrm>
-            <a:off x="3474720" y="2304288"/>
-            <a:ext cx="2194560" cy="320040"/>
-          </a:xfrm>
-          <a:prstGeom prst="rect">
-            <a:avLst/>
-          </a:prstGeom>
-          <a:noFill/>
-          <a:ln/>
-        </p:spPr>
-        <p:txBody>
-          <a:bodyPr wrap="square" lIns="0" tIns="0" rIns="0" bIns="0" rtlCol="0" anchor="t"/>
-          <a:lstStyle/>
-          <a:p>
-            <a:pPr indent="0" marL="0">
-              <a:buNone/>
-            </a:pPr>
-            <a:r>
-              <a:rPr lang="en-US" sz="1200" i="1" dirty="0">
-                <a:solidFill>
-                  <a:schemeClr val="accent6"/>
-                </a:solidFill>
-              </a:rPr>
-              <a:t>Acesso controlado e LGPD</a:t>
-            </a:r>
-            <a:endParaRPr lang="en-US" sz="1200" dirty="0"/>
-          </a:p>
-        </p:txBody>
-      </p:sp>
-      <p:sp>
-        <p:nvSpPr>
-          <p:cNvPr id="14" name="Segurança (lista)"/>
-          <p:cNvSpPr txBox="1"/>
-          <p:nvPr/>
-        </p:nvSpPr>
-        <p:spPr>
-          <a:xfrm>
-            <a:off x="3474720" y="2697480"/>
-            <a:ext cx="2240280" cy="1737360"/>
-          </a:xfrm>
-          <a:prstGeom prst="rect">
-            <a:avLst/>
-          </a:prstGeom>
-          <a:noFill/>
-          <a:ln/>
-        </p:spPr>
-        <p:txBody>
-          <a:bodyPr wrap="square" lIns="0" tIns="0" rIns="0" bIns="0" rtlCol="0" anchor="t"/>
-          <a:lstStyle/>
-          <a:p>
-            <a:pPr marL="342900" indent="-342900">
-              <a:spcAft>
-                <a:spcPts val="600"/>
-              </a:spcAft>
-              <a:buSzPct val="100000"/>
-              <a:buChar char="•"/>
-            </a:pPr>
-            <a:r>
-              <a:rPr lang="en-US" sz="1150" dirty="0">
-                <a:solidFill>
-                  <a:schemeClr val="tx1"/>
-                </a:solidFill>
-              </a:rPr>
-              <a:t>Login individual e permissão por seção</a:t>
-            </a:r>
-            <a:endParaRPr lang="en-US" sz="1150" dirty="0"/>
-          </a:p>
-          <a:p>
-            <a:pPr marL="342900" indent="-342900">
-              <a:spcAft>
-                <a:spcPts val="600"/>
-              </a:spcAft>
-              <a:buSzPct val="100000"/>
-              <a:buChar char="•"/>
-            </a:pPr>
-            <a:r>
-              <a:rPr lang="en-US" sz="1150" dirty="0">
-                <a:solidFill>
-                  <a:schemeClr val="tx1"/>
-                </a:solidFill>
-              </a:rPr>
-              <a:t>Regras de acesso por linha no banco (RLS)</a:t>
-            </a:r>
-            <a:endParaRPr lang="en-US" sz="1150" dirty="0"/>
-          </a:p>
-          <a:p>
-            <a:pPr marL="342900" indent="-342900">
-              <a:spcAft>
-                <a:spcPts val="600"/>
-              </a:spcAft>
-              <a:buSzPct val="100000"/>
-              <a:buChar char="•"/>
-            </a:pPr>
-            <a:r>
-              <a:rPr lang="en-US" sz="1150" dirty="0">
-                <a:solidFill>
-                  <a:schemeClr val="tx1"/>
-                </a:solidFill>
-              </a:rPr>
-              <a:t>Dados pessoais de formulários protegidos</a:t>
-            </a:r>
-            <a:endParaRPr lang="en-US" sz="1150" dirty="0"/>
-          </a:p>
-        </p:txBody>
-      </p:sp>
-      <p:sp>
-        <p:nvSpPr>
-          <p:cNvPr id="15" name="Escala (cartão)"/>
-          <p:cNvSpPr/>
-          <p:nvPr/>
-        </p:nvSpPr>
-        <p:spPr>
-          <a:xfrm>
-            <a:off x="6035040" y="1097280"/>
-            <a:ext cx="2606040" cy="3429000"/>
-          </a:xfrm>
-          <a:prstGeom prst="roundRect">
-            <a:avLst>
-              <a:gd name="adj" fmla="val 4211"/>
-            </a:avLst>
-          </a:prstGeom>
-          <a:solidFill>
-            <a:schemeClr val="bg2"/>
-          </a:solidFill>
-          <a:ln/>
-          <a:effectLst>
-            <a:outerShdw sx="100000" sy="100000" kx="0" ky="0" algn="bl" rotWithShape="0" blurRad="76200" dist="25400" dir="5400000">
-              <a:srgbClr val="0F1E3D">
-                <a:alpha val="12000"/>
-              </a:srgbClr>
-            </a:outerShdw>
-          </a:effectLst>
-        </p:spPr>
-      </p:sp>
-      <p:sp>
-        <p:nvSpPr>
-          <p:cNvPr id="16" name="Escala (círculo)"/>
-          <p:cNvSpPr/>
-          <p:nvPr/>
-        </p:nvSpPr>
-        <p:spPr>
-          <a:xfrm>
-            <a:off x="6263640" y="1280160"/>
-            <a:ext cx="548640" cy="548640"/>
-          </a:xfrm>
-          <a:prstGeom prst="ellipse">
-            <a:avLst/>
-          </a:prstGeom>
-          <a:solidFill>
-            <a:schemeClr val="accent4"/>
-          </a:solidFill>
-          <a:ln/>
-        </p:spPr>
-      </p:sp>
-      <p:sp>
-        <p:nvSpPr>
-          <p:cNvPr id="17" name="Escala (rótulo)"/>
-          <p:cNvSpPr txBox="1"/>
-          <p:nvPr/>
-        </p:nvSpPr>
-        <p:spPr>
-          <a:xfrm>
-            <a:off x="6263640" y="1280160"/>
-            <a:ext cx="548640" cy="548640"/>
-          </a:xfrm>
-          <a:prstGeom prst="rect">
-            <a:avLst/>
-          </a:prstGeom>
-          <a:noFill/>
-          <a:ln/>
-        </p:spPr>
-        <p:txBody>
-          <a:bodyPr wrap="square" lIns="0" tIns="0" rIns="0" bIns="0" rtlCol="0" anchor="ctr"/>
-          <a:lstStyle/>
-          <a:p>
-            <a:pPr algn="ctr" indent="0" marL="0">
-              <a:buNone/>
-            </a:pPr>
-            <a:r>
-              <a:rPr lang="en-US" sz="1300" b="1" dirty="0">
-                <a:solidFill>
-                  <a:schemeClr val="bg1"/>
-                </a:solidFill>
-              </a:rPr>
-              <a:t>E</a:t>
-            </a:r>
-            <a:endParaRPr lang="en-US" sz="1300" dirty="0"/>
-          </a:p>
-        </p:txBody>
-      </p:sp>
-      <p:sp>
-        <p:nvSpPr>
-          <p:cNvPr id="18" name="Escala (título)"/>
-          <p:cNvSpPr txBox="1"/>
-          <p:nvPr/>
-        </p:nvSpPr>
-        <p:spPr>
-          <a:xfrm>
-            <a:off x="6263640" y="1938528"/>
-            <a:ext cx="2194560" cy="365760"/>
-          </a:xfrm>
-          <a:prstGeom prst="rect">
-            <a:avLst/>
-          </a:prstGeom>
-          <a:noFill/>
-          <a:ln/>
-        </p:spPr>
-        <p:txBody>
-          <a:bodyPr wrap="square" lIns="0" tIns="0" rIns="0" bIns="0" rtlCol="0" anchor="t"/>
-          <a:lstStyle/>
-          <a:p>
-            <a:pPr indent="0" marL="0">
-              <a:buNone/>
-            </a:pPr>
-            <a:r>
-              <a:rPr lang="en-US" sz="1800" b="1" dirty="0">
-                <a:solidFill>
-                  <a:schemeClr val="tx2"/>
-                </a:solidFill>
-              </a:rPr>
-              <a:t>Escala</a:t>
-            </a:r>
-            <a:endParaRPr lang="en-US" sz="1800" dirty="0"/>
-          </a:p>
-        </p:txBody>
-      </p:sp>
-      <p:sp>
-        <p:nvSpPr>
-          <p:cNvPr id="19" name="Escala (subtítulo)"/>
-          <p:cNvSpPr txBox="1"/>
-          <p:nvPr/>
-        </p:nvSpPr>
-        <p:spPr>
-          <a:xfrm>
-            <a:off x="6263640" y="2304288"/>
-            <a:ext cx="2194560" cy="320040"/>
-          </a:xfrm>
-          <a:prstGeom prst="rect">
-            <a:avLst/>
-          </a:prstGeom>
-          <a:noFill/>
-          <a:ln/>
-        </p:spPr>
-        <p:txBody>
-          <a:bodyPr wrap="square" lIns="0" tIns="0" rIns="0" bIns="0" rtlCol="0" anchor="t"/>
-          <a:lstStyle/>
-          <a:p>
-            <a:pPr indent="0" marL="0">
-              <a:buNone/>
-            </a:pPr>
-            <a:r>
-              <a:rPr lang="en-US" sz="1200" i="1" dirty="0">
-                <a:solidFill>
-                  <a:schemeClr val="accent6"/>
-                </a:solidFill>
-              </a:rPr>
-              <a:t>Cresce sem custo proporcional</a:t>
-            </a:r>
-            <a:endParaRPr lang="en-US" sz="1200" dirty="0"/>
-          </a:p>
-        </p:txBody>
-      </p:sp>
-      <p:sp>
-        <p:nvSpPr>
-          <p:cNvPr id="20" name="Escala (lista)"/>
-          <p:cNvSpPr txBox="1"/>
-          <p:nvPr/>
-        </p:nvSpPr>
-        <p:spPr>
-          <a:xfrm>
-            <a:off x="6263640" y="2697480"/>
-            <a:ext cx="2240280" cy="1737360"/>
-          </a:xfrm>
-          <a:prstGeom prst="rect">
-            <a:avLst/>
-          </a:prstGeom>
-          <a:noFill/>
-          <a:ln/>
-        </p:spPr>
-        <p:txBody>
-          <a:bodyPr wrap="square" lIns="0" tIns="0" rIns="0" bIns="0" rtlCol="0" anchor="t"/>
-          <a:lstStyle/>
-          <a:p>
-            <a:pPr marL="342900" indent="-342900">
-              <a:spcAft>
-                <a:spcPts val="600"/>
-              </a:spcAft>
-              <a:buSzPct val="100000"/>
-              <a:buChar char="•"/>
-            </a:pPr>
-            <a:r>
-              <a:rPr lang="en-US" sz="1150" dirty="0">
-                <a:solidFill>
-                  <a:schemeClr val="tx1"/>
-                </a:solidFill>
-              </a:rPr>
-              <a:t>Novos usuários sem nova licença por pessoa</a:t>
-            </a:r>
-            <a:endParaRPr lang="en-US" sz="1150" dirty="0"/>
-          </a:p>
-          <a:p>
-            <a:pPr marL="342900" indent="-342900">
-              <a:spcAft>
-                <a:spcPts val="600"/>
-              </a:spcAft>
-              <a:buSzPct val="100000"/>
-              <a:buChar char="•"/>
-            </a:pPr>
-            <a:r>
-              <a:rPr lang="en-US" sz="1150" dirty="0">
-                <a:solidFill>
-                  <a:schemeClr val="tx1"/>
-                </a:solidFill>
-              </a:rPr>
-              <a:t>Novos indicadores entram no mesmo painel</a:t>
-            </a:r>
-            <a:endParaRPr lang="en-US" sz="1150" dirty="0"/>
-          </a:p>
-          <a:p>
-            <a:pPr marL="342900" indent="-342900">
-              <a:spcAft>
-                <a:spcPts val="600"/>
-              </a:spcAft>
-              <a:buSzPct val="100000"/>
-              <a:buChar char="•"/>
-            </a:pPr>
-            <a:r>
-              <a:rPr lang="en-US" sz="1150" dirty="0">
-                <a:solidFill>
-                  <a:schemeClr val="tx1"/>
-                </a:solidFill>
-              </a:rPr>
-              <a:t>Base para atender outras CDLs (consultoria)</a:t>
-            </a:r>
-            <a:endParaRPr lang="en-US" sz="1150" dirty="0"/>
-          </a:p>
-        </p:txBody>
-      </p:sp>
-      <p:sp>
-        <p:nvSpPr>
-          <p:cNvPr id="25" name="Slide Number Placeholder 0"/>
-          <p:cNvSpPr>
-            <a:spLocks noGrp="1"/>
-          </p:cNvSpPr>
-          <p:nvPr>
-            <p:ph type="sldNum" sz="quarter" idx="4294967295"/>
-          </p:nvPr>
-        </p:nvSpPr>
-        <p:spPr>
-          <a:xfrm>
-            <a:off x="8321040" y="4773168"/>
-            <a:ext cx="365760" cy="228600"/>
-          </a:xfrm>
-          <a:prstGeom prst="rect">
-            <a:avLst/>
-          </a:prstGeom>
-          <a:extLst>
-            <a:ext uri="{C572A759-6A51-4108-AA02-DFA0A04FC94B}">
-              <ma14:wrappingTextBoxFlag xmlns:ma14="http://schemas.microsoft.com/office/mac/drawingml/2011/main" val="0"/>
-            </a:ext>
-          </a:extLst>
-        </p:spPr>
-        <p:txBody>
-          <a:bodyPr/>
-          <a:lstStyle>
-            <a:lvl1pPr>
-              <a:defRPr sz="900">
-                <a:solidFill>
-                  <a:schemeClr val="accent6"/>
-                </a:solidFill>
-              </a:defRPr>
-            </a:lvl1pPr>
-          </a:lstStyle>
-          <a:p>
-            <a:pPr algn="r"/>
-            <a:fld id="{F7021451-1387-4CA6-816F-3879F97B5CBC}" type="slidenum">
-              <a:rPr b="0" lang="en-US"/>
-              <a:t>7</a:t>
-            </a:fld>
-            <a:endParaRPr lang="en-US"/>
-          </a:p>
-        </p:txBody>
-      </p:sp>
-    </p:spTree>
-  </p:cSld>
-  <p:clrMapOvr>
-    <a:masterClrMapping/>
-  </p:clrMapOvr>
-</p:sld>
-</file>
-
-<file path=ppt/slides/slide8.xml><?xml version="1.0" encoding="utf-8"?>
-<p:sld xmlns:a="http://schemas.openxmlformats.org/drawingml/2006/main" xmlns:r="http://schemas.openxmlformats.org/officeDocument/2006/relationships" xmlns:p="http://schemas.openxmlformats.org/presentationml/2006/main">
-  <p:cSld name="Slide 8">
-    <p:spTree>
-      <p:nvGrpSpPr>
-        <p:cNvPr id="1" name=""/>
-        <p:cNvGrpSpPr/>
-        <p:nvPr/>
-      </p:nvGrpSpPr>
-      <p:grpSpPr>
-        <a:xfrm>
-          <a:off x="0" y="0"/>
-          <a:ext cx="0" cy="0"/>
-          <a:chOff x="0" y="0"/>
-          <a:chExt cx="0" cy="0"/>
-        </a:xfrm>
-      </p:grpSpPr>
-      <p:sp>
-        <p:nvSpPr>
-          <p:cNvPr id="2" name="Text 0"/>
-          <p:cNvSpPr/>
-          <p:nvPr>
-            <p:ph idx="100" type="title" hasCustomPrompt="1"/>
-          </p:nvPr>
-        </p:nvSpPr>
-        <p:spPr>
-          <a:xfrm>
-            <a:off x="457200" y="274320"/>
-            <a:ext cx="8229600" cy="594360"/>
-          </a:xfrm>
-          <a:prstGeom prst="rect">
-            <a:avLst/>
-          </a:prstGeom>
-          <a:noFill/>
-          <a:ln/>
-        </p:spPr>
-        <p:txBody>
-          <a:bodyPr wrap="square" lIns="0" tIns="0" rIns="0" bIns="0" rtlCol="0" anchor="ctr"/>
-          <a:lstStyle/>
-          <a:p>
-            <a:pPr algn="l" indent="0" marL="0">
-              <a:buNone/>
-            </a:pPr>
-            <a:r>
-              <a:rPr lang="en-US" sz="2200" b="1" dirty="0">
-                <a:solidFill>
-                  <a:schemeClr val="tx2"/>
-                </a:solidFill>
-              </a:rPr>
-              <a:t>Plano de implementação e cronograma</a:t>
-            </a:r>
-            <a:endParaRPr lang="en-US" sz="2200" dirty="0"/>
-          </a:p>
-        </p:txBody>
-      </p:sp>
-      <p:sp>
-        <p:nvSpPr>
-          <p:cNvPr id="3" name="Linha do tempo"/>
-          <p:cNvSpPr/>
-          <p:nvPr/>
-        </p:nvSpPr>
-        <p:spPr>
-          <a:xfrm>
-            <a:off x="731520" y="1691640"/>
-            <a:ext cx="7680960" cy="0"/>
-          </a:xfrm>
-          <a:prstGeom prst="line">
-            <a:avLst/>
-          </a:prstGeom>
-          <a:noFill/>
-          <a:ln w="38100">
-            <a:solidFill>
-              <a:schemeClr val="accent3"/>
-            </a:solidFill>
-            <a:prstDash val="solid"/>
-          </a:ln>
-        </p:spPr>
-      </p:sp>
-      <p:sp>
-        <p:nvSpPr>
-          <p:cNvPr id="4" name="Fase 1 (marco)"/>
-          <p:cNvSpPr/>
-          <p:nvPr/>
-        </p:nvSpPr>
-        <p:spPr>
-          <a:xfrm>
-            <a:off x="1261872" y="1536192"/>
-            <a:ext cx="310896" cy="310896"/>
-          </a:xfrm>
-          <a:prstGeom prst="ellipse">
-            <a:avLst/>
-          </a:prstGeom>
-          <a:solidFill>
-            <a:schemeClr val="accent2"/>
-          </a:solidFill>
-          <a:ln w="25400">
-            <a:solidFill>
-              <a:schemeClr val="bg1"/>
-            </a:solidFill>
-            <a:prstDash val="solid"/>
-          </a:ln>
-        </p:spPr>
-      </p:sp>
-      <p:sp>
-        <p:nvSpPr>
-          <p:cNvPr id="5" name="Fase 1 (período)"/>
-          <p:cNvSpPr txBox="1"/>
-          <p:nvPr/>
-        </p:nvSpPr>
-        <p:spPr>
-          <a:xfrm>
-            <a:off x="457200" y="1051560"/>
-            <a:ext cx="1920240" cy="320040"/>
-          </a:xfrm>
-          <a:prstGeom prst="rect">
-            <a:avLst/>
-          </a:prstGeom>
-          <a:noFill/>
-          <a:ln/>
-        </p:spPr>
-        <p:txBody>
-          <a:bodyPr wrap="square" lIns="0" tIns="0" rIns="0" bIns="0" rtlCol="0" anchor="t"/>
-          <a:lstStyle/>
-          <a:p>
-            <a:pPr algn="ctr" indent="0" marL="0">
-              <a:buNone/>
-            </a:pPr>
-            <a:r>
-              <a:rPr lang="en-US" sz="1100" b="1" dirty="0">
-                <a:solidFill>
-                  <a:schemeClr val="accent6"/>
-                </a:solidFill>
-              </a:rPr>
-              <a:t>Fase 1 · Out/2026</a:t>
-            </a:r>
-            <a:endParaRPr lang="en-US" sz="1100" dirty="0"/>
-          </a:p>
-        </p:txBody>
-      </p:sp>
-      <p:sp>
-        <p:nvSpPr>
-          <p:cNvPr id="6" name="Fase 1 (cartão)"/>
-          <p:cNvSpPr/>
-          <p:nvPr/>
-        </p:nvSpPr>
-        <p:spPr>
-          <a:xfrm>
-            <a:off x="457200" y="2057400"/>
-            <a:ext cx="1920240" cy="2468880"/>
-          </a:xfrm>
-          <a:prstGeom prst="roundRect">
-            <a:avLst>
-              <a:gd name="adj" fmla="val 5714"/>
-            </a:avLst>
-          </a:prstGeom>
-          <a:solidFill>
-            <a:schemeClr val="bg2"/>
-          </a:solidFill>
-          <a:ln/>
-          <a:effectLst>
-            <a:outerShdw sx="100000" sy="100000" kx="0" ky="0" algn="bl" rotWithShape="0" blurRad="76200" dist="25400" dir="5400000">
-              <a:srgbClr val="0F1E3D">
-                <a:alpha val="12000"/>
-              </a:srgbClr>
-            </a:outerShdw>
-          </a:effectLst>
-        </p:spPr>
-      </p:sp>
-      <p:sp>
-        <p:nvSpPr>
-          <p:cNvPr id="7" name="Fase 1 (nome)"/>
-          <p:cNvSpPr txBox="1"/>
-          <p:nvPr/>
-        </p:nvSpPr>
-        <p:spPr>
-          <a:xfrm>
-            <a:off x="621792" y="2176272"/>
-            <a:ext cx="1645920" cy="365760"/>
-          </a:xfrm>
-          <a:prstGeom prst="rect">
-            <a:avLst/>
-          </a:prstGeom>
-          <a:noFill/>
-          <a:ln/>
-        </p:spPr>
-        <p:txBody>
-          <a:bodyPr wrap="square" lIns="0" tIns="0" rIns="0" bIns="0" rtlCol="0" anchor="t"/>
-          <a:lstStyle/>
-          <a:p>
-            <a:pPr indent="0" marL="0">
-              <a:buNone/>
-            </a:pPr>
-            <a:r>
-              <a:rPr lang="en-US" sz="1600" b="1" dirty="0">
-                <a:solidFill>
-                  <a:schemeClr val="tx2"/>
-                </a:solidFill>
-              </a:rPr>
-              <a:t>Fundação</a:t>
-            </a:r>
-            <a:endParaRPr lang="en-US" sz="1600" dirty="0"/>
-          </a:p>
-        </p:txBody>
-      </p:sp>
-      <p:sp>
-        <p:nvSpPr>
-          <p:cNvPr id="8" name="Fase 1 (status, fundo)"/>
-          <p:cNvSpPr/>
-          <p:nvPr/>
-        </p:nvSpPr>
-        <p:spPr>
-          <a:xfrm>
-            <a:off x="621792" y="2578608"/>
-            <a:ext cx="1143000" cy="274320"/>
-          </a:xfrm>
-          <a:prstGeom prst="roundRect">
-            <a:avLst>
-              <a:gd name="adj" fmla="val 26667"/>
-            </a:avLst>
-          </a:prstGeom>
-          <a:solidFill>
-            <a:schemeClr val="accent2"/>
-          </a:solidFill>
-          <a:ln/>
-        </p:spPr>
-      </p:sp>
-      <p:sp>
-        <p:nvSpPr>
-          <p:cNvPr id="9" name="Fase 1 (status)"/>
-          <p:cNvSpPr txBox="1"/>
-          <p:nvPr/>
-        </p:nvSpPr>
-        <p:spPr>
-          <a:xfrm>
-            <a:off x="621792" y="2578608"/>
-            <a:ext cx="1143000" cy="274320"/>
-          </a:xfrm>
-          <a:prstGeom prst="rect">
-            <a:avLst/>
-          </a:prstGeom>
-          <a:noFill/>
-          <a:ln/>
-        </p:spPr>
-        <p:txBody>
-          <a:bodyPr wrap="square" lIns="0" tIns="0" rIns="0" bIns="0" rtlCol="0" anchor="ctr"/>
-          <a:lstStyle/>
-          <a:p>
-            <a:pPr algn="ctr" indent="0" marL="0">
-              <a:buNone/>
-            </a:pPr>
-            <a:r>
-              <a:rPr lang="en-US" sz="1000" b="1" dirty="0">
-                <a:solidFill>
-                  <a:schemeClr val="bg1"/>
-                </a:solidFill>
-              </a:rPr>
-              <a:t>Concluída</a:t>
-            </a:r>
-            <a:endParaRPr lang="en-US" sz="1000" dirty="0"/>
-          </a:p>
-        </p:txBody>
-      </p:sp>
-      <p:sp>
-        <p:nvSpPr>
-          <p:cNvPr id="10" name="Fase 1 (entregas)"/>
-          <p:cNvSpPr txBox="1"/>
-          <p:nvPr/>
-        </p:nvSpPr>
-        <p:spPr>
-          <a:xfrm>
-            <a:off x="566928" y="2971800"/>
-            <a:ext cx="1737360" cy="1463040"/>
-          </a:xfrm>
-          <a:prstGeom prst="rect">
-            <a:avLst/>
-          </a:prstGeom>
-          <a:noFill/>
-          <a:ln/>
-        </p:spPr>
-        <p:txBody>
-          <a:bodyPr wrap="square" lIns="0" tIns="0" rIns="0" bIns="0" rtlCol="0" anchor="t"/>
-          <a:lstStyle/>
-          <a:p>
-            <a:pPr marL="342900" indent="-342900">
-              <a:spcAft>
-                <a:spcPts val="400"/>
-              </a:spcAft>
-              <a:buSzPct val="100000"/>
-              <a:buChar char="•"/>
-            </a:pPr>
-            <a:r>
-              <a:rPr lang="en-US" sz="1100" dirty="0">
-                <a:solidFill>
-                  <a:schemeClr val="tx1"/>
-                </a:solidFill>
-              </a:rPr>
-              <a:t>Plataforma no ar com login</a:t>
-            </a:r>
-            <a:endParaRPr lang="en-US" sz="1100" dirty="0"/>
-          </a:p>
-          <a:p>
-            <a:pPr marL="342900" indent="-342900">
-              <a:spcAft>
-                <a:spcPts val="400"/>
-              </a:spcAft>
-              <a:buSzPct val="100000"/>
-              <a:buChar char="•"/>
-            </a:pPr>
-            <a:r>
-              <a:rPr lang="en-US" sz="1100" dirty="0">
-                <a:solidFill>
-                  <a:schemeClr val="tx1"/>
-                </a:solidFill>
-              </a:rPr>
-              <a:t>Dashboard Panorama Econômico</a:t>
-            </a:r>
-            <a:endParaRPr lang="en-US" sz="1100" dirty="0"/>
-          </a:p>
-          <a:p>
-            <a:pPr marL="342900" indent="-342900">
-              <a:spcAft>
-                <a:spcPts val="400"/>
-              </a:spcAft>
-              <a:buSzPct val="100000"/>
-              <a:buChar char="•"/>
-            </a:pPr>
-            <a:r>
-              <a:rPr lang="en-US" sz="1100" dirty="0">
-                <a:solidFill>
-                  <a:schemeClr val="tx1"/>
-                </a:solidFill>
-              </a:rPr>
-              <a:t>Clipping, Survey, Estoque</a:t>
-            </a:r>
-            <a:endParaRPr lang="en-US" sz="1100" dirty="0"/>
-          </a:p>
-        </p:txBody>
-      </p:sp>
-      <p:sp>
-        <p:nvSpPr>
-          <p:cNvPr id="11" name="Fase 2 (marco)"/>
-          <p:cNvSpPr/>
-          <p:nvPr/>
-        </p:nvSpPr>
-        <p:spPr>
-          <a:xfrm>
-            <a:off x="3364992" y="1536192"/>
-            <a:ext cx="310896" cy="310896"/>
-          </a:xfrm>
-          <a:prstGeom prst="ellipse">
-            <a:avLst/>
-          </a:prstGeom>
-          <a:solidFill>
-            <a:schemeClr val="accent1"/>
-          </a:solidFill>
-          <a:ln w="25400">
-            <a:solidFill>
-              <a:schemeClr val="bg1"/>
-            </a:solidFill>
-            <a:prstDash val="solid"/>
-          </a:ln>
-        </p:spPr>
-      </p:sp>
-      <p:sp>
-        <p:nvSpPr>
-          <p:cNvPr id="12" name="Fase 2 (período)"/>
-          <p:cNvSpPr txBox="1"/>
-          <p:nvPr/>
-        </p:nvSpPr>
-        <p:spPr>
-          <a:xfrm>
-            <a:off x="2560320" y="1051560"/>
-            <a:ext cx="1920240" cy="320040"/>
-          </a:xfrm>
-          <a:prstGeom prst="rect">
-            <a:avLst/>
-          </a:prstGeom>
-          <a:noFill/>
-          <a:ln/>
-        </p:spPr>
-        <p:txBody>
-          <a:bodyPr wrap="square" lIns="0" tIns="0" rIns="0" bIns="0" rtlCol="0" anchor="t"/>
-          <a:lstStyle/>
-          <a:p>
-            <a:pPr algn="ctr" indent="0" marL="0">
-              <a:buNone/>
-            </a:pPr>
-            <a:r>
-              <a:rPr lang="en-US" sz="1100" b="1" dirty="0">
-                <a:solidFill>
-                  <a:schemeClr val="accent6"/>
-                </a:solidFill>
-              </a:rPr>
-              <a:t>Fase 2 · Nov–Dez/2026</a:t>
-            </a:r>
-            <a:endParaRPr lang="en-US" sz="1100" dirty="0"/>
-          </a:p>
-        </p:txBody>
-      </p:sp>
-      <p:sp>
-        <p:nvSpPr>
-          <p:cNvPr id="13" name="Fase 2 (cartão)"/>
-          <p:cNvSpPr/>
-          <p:nvPr/>
-        </p:nvSpPr>
-        <p:spPr>
-          <a:xfrm>
-            <a:off x="2560320" y="2057400"/>
-            <a:ext cx="1920240" cy="2468880"/>
-          </a:xfrm>
-          <a:prstGeom prst="roundRect">
-            <a:avLst>
-              <a:gd name="adj" fmla="val 5714"/>
-            </a:avLst>
-          </a:prstGeom>
-          <a:solidFill>
-            <a:schemeClr val="bg2"/>
-          </a:solidFill>
-          <a:ln/>
-          <a:effectLst>
-            <a:outerShdw sx="100000" sy="100000" kx="0" ky="0" algn="bl" rotWithShape="0" blurRad="76200" dist="25400" dir="5400000">
-              <a:srgbClr val="0F1E3D">
-                <a:alpha val="12000"/>
-              </a:srgbClr>
-            </a:outerShdw>
-          </a:effectLst>
-        </p:spPr>
-      </p:sp>
-      <p:sp>
-        <p:nvSpPr>
-          <p:cNvPr id="14" name="Fase 2 (nome)"/>
-          <p:cNvSpPr txBox="1"/>
-          <p:nvPr/>
-        </p:nvSpPr>
-        <p:spPr>
-          <a:xfrm>
-            <a:off x="2724912" y="2176272"/>
-            <a:ext cx="1645920" cy="365760"/>
-          </a:xfrm>
-          <a:prstGeom prst="rect">
-            <a:avLst/>
-          </a:prstGeom>
-          <a:noFill/>
-          <a:ln/>
-        </p:spPr>
-        <p:txBody>
-          <a:bodyPr wrap="square" lIns="0" tIns="0" rIns="0" bIns="0" rtlCol="0" anchor="t"/>
-          <a:lstStyle/>
-          <a:p>
-            <a:pPr indent="0" marL="0">
-              <a:buNone/>
-            </a:pPr>
-            <a:r>
-              <a:rPr lang="en-US" sz="1600" b="1" dirty="0">
-                <a:solidFill>
-                  <a:schemeClr val="tx2"/>
-                </a:solidFill>
-              </a:rPr>
-              <a:t>Consolidação</a:t>
-            </a:r>
-            <a:endParaRPr lang="en-US" sz="1600" dirty="0"/>
-          </a:p>
-        </p:txBody>
-      </p:sp>
-      <p:sp>
-        <p:nvSpPr>
-          <p:cNvPr id="15" name="Fase 2 (status, fundo)"/>
-          <p:cNvSpPr/>
-          <p:nvPr/>
-        </p:nvSpPr>
-        <p:spPr>
-          <a:xfrm>
-            <a:off x="2724912" y="2578608"/>
-            <a:ext cx="1143000" cy="274320"/>
-          </a:xfrm>
-          <a:prstGeom prst="roundRect">
-            <a:avLst>
-              <a:gd name="adj" fmla="val 26667"/>
-            </a:avLst>
-          </a:prstGeom>
-          <a:solidFill>
-            <a:schemeClr val="accent1"/>
-          </a:solidFill>
-          <a:ln/>
-        </p:spPr>
-      </p:sp>
-      <p:sp>
-        <p:nvSpPr>
-          <p:cNvPr id="16" name="Fase 2 (status)"/>
-          <p:cNvSpPr txBox="1"/>
-          <p:nvPr/>
-        </p:nvSpPr>
-        <p:spPr>
-          <a:xfrm>
-            <a:off x="2724912" y="2578608"/>
-            <a:ext cx="1143000" cy="274320"/>
-          </a:xfrm>
-          <a:prstGeom prst="rect">
-            <a:avLst/>
-          </a:prstGeom>
-          <a:noFill/>
-          <a:ln/>
-        </p:spPr>
-        <p:txBody>
-          <a:bodyPr wrap="square" lIns="0" tIns="0" rIns="0" bIns="0" rtlCol="0" anchor="ctr"/>
-          <a:lstStyle/>
-          <a:p>
-            <a:pPr algn="ctr" indent="0" marL="0">
-              <a:buNone/>
-            </a:pPr>
-            <a:r>
-              <a:rPr lang="en-US" sz="1000" b="1" dirty="0">
-                <a:solidFill>
-                  <a:schemeClr val="bg1"/>
-                </a:solidFill>
-              </a:rPr>
-              <a:t>Em andamento</a:t>
-            </a:r>
-            <a:endParaRPr lang="en-US" sz="1000" dirty="0"/>
-          </a:p>
-        </p:txBody>
-      </p:sp>
-      <p:sp>
-        <p:nvSpPr>
-          <p:cNvPr id="17" name="Fase 2 (entregas)"/>
-          <p:cNvSpPr txBox="1"/>
-          <p:nvPr/>
-        </p:nvSpPr>
-        <p:spPr>
-          <a:xfrm>
-            <a:off x="2670048" y="2971800"/>
-            <a:ext cx="1737360" cy="1463040"/>
-          </a:xfrm>
-          <a:prstGeom prst="rect">
-            <a:avLst/>
-          </a:prstGeom>
-          <a:noFill/>
-          <a:ln/>
-        </p:spPr>
-        <p:txBody>
-          <a:bodyPr wrap="square" lIns="0" tIns="0" rIns="0" bIns="0" rtlCol="0" anchor="t"/>
-          <a:lstStyle/>
-          <a:p>
-            <a:pPr marL="342900" indent="-342900">
-              <a:spcAft>
-                <a:spcPts val="400"/>
-              </a:spcAft>
-              <a:buSzPct val="100000"/>
-              <a:buChar char="•"/>
-            </a:pPr>
-            <a:r>
-              <a:rPr lang="en-US" sz="1100" dirty="0">
-                <a:solidFill>
-                  <a:schemeClr val="tx1"/>
-                </a:solidFill>
-              </a:rPr>
-              <a:t>Survey em tempo real</a:t>
-            </a:r>
-            <a:endParaRPr lang="en-US" sz="1100" dirty="0"/>
-          </a:p>
-          <a:p>
-            <a:pPr marL="342900" indent="-342900">
-              <a:spcAft>
-                <a:spcPts val="400"/>
-              </a:spcAft>
-              <a:buSzPct val="100000"/>
-              <a:buChar char="•"/>
-            </a:pPr>
-            <a:r>
-              <a:rPr lang="en-US" sz="1100" dirty="0">
-                <a:solidFill>
-                  <a:schemeClr val="tx1"/>
-                </a:solidFill>
-              </a:rPr>
-              <a:t>Mapa de empresas por CEP</a:t>
-            </a:r>
-            <a:endParaRPr lang="en-US" sz="1100" dirty="0"/>
-          </a:p>
-          <a:p>
-            <a:pPr marL="342900" indent="-342900">
-              <a:spcAft>
-                <a:spcPts val="400"/>
-              </a:spcAft>
-              <a:buSzPct val="100000"/>
-              <a:buChar char="•"/>
-            </a:pPr>
-            <a:r>
-              <a:rPr lang="en-US" sz="1100" dirty="0">
-                <a:solidFill>
-                  <a:schemeClr val="tx1"/>
-                </a:solidFill>
-              </a:rPr>
-              <a:t>Testes e organização do código</a:t>
-            </a:r>
-            <a:endParaRPr lang="en-US" sz="1100" dirty="0"/>
-          </a:p>
-        </p:txBody>
-      </p:sp>
-      <p:sp>
-        <p:nvSpPr>
-          <p:cNvPr id="18" name="Fase 3 (marco)"/>
-          <p:cNvSpPr/>
-          <p:nvPr/>
-        </p:nvSpPr>
-        <p:spPr>
-          <a:xfrm>
-            <a:off x="5468112" y="1536192"/>
-            <a:ext cx="310896" cy="310896"/>
-          </a:xfrm>
-          <a:prstGeom prst="ellipse">
-            <a:avLst/>
-          </a:prstGeom>
-          <a:solidFill>
-            <a:schemeClr val="accent4"/>
-          </a:solidFill>
-          <a:ln w="25400">
-            <a:solidFill>
-              <a:schemeClr val="bg1"/>
-            </a:solidFill>
-            <a:prstDash val="solid"/>
-          </a:ln>
-        </p:spPr>
-      </p:sp>
-      <p:sp>
-        <p:nvSpPr>
-          <p:cNvPr id="19" name="Fase 3 (período)"/>
-          <p:cNvSpPr txBox="1"/>
-          <p:nvPr/>
-        </p:nvSpPr>
-        <p:spPr>
-          <a:xfrm>
-            <a:off x="4663440" y="1051560"/>
-            <a:ext cx="1920240" cy="320040"/>
-          </a:xfrm>
-          <a:prstGeom prst="rect">
-            <a:avLst/>
-          </a:prstGeom>
-          <a:noFill/>
-          <a:ln/>
-        </p:spPr>
-        <p:txBody>
-          <a:bodyPr wrap="square" lIns="0" tIns="0" rIns="0" bIns="0" rtlCol="0" anchor="t"/>
-          <a:lstStyle/>
-          <a:p>
-            <a:pPr algn="ctr" indent="0" marL="0">
-              <a:buNone/>
-            </a:pPr>
-            <a:r>
-              <a:rPr lang="en-US" sz="1100" b="1" dirty="0">
-                <a:solidFill>
-                  <a:schemeClr val="accent6"/>
-                </a:solidFill>
-              </a:rPr>
-              <a:t>Fase 3 · 1º tri/2027</a:t>
-            </a:r>
-            <a:endParaRPr lang="en-US" sz="1100" dirty="0"/>
-          </a:p>
-        </p:txBody>
-      </p:sp>
-      <p:sp>
-        <p:nvSpPr>
-          <p:cNvPr id="20" name="Fase 3 (cartão)"/>
-          <p:cNvSpPr/>
-          <p:nvPr/>
-        </p:nvSpPr>
-        <p:spPr>
-          <a:xfrm>
-            <a:off x="4663440" y="2057400"/>
-            <a:ext cx="1920240" cy="2468880"/>
-          </a:xfrm>
-          <a:prstGeom prst="roundRect">
-            <a:avLst>
-              <a:gd name="adj" fmla="val 5714"/>
-            </a:avLst>
-          </a:prstGeom>
-          <a:solidFill>
-            <a:schemeClr val="bg2"/>
-          </a:solidFill>
-          <a:ln/>
-          <a:effectLst>
-            <a:outerShdw sx="100000" sy="100000" kx="0" ky="0" algn="bl" rotWithShape="0" blurRad="76200" dist="25400" dir="5400000">
-              <a:srgbClr val="0F1E3D">
-                <a:alpha val="12000"/>
-              </a:srgbClr>
-            </a:outerShdw>
-          </a:effectLst>
-        </p:spPr>
-      </p:sp>
-      <p:sp>
-        <p:nvSpPr>
-          <p:cNvPr id="21" name="Fase 3 (nome)"/>
-          <p:cNvSpPr txBox="1"/>
-          <p:nvPr/>
-        </p:nvSpPr>
-        <p:spPr>
-          <a:xfrm>
-            <a:off x="4828032" y="2176272"/>
-            <a:ext cx="1645920" cy="365760"/>
-          </a:xfrm>
-          <a:prstGeom prst="rect">
-            <a:avLst/>
-          </a:prstGeom>
-          <a:noFill/>
-          <a:ln/>
-        </p:spPr>
-        <p:txBody>
-          <a:bodyPr wrap="square" lIns="0" tIns="0" rIns="0" bIns="0" rtlCol="0" anchor="t"/>
-          <a:lstStyle/>
-          <a:p>
-            <a:pPr indent="0" marL="0">
-              <a:buNone/>
-            </a:pPr>
-            <a:r>
-              <a:rPr lang="en-US" sz="1600" b="1" dirty="0">
-                <a:solidFill>
-                  <a:schemeClr val="tx2"/>
-                </a:solidFill>
-              </a:rPr>
-              <a:t>Expansão</a:t>
-            </a:r>
-            <a:endParaRPr lang="en-US" sz="1600" dirty="0"/>
-          </a:p>
-        </p:txBody>
-      </p:sp>
-      <p:sp>
-        <p:nvSpPr>
-          <p:cNvPr id="22" name="Fase 3 (status, fundo)"/>
-          <p:cNvSpPr/>
-          <p:nvPr/>
-        </p:nvSpPr>
-        <p:spPr>
-          <a:xfrm>
-            <a:off x="4828032" y="2578608"/>
-            <a:ext cx="1143000" cy="274320"/>
-          </a:xfrm>
-          <a:prstGeom prst="roundRect">
-            <a:avLst>
-              <a:gd name="adj" fmla="val 26667"/>
-            </a:avLst>
-          </a:prstGeom>
-          <a:solidFill>
-            <a:schemeClr val="accent4"/>
-          </a:solidFill>
-          <a:ln/>
-        </p:spPr>
-      </p:sp>
-      <p:sp>
-        <p:nvSpPr>
-          <p:cNvPr id="23" name="Fase 3 (status)"/>
-          <p:cNvSpPr txBox="1"/>
-          <p:nvPr/>
-        </p:nvSpPr>
-        <p:spPr>
-          <a:xfrm>
-            <a:off x="4828032" y="2578608"/>
-            <a:ext cx="1143000" cy="274320"/>
-          </a:xfrm>
-          <a:prstGeom prst="rect">
-            <a:avLst/>
-          </a:prstGeom>
-          <a:noFill/>
-          <a:ln/>
-        </p:spPr>
-        <p:txBody>
-          <a:bodyPr wrap="square" lIns="0" tIns="0" rIns="0" bIns="0" rtlCol="0" anchor="ctr"/>
-          <a:lstStyle/>
-          <a:p>
-            <a:pPr algn="ctr" indent="0" marL="0">
-              <a:buNone/>
-            </a:pPr>
-            <a:r>
-              <a:rPr lang="en-US" sz="1000" b="1" dirty="0">
-                <a:solidFill>
-                  <a:schemeClr val="bg1"/>
-                </a:solidFill>
-              </a:rPr>
-              <a:t>Planejada</a:t>
-            </a:r>
-            <a:endParaRPr lang="en-US" sz="1000" dirty="0"/>
-          </a:p>
-        </p:txBody>
-      </p:sp>
-      <p:sp>
-        <p:nvSpPr>
-          <p:cNvPr id="24" name="Fase 3 (entregas)"/>
-          <p:cNvSpPr txBox="1"/>
-          <p:nvPr/>
-        </p:nvSpPr>
-        <p:spPr>
-          <a:xfrm>
-            <a:off x="4773168" y="2971800"/>
-            <a:ext cx="1737360" cy="1463040"/>
-          </a:xfrm>
-          <a:prstGeom prst="rect">
-            <a:avLst/>
-          </a:prstGeom>
-          <a:noFill/>
-          <a:ln/>
-        </p:spPr>
-        <p:txBody>
-          <a:bodyPr wrap="square" lIns="0" tIns="0" rIns="0" bIns="0" rtlCol="0" anchor="t"/>
-          <a:lstStyle/>
-          <a:p>
-            <a:pPr marL="342900" indent="-342900">
-              <a:spcAft>
-                <a:spcPts val="400"/>
-              </a:spcAft>
-              <a:buSzPct val="100000"/>
-              <a:buChar char="•"/>
-            </a:pPr>
-            <a:r>
-              <a:rPr lang="en-US" sz="1100" dirty="0">
-                <a:solidFill>
-                  <a:schemeClr val="tx1"/>
-                </a:solidFill>
-              </a:rPr>
-              <a:t>WhatsApp e campanhas</a:t>
-            </a:r>
-            <a:endParaRPr lang="en-US" sz="1100" dirty="0"/>
-          </a:p>
-          <a:p>
-            <a:pPr marL="342900" indent="-342900">
-              <a:spcAft>
-                <a:spcPts val="400"/>
-              </a:spcAft>
-              <a:buSzPct val="100000"/>
-              <a:buChar char="•"/>
-            </a:pPr>
-            <a:r>
-              <a:rPr lang="en-US" sz="1100" dirty="0">
-                <a:solidFill>
-                  <a:schemeClr val="tx1"/>
-                </a:solidFill>
-              </a:rPr>
-              <a:t>Novos relatórios automáticos</a:t>
-            </a:r>
-            <a:endParaRPr lang="en-US" sz="1100" dirty="0"/>
-          </a:p>
-          <a:p>
-            <a:pPr marL="342900" indent="-342900">
-              <a:spcAft>
-                <a:spcPts val="400"/>
-              </a:spcAft>
-              <a:buSzPct val="100000"/>
-              <a:buChar char="•"/>
-            </a:pPr>
-            <a:r>
-              <a:rPr lang="en-US" sz="1100" dirty="0">
-                <a:solidFill>
-                  <a:schemeClr val="tx1"/>
-                </a:solidFill>
-              </a:rPr>
-              <a:t>Treinamento das áreas</a:t>
-            </a:r>
-            <a:endParaRPr lang="en-US" sz="1100" dirty="0"/>
-          </a:p>
-        </p:txBody>
-      </p:sp>
-      <p:sp>
-        <p:nvSpPr>
-          <p:cNvPr id="25" name="Fase 4 (marco)"/>
-          <p:cNvSpPr/>
-          <p:nvPr/>
-        </p:nvSpPr>
-        <p:spPr>
-          <a:xfrm>
-            <a:off x="7571232" y="1536192"/>
-            <a:ext cx="310896" cy="310896"/>
-          </a:xfrm>
-          <a:prstGeom prst="ellipse">
-            <a:avLst/>
-          </a:prstGeom>
-          <a:solidFill>
-            <a:schemeClr val="accent6"/>
-          </a:solidFill>
-          <a:ln w="25400">
-            <a:solidFill>
-              <a:schemeClr val="bg1"/>
-            </a:solidFill>
-            <a:prstDash val="solid"/>
-          </a:ln>
-        </p:spPr>
-      </p:sp>
-      <p:sp>
-        <p:nvSpPr>
-          <p:cNvPr id="26" name="Fase 4 (período)"/>
-          <p:cNvSpPr txBox="1"/>
-          <p:nvPr/>
-        </p:nvSpPr>
-        <p:spPr>
-          <a:xfrm>
-            <a:off x="6766560" y="1051560"/>
-            <a:ext cx="1920240" cy="320040"/>
-          </a:xfrm>
-          <a:prstGeom prst="rect">
-            <a:avLst/>
-          </a:prstGeom>
-          <a:noFill/>
-          <a:ln/>
-        </p:spPr>
-        <p:txBody>
-          <a:bodyPr wrap="square" lIns="0" tIns="0" rIns="0" bIns="0" rtlCol="0" anchor="t"/>
-          <a:lstStyle/>
-          <a:p>
-            <a:pPr algn="ctr" indent="0" marL="0">
-              <a:buNone/>
-            </a:pPr>
-            <a:r>
-              <a:rPr lang="en-US" sz="1100" b="1" dirty="0">
-                <a:solidFill>
-                  <a:schemeClr val="accent6"/>
-                </a:solidFill>
-              </a:rPr>
-              <a:t>Fase 4 · 2º tri/2027</a:t>
-            </a:r>
-            <a:endParaRPr lang="en-US" sz="1100" dirty="0"/>
-          </a:p>
-        </p:txBody>
-      </p:sp>
-      <p:sp>
-        <p:nvSpPr>
-          <p:cNvPr id="27" name="Fase 4 (cartão)"/>
-          <p:cNvSpPr/>
-          <p:nvPr/>
-        </p:nvSpPr>
-        <p:spPr>
-          <a:xfrm>
-            <a:off x="6766560" y="2057400"/>
-            <a:ext cx="1920240" cy="2468880"/>
-          </a:xfrm>
-          <a:prstGeom prst="roundRect">
-            <a:avLst>
-              <a:gd name="adj" fmla="val 5714"/>
-            </a:avLst>
-          </a:prstGeom>
-          <a:solidFill>
-            <a:schemeClr val="bg2"/>
-          </a:solidFill>
-          <a:ln/>
-          <a:effectLst>
-            <a:outerShdw sx="100000" sy="100000" kx="0" ky="0" algn="bl" rotWithShape="0" blurRad="76200" dist="25400" dir="5400000">
-              <a:srgbClr val="0F1E3D">
-                <a:alpha val="12000"/>
-              </a:srgbClr>
-            </a:outerShdw>
-          </a:effectLst>
-        </p:spPr>
-      </p:sp>
-      <p:sp>
-        <p:nvSpPr>
-          <p:cNvPr id="28" name="Fase 4 (nome)"/>
-          <p:cNvSpPr txBox="1"/>
-          <p:nvPr/>
-        </p:nvSpPr>
-        <p:spPr>
-          <a:xfrm>
-            <a:off x="6931152" y="2176272"/>
-            <a:ext cx="1645920" cy="365760"/>
-          </a:xfrm>
-          <a:prstGeom prst="rect">
-            <a:avLst/>
-          </a:prstGeom>
-          <a:noFill/>
-          <a:ln/>
-        </p:spPr>
-        <p:txBody>
-          <a:bodyPr wrap="square" lIns="0" tIns="0" rIns="0" bIns="0" rtlCol="0" anchor="t"/>
-          <a:lstStyle/>
-          <a:p>
-            <a:pPr indent="0" marL="0">
-              <a:buNone/>
-            </a:pPr>
-            <a:r>
-              <a:rPr lang="en-US" sz="1600" b="1" dirty="0">
-                <a:solidFill>
-                  <a:schemeClr val="tx2"/>
-                </a:solidFill>
-              </a:rPr>
-              <a:t>Escala</a:t>
-            </a:r>
-            <a:endParaRPr lang="en-US" sz="1600" dirty="0"/>
-          </a:p>
-        </p:txBody>
-      </p:sp>
-      <p:sp>
-        <p:nvSpPr>
-          <p:cNvPr id="29" name="Fase 4 (status, fundo)"/>
-          <p:cNvSpPr/>
-          <p:nvPr/>
-        </p:nvSpPr>
-        <p:spPr>
-          <a:xfrm>
-            <a:off x="6931152" y="2578608"/>
-            <a:ext cx="1143000" cy="274320"/>
-          </a:xfrm>
-          <a:prstGeom prst="roundRect">
-            <a:avLst>
-              <a:gd name="adj" fmla="val 26667"/>
-            </a:avLst>
-          </a:prstGeom>
-          <a:solidFill>
-            <a:schemeClr val="accent6"/>
-          </a:solidFill>
-          <a:ln/>
-        </p:spPr>
-      </p:sp>
-      <p:sp>
-        <p:nvSpPr>
-          <p:cNvPr id="30" name="Fase 4 (status)"/>
-          <p:cNvSpPr txBox="1"/>
-          <p:nvPr/>
-        </p:nvSpPr>
-        <p:spPr>
-          <a:xfrm>
-            <a:off x="6931152" y="2578608"/>
-            <a:ext cx="1143000" cy="274320"/>
-          </a:xfrm>
-          <a:prstGeom prst="rect">
-            <a:avLst/>
-          </a:prstGeom>
-          <a:noFill/>
-          <a:ln/>
-        </p:spPr>
-        <p:txBody>
-          <a:bodyPr wrap="square" lIns="0" tIns="0" rIns="0" bIns="0" rtlCol="0" anchor="ctr"/>
-          <a:lstStyle/>
-          <a:p>
-            <a:pPr algn="ctr" indent="0" marL="0">
-              <a:buNone/>
-            </a:pPr>
-            <a:r>
-              <a:rPr lang="en-US" sz="1000" b="1" dirty="0">
-                <a:solidFill>
-                  <a:schemeClr val="bg1"/>
-                </a:solidFill>
-              </a:rPr>
-              <a:t>Planejada</a:t>
-            </a:r>
-            <a:endParaRPr lang="en-US" sz="1000" dirty="0"/>
-          </a:p>
-        </p:txBody>
-      </p:sp>
-      <p:sp>
-        <p:nvSpPr>
-          <p:cNvPr id="31" name="Fase 4 (entregas)"/>
-          <p:cNvSpPr txBox="1"/>
-          <p:nvPr/>
-        </p:nvSpPr>
-        <p:spPr>
-          <a:xfrm>
-            <a:off x="6876288" y="2971800"/>
-            <a:ext cx="1737360" cy="1463040"/>
-          </a:xfrm>
-          <a:prstGeom prst="rect">
-            <a:avLst/>
-          </a:prstGeom>
-          <a:noFill/>
-          <a:ln/>
-        </p:spPr>
-        <p:txBody>
-          <a:bodyPr wrap="square" lIns="0" tIns="0" rIns="0" bIns="0" rtlCol="0" anchor="t"/>
-          <a:lstStyle/>
-          <a:p>
-            <a:pPr marL="342900" indent="-342900">
-              <a:spcAft>
-                <a:spcPts val="400"/>
-              </a:spcAft>
-              <a:buSzPct val="100000"/>
-              <a:buChar char="•"/>
-            </a:pPr>
-            <a:r>
-              <a:rPr lang="en-US" sz="1100" dirty="0">
-                <a:solidFill>
-                  <a:schemeClr val="tx1"/>
-                </a:solidFill>
-              </a:rPr>
-              <a:t>Oferta às CDLs parceiras</a:t>
-            </a:r>
-            <a:endParaRPr lang="en-US" sz="1100" dirty="0"/>
-          </a:p>
-          <a:p>
-            <a:pPr marL="342900" indent="-342900">
-              <a:spcAft>
-                <a:spcPts val="400"/>
-              </a:spcAft>
-              <a:buSzPct val="100000"/>
-              <a:buChar char="•"/>
-            </a:pPr>
-            <a:r>
-              <a:rPr lang="en-US" sz="1100" dirty="0">
-                <a:solidFill>
-                  <a:schemeClr val="tx1"/>
-                </a:solidFill>
-              </a:rPr>
-              <a:t>Planos de consultoria</a:t>
-            </a:r>
-            <a:endParaRPr lang="en-US" sz="1100" dirty="0"/>
-          </a:p>
-          <a:p>
-            <a:pPr marL="342900" indent="-342900">
-              <a:spcAft>
-                <a:spcPts val="400"/>
-              </a:spcAft>
-              <a:buSzPct val="100000"/>
-              <a:buChar char="•"/>
-            </a:pPr>
-            <a:r>
-              <a:rPr lang="en-US" sz="1100" dirty="0">
-                <a:solidFill>
-                  <a:schemeClr val="tx1"/>
-                </a:solidFill>
-              </a:rPr>
-              <a:t>Análises com IA</a:t>
-            </a:r>
-            <a:endParaRPr lang="en-US" sz="1100" dirty="0"/>
-          </a:p>
-        </p:txBody>
-      </p:sp>
-      <p:sp>
-        <p:nvSpPr>
-          <p:cNvPr id="25" name="Slide Number Placeholder 0"/>
-          <p:cNvSpPr>
-            <a:spLocks noGrp="1"/>
-          </p:cNvSpPr>
-          <p:nvPr>
-            <p:ph type="sldNum" sz="quarter" idx="4294967295"/>
-          </p:nvPr>
-        </p:nvSpPr>
-        <p:spPr>
-          <a:xfrm>
-            <a:off x="8321040" y="4773168"/>
-            <a:ext cx="365760" cy="228600"/>
-          </a:xfrm>
-          <a:prstGeom prst="rect">
-            <a:avLst/>
-          </a:prstGeom>
-          <a:extLst>
-            <a:ext uri="{C572A759-6A51-4108-AA02-DFA0A04FC94B}">
-              <ma14:wrappingTextBoxFlag xmlns:ma14="http://schemas.microsoft.com/office/mac/drawingml/2011/main" val="0"/>
-            </a:ext>
-          </a:extLst>
-        </p:spPr>
-        <p:txBody>
-          <a:bodyPr/>
-          <a:lstStyle>
-            <a:lvl1pPr>
-              <a:defRPr sz="900">
-                <a:solidFill>
-                  <a:schemeClr val="accent6"/>
-                </a:solidFill>
-              </a:defRPr>
-            </a:lvl1pPr>
-          </a:lstStyle>
-          <a:p>
-            <a:pPr algn="r"/>
-            <a:fld id="{F7021451-1387-4CA6-816F-3879F97B5CBC}" type="slidenum">
-              <a:rPr b="0" lang="en-US"/>
+              <a:rPr lang="en-US" b="0"/>
               <a:t>8</a:t>
             </a:fld>
             <a:endParaRPr lang="en-US"/>
@@ -10533,9 +10334,11 @@
       <p:sp>
         <p:nvSpPr>
           <p:cNvPr id="2" name="Text 0"/>
-          <p:cNvSpPr/>
+          <p:cNvSpPr>
+            <a:spLocks noGrp="1"/>
+          </p:cNvSpPr>
           <p:nvPr>
-            <p:ph idx="100" type="title" hasCustomPrompt="1"/>
+            <p:ph type="title" idx="100" hasCustomPrompt="1"/>
           </p:nvPr>
         </p:nvSpPr>
         <p:spPr>
@@ -10553,7 +10356,7 @@
           <a:bodyPr wrap="square" lIns="0" tIns="0" rIns="0" bIns="0" rtlCol="0" anchor="ctr"/>
           <a:lstStyle/>
           <a:p>
-            <a:pPr algn="l" indent="0" marL="0">
+            <a:pPr marL="0" indent="0" algn="l">
               <a:buNone/>
             </a:pPr>
             <a:r>
@@ -10584,16 +10387,34 @@
         </p:nvGraphicFramePr>
         <p:xfrm>
           <a:off x="457200" y="1097280"/>
-          <a:ext cx="4206240" cy="914400"/>
+          <a:ext cx="4206240" cy="2688336"/>
         </p:xfrm>
         <a:graphic>
           <a:graphicData uri="http://schemas.openxmlformats.org/drawingml/2006/table">
             <a:tbl>
               <a:tblPr/>
               <a:tblGrid>
-                <a:gridCol w="1371600"/>
-                <a:gridCol w="1691640"/>
-                <a:gridCol w="1143000"/>
+                <a:gridCol w="1371600">
+                  <a:extLst>
+                    <a:ext uri="{9D8B030D-6E8A-4147-A177-3AD203B41FA5}">
+                      <a16:colId xmlns:a16="http://schemas.microsoft.com/office/drawing/2014/main" val="20000"/>
+                    </a:ext>
+                  </a:extLst>
+                </a:gridCol>
+                <a:gridCol w="1691640">
+                  <a:extLst>
+                    <a:ext uri="{9D8B030D-6E8A-4147-A177-3AD203B41FA5}">
+                      <a16:colId xmlns:a16="http://schemas.microsoft.com/office/drawing/2014/main" val="20001"/>
+                    </a:ext>
+                  </a:extLst>
+                </a:gridCol>
+                <a:gridCol w="1143000">
+                  <a:extLst>
+                    <a:ext uri="{9D8B030D-6E8A-4147-A177-3AD203B41FA5}">
+                      <a16:colId xmlns:a16="http://schemas.microsoft.com/office/drawing/2014/main" val="20002"/>
+                    </a:ext>
+                  </a:extLst>
+                </a:gridCol>
               </a:tblGrid>
               <a:tr h="384048">
                 <a:tc>
@@ -10601,7 +10422,7 @@
                     <a:bodyPr/>
                     <a:lstStyle/>
                     <a:p>
-                      <a:pPr algn="l" indent="0" marL="0">
+                      <a:pPr marL="0" indent="0" algn="l">
                         <a:buNone/>
                       </a:pPr>
                       <a:r>
@@ -10615,7 +10436,7 @@
                       <a:endParaRPr lang="en-US" sz="1150" dirty="0"/>
                     </a:p>
                   </a:txBody>
-                  <a:tcPr marL="91440" marR="91440" marT="45720" marB="45720" anchor="ctr">
+                  <a:tcPr anchor="ctr">
                     <a:lnL w="6350" cap="flat" cmpd="sng" algn="ctr">
                       <a:solidFill>
                         <a:srgbClr val="DCE3EE"/>
@@ -10662,7 +10483,7 @@
                     <a:bodyPr/>
                     <a:lstStyle/>
                     <a:p>
-                      <a:pPr algn="l" indent="0" marL="0">
+                      <a:pPr marL="0" indent="0" algn="l">
                         <a:buNone/>
                       </a:pPr>
                       <a:r>
@@ -10676,7 +10497,7 @@
                       <a:endParaRPr lang="en-US" sz="1150" dirty="0"/>
                     </a:p>
                   </a:txBody>
-                  <a:tcPr marL="91440" marR="91440" marT="45720" marB="45720" anchor="ctr">
+                  <a:tcPr anchor="ctr">
                     <a:lnL w="6350" cap="flat" cmpd="sng" algn="ctr">
                       <a:solidFill>
                         <a:srgbClr val="DCE3EE"/>
@@ -10723,7 +10544,7 @@
                     <a:bodyPr/>
                     <a:lstStyle/>
                     <a:p>
-                      <a:pPr algn="r" indent="0" marL="0">
+                      <a:pPr marL="0" indent="0" algn="r">
                         <a:buNone/>
                       </a:pPr>
                       <a:r>
@@ -10737,7 +10558,7 @@
                       <a:endParaRPr lang="en-US" sz="1150" dirty="0"/>
                     </a:p>
                   </a:txBody>
-                  <a:tcPr marL="91440" marR="91440" marT="45720" marB="45720" anchor="ctr">
+                  <a:tcPr anchor="ctr">
                     <a:lnL w="6350" cap="flat" cmpd="sng" algn="ctr">
                       <a:solidFill>
                         <a:srgbClr val="DCE3EE"/>
@@ -10779,6 +10600,11 @@
                     </a:solidFill>
                   </a:tcPr>
                 </a:tc>
+                <a:extLst>
+                  <a:ext uri="{0D108BD9-81ED-4DB2-BD59-A6C34878D82A}">
+                    <a16:rowId xmlns:a16="http://schemas.microsoft.com/office/drawing/2014/main" val="10000"/>
+                  </a:ext>
+                </a:extLst>
               </a:tr>
               <a:tr h="384048">
                 <a:tc>
@@ -10786,7 +10612,7 @@
                     <a:bodyPr/>
                     <a:lstStyle/>
                     <a:p>
-                      <a:pPr indent="0" marL="0">
+                      <a:pPr marL="0" indent="0">
                         <a:buNone/>
                       </a:pPr>
                       <a:r>
@@ -10800,7 +10626,7 @@
                       <a:endParaRPr lang="en-US" sz="1150" dirty="0"/>
                     </a:p>
                   </a:txBody>
-                  <a:tcPr marL="91440" marR="91440" marT="45720" marB="45720" anchor="ctr">
+                  <a:tcPr anchor="ctr">
                     <a:lnL w="6350" cap="flat" cmpd="sng" algn="ctr">
                       <a:solidFill>
                         <a:srgbClr val="DCE3EE"/>
@@ -10847,7 +10673,7 @@
                     <a:bodyPr/>
                     <a:lstStyle/>
                     <a:p>
-                      <a:pPr indent="0" marL="0">
+                      <a:pPr marL="0" indent="0">
                         <a:buNone/>
                       </a:pPr>
                       <a:r>
@@ -10861,7 +10687,7 @@
                       <a:endParaRPr lang="en-US" sz="1150" dirty="0"/>
                     </a:p>
                   </a:txBody>
-                  <a:tcPr marL="91440" marR="91440" marT="45720" marB="45720" anchor="ctr">
+                  <a:tcPr anchor="ctr">
                     <a:lnL w="6350" cap="flat" cmpd="sng" algn="ctr">
                       <a:solidFill>
                         <a:srgbClr val="DCE3EE"/>
@@ -10908,7 +10734,7 @@
                     <a:bodyPr/>
                     <a:lstStyle/>
                     <a:p>
-                      <a:pPr algn="r" indent="0" marL="0">
+                      <a:pPr marL="0" indent="0" algn="r">
                         <a:buNone/>
                       </a:pPr>
                       <a:r>
@@ -10922,7 +10748,7 @@
                       <a:endParaRPr lang="en-US" sz="1150" dirty="0"/>
                     </a:p>
                   </a:txBody>
-                  <a:tcPr marL="91440" marR="91440" marT="45720" marB="45720" anchor="ctr">
+                  <a:tcPr anchor="ctr">
                     <a:lnL w="6350" cap="flat" cmpd="sng" algn="ctr">
                       <a:solidFill>
                         <a:srgbClr val="DCE3EE"/>
@@ -10964,6 +10790,11 @@
                     </a:solidFill>
                   </a:tcPr>
                 </a:tc>
+                <a:extLst>
+                  <a:ext uri="{0D108BD9-81ED-4DB2-BD59-A6C34878D82A}">
+                    <a16:rowId xmlns:a16="http://schemas.microsoft.com/office/drawing/2014/main" val="10001"/>
+                  </a:ext>
+                </a:extLst>
               </a:tr>
               <a:tr h="384048">
                 <a:tc>
@@ -10971,7 +10802,7 @@
                     <a:bodyPr/>
                     <a:lstStyle/>
                     <a:p>
-                      <a:pPr indent="0" marL="0">
+                      <a:pPr marL="0" indent="0">
                         <a:buNone/>
                       </a:pPr>
                       <a:r>
@@ -10985,7 +10816,7 @@
                       <a:endParaRPr lang="en-US" sz="1150" dirty="0"/>
                     </a:p>
                   </a:txBody>
-                  <a:tcPr marL="91440" marR="91440" marT="45720" marB="45720" anchor="ctr">
+                  <a:tcPr anchor="ctr">
                     <a:lnL w="6350" cap="flat" cmpd="sng" algn="ctr">
                       <a:solidFill>
                         <a:srgbClr val="DCE3EE"/>
@@ -11032,7 +10863,7 @@
                     <a:bodyPr/>
                     <a:lstStyle/>
                     <a:p>
-                      <a:pPr indent="0" marL="0">
+                      <a:pPr marL="0" indent="0">
                         <a:buNone/>
                       </a:pPr>
                       <a:r>
@@ -11046,7 +10877,7 @@
                       <a:endParaRPr lang="en-US" sz="1150" dirty="0"/>
                     </a:p>
                   </a:txBody>
-                  <a:tcPr marL="91440" marR="91440" marT="45720" marB="45720" anchor="ctr">
+                  <a:tcPr anchor="ctr">
                     <a:lnL w="6350" cap="flat" cmpd="sng" algn="ctr">
                       <a:solidFill>
                         <a:srgbClr val="DCE3EE"/>
@@ -11093,7 +10924,7 @@
                     <a:bodyPr/>
                     <a:lstStyle/>
                     <a:p>
-                      <a:pPr algn="r" indent="0" marL="0">
+                      <a:pPr marL="0" indent="0" algn="r">
                         <a:buNone/>
                       </a:pPr>
                       <a:r>
@@ -11107,7 +10938,7 @@
                       <a:endParaRPr lang="en-US" sz="1150" dirty="0"/>
                     </a:p>
                   </a:txBody>
-                  <a:tcPr marL="91440" marR="91440" marT="45720" marB="45720" anchor="ctr">
+                  <a:tcPr anchor="ctr">
                     <a:lnL w="6350" cap="flat" cmpd="sng" algn="ctr">
                       <a:solidFill>
                         <a:srgbClr val="DCE3EE"/>
@@ -11149,6 +10980,11 @@
                     </a:solidFill>
                   </a:tcPr>
                 </a:tc>
+                <a:extLst>
+                  <a:ext uri="{0D108BD9-81ED-4DB2-BD59-A6C34878D82A}">
+                    <a16:rowId xmlns:a16="http://schemas.microsoft.com/office/drawing/2014/main" val="10002"/>
+                  </a:ext>
+                </a:extLst>
               </a:tr>
               <a:tr h="384048">
                 <a:tc>
@@ -11156,7 +10992,7 @@
                     <a:bodyPr/>
                     <a:lstStyle/>
                     <a:p>
-                      <a:pPr indent="0" marL="0">
+                      <a:pPr marL="0" indent="0">
                         <a:buNone/>
                       </a:pPr>
                       <a:r>
@@ -11170,7 +11006,7 @@
                       <a:endParaRPr lang="en-US" sz="1150" dirty="0"/>
                     </a:p>
                   </a:txBody>
-                  <a:tcPr marL="91440" marR="91440" marT="45720" marB="45720" anchor="ctr">
+                  <a:tcPr anchor="ctr">
                     <a:lnL w="6350" cap="flat" cmpd="sng" algn="ctr">
                       <a:solidFill>
                         <a:srgbClr val="DCE3EE"/>
@@ -11217,7 +11053,7 @@
                     <a:bodyPr/>
                     <a:lstStyle/>
                     <a:p>
-                      <a:pPr indent="0" marL="0">
+                      <a:pPr marL="0" indent="0">
                         <a:buNone/>
                       </a:pPr>
                       <a:r>
@@ -11231,7 +11067,7 @@
                       <a:endParaRPr lang="en-US" sz="1150" dirty="0"/>
                     </a:p>
                   </a:txBody>
-                  <a:tcPr marL="91440" marR="91440" marT="45720" marB="45720" anchor="ctr">
+                  <a:tcPr anchor="ctr">
                     <a:lnL w="6350" cap="flat" cmpd="sng" algn="ctr">
                       <a:solidFill>
                         <a:srgbClr val="DCE3EE"/>
@@ -11278,7 +11114,7 @@
                     <a:bodyPr/>
                     <a:lstStyle/>
                     <a:p>
-                      <a:pPr algn="r" indent="0" marL="0">
+                      <a:pPr marL="0" indent="0" algn="r">
                         <a:buNone/>
                       </a:pPr>
                       <a:r>
@@ -11292,7 +11128,7 @@
                       <a:endParaRPr lang="en-US" sz="1150" dirty="0"/>
                     </a:p>
                   </a:txBody>
-                  <a:tcPr marL="91440" marR="91440" marT="45720" marB="45720" anchor="ctr">
+                  <a:tcPr anchor="ctr">
                     <a:lnL w="6350" cap="flat" cmpd="sng" algn="ctr">
                       <a:solidFill>
                         <a:srgbClr val="DCE3EE"/>
@@ -11334,6 +11170,11 @@
                     </a:solidFill>
                   </a:tcPr>
                 </a:tc>
+                <a:extLst>
+                  <a:ext uri="{0D108BD9-81ED-4DB2-BD59-A6C34878D82A}">
+                    <a16:rowId xmlns:a16="http://schemas.microsoft.com/office/drawing/2014/main" val="10003"/>
+                  </a:ext>
+                </a:extLst>
               </a:tr>
               <a:tr h="384048">
                 <a:tc>
@@ -11341,7 +11182,7 @@
                     <a:bodyPr/>
                     <a:lstStyle/>
                     <a:p>
-                      <a:pPr indent="0" marL="0">
+                      <a:pPr marL="0" indent="0">
                         <a:buNone/>
                       </a:pPr>
                       <a:r>
@@ -11355,7 +11196,7 @@
                       <a:endParaRPr lang="en-US" sz="1150" dirty="0"/>
                     </a:p>
                   </a:txBody>
-                  <a:tcPr marL="91440" marR="91440" marT="45720" marB="45720" anchor="ctr">
+                  <a:tcPr anchor="ctr">
                     <a:lnL w="6350" cap="flat" cmpd="sng" algn="ctr">
                       <a:solidFill>
                         <a:srgbClr val="DCE3EE"/>
@@ -11402,7 +11243,7 @@
                     <a:bodyPr/>
                     <a:lstStyle/>
                     <a:p>
-                      <a:pPr indent="0" marL="0">
+                      <a:pPr marL="0" indent="0">
                         <a:buNone/>
                       </a:pPr>
                       <a:r>
@@ -11416,7 +11257,7 @@
                       <a:endParaRPr lang="en-US" sz="1150" dirty="0"/>
                     </a:p>
                   </a:txBody>
-                  <a:tcPr marL="91440" marR="91440" marT="45720" marB="45720" anchor="ctr">
+                  <a:tcPr anchor="ctr">
                     <a:lnL w="6350" cap="flat" cmpd="sng" algn="ctr">
                       <a:solidFill>
                         <a:srgbClr val="DCE3EE"/>
@@ -11463,7 +11304,7 @@
                     <a:bodyPr/>
                     <a:lstStyle/>
                     <a:p>
-                      <a:pPr algn="r" indent="0" marL="0">
+                      <a:pPr marL="0" indent="0" algn="r">
                         <a:buNone/>
                       </a:pPr>
                       <a:r>
@@ -11477,7 +11318,7 @@
                       <a:endParaRPr lang="en-US" sz="1150" dirty="0"/>
                     </a:p>
                   </a:txBody>
-                  <a:tcPr marL="91440" marR="91440" marT="45720" marB="45720" anchor="ctr">
+                  <a:tcPr anchor="ctr">
                     <a:lnL w="6350" cap="flat" cmpd="sng" algn="ctr">
                       <a:solidFill>
                         <a:srgbClr val="DCE3EE"/>
@@ -11519,6 +11360,11 @@
                     </a:solidFill>
                   </a:tcPr>
                 </a:tc>
+                <a:extLst>
+                  <a:ext uri="{0D108BD9-81ED-4DB2-BD59-A6C34878D82A}">
+                    <a16:rowId xmlns:a16="http://schemas.microsoft.com/office/drawing/2014/main" val="10004"/>
+                  </a:ext>
+                </a:extLst>
               </a:tr>
               <a:tr h="384048">
                 <a:tc>
@@ -11526,7 +11372,7 @@
                     <a:bodyPr/>
                     <a:lstStyle/>
                     <a:p>
-                      <a:pPr indent="0" marL="0">
+                      <a:pPr marL="0" indent="0">
                         <a:buNone/>
                       </a:pPr>
                       <a:r>
@@ -11540,7 +11386,7 @@
                       <a:endParaRPr lang="en-US" sz="1150" dirty="0"/>
                     </a:p>
                   </a:txBody>
-                  <a:tcPr marL="91440" marR="91440" marT="45720" marB="45720" anchor="ctr">
+                  <a:tcPr anchor="ctr">
                     <a:lnL w="6350" cap="flat" cmpd="sng" algn="ctr">
                       <a:solidFill>
                         <a:srgbClr val="DCE3EE"/>
@@ -11587,7 +11433,7 @@
                     <a:bodyPr/>
                     <a:lstStyle/>
                     <a:p>
-                      <a:pPr indent="0" marL="0">
+                      <a:pPr marL="0" indent="0">
                         <a:buNone/>
                       </a:pPr>
                       <a:r>
@@ -11601,7 +11447,7 @@
                       <a:endParaRPr lang="en-US" sz="1150" dirty="0"/>
                     </a:p>
                   </a:txBody>
-                  <a:tcPr marL="91440" marR="91440" marT="45720" marB="45720" anchor="ctr">
+                  <a:tcPr anchor="ctr">
                     <a:lnL w="6350" cap="flat" cmpd="sng" algn="ctr">
                       <a:solidFill>
                         <a:srgbClr val="DCE3EE"/>
@@ -11648,7 +11494,7 @@
                     <a:bodyPr/>
                     <a:lstStyle/>
                     <a:p>
-                      <a:pPr algn="r" indent="0" marL="0">
+                      <a:pPr marL="0" indent="0" algn="r">
                         <a:buNone/>
                       </a:pPr>
                       <a:r>
@@ -11662,7 +11508,7 @@
                       <a:endParaRPr lang="en-US" sz="1150" dirty="0"/>
                     </a:p>
                   </a:txBody>
-                  <a:tcPr marL="91440" marR="91440" marT="45720" marB="45720" anchor="ctr">
+                  <a:tcPr anchor="ctr">
                     <a:lnL w="6350" cap="flat" cmpd="sng" algn="ctr">
                       <a:solidFill>
                         <a:srgbClr val="DCE3EE"/>
@@ -11704,6 +11550,11 @@
                     </a:solidFill>
                   </a:tcPr>
                 </a:tc>
+                <a:extLst>
+                  <a:ext uri="{0D108BD9-81ED-4DB2-BD59-A6C34878D82A}">
+                    <a16:rowId xmlns:a16="http://schemas.microsoft.com/office/drawing/2014/main" val="10005"/>
+                  </a:ext>
+                </a:extLst>
               </a:tr>
               <a:tr h="384048">
                 <a:tc>
@@ -11711,7 +11562,7 @@
                     <a:bodyPr/>
                     <a:lstStyle/>
                     <a:p>
-                      <a:pPr indent="0" marL="0">
+                      <a:pPr marL="0" indent="0">
                         <a:buNone/>
                       </a:pPr>
                       <a:r>
@@ -11725,7 +11576,7 @@
                       <a:endParaRPr lang="en-US" sz="1150" dirty="0"/>
                     </a:p>
                   </a:txBody>
-                  <a:tcPr marL="91440" marR="91440" marT="45720" marB="45720" anchor="ctr">
+                  <a:tcPr anchor="ctr">
                     <a:lnL w="6350" cap="flat" cmpd="sng" algn="ctr">
                       <a:solidFill>
                         <a:srgbClr val="DCE3EE"/>
@@ -11772,13 +11623,13 @@
                     <a:bodyPr/>
                     <a:lstStyle/>
                     <a:p>
-                      <a:pPr indent="0" marL="0">
+                      <a:pPr marL="0" indent="0">
                         <a:buNone/>
                       </a:pPr>
                       <a:endParaRPr lang="en-US" sz="1150" dirty="0"/>
                     </a:p>
                   </a:txBody>
-                  <a:tcPr marL="91440" marR="91440" marT="45720" marB="45720" anchor="ctr">
+                  <a:tcPr anchor="ctr">
                     <a:lnL w="6350" cap="flat" cmpd="sng" algn="ctr">
                       <a:solidFill>
                         <a:srgbClr val="DCE3EE"/>
@@ -11825,7 +11676,7 @@
                     <a:bodyPr/>
                     <a:lstStyle/>
                     <a:p>
-                      <a:pPr algn="r" indent="0" marL="0">
+                      <a:pPr marL="0" indent="0" algn="r">
                         <a:buNone/>
                       </a:pPr>
                       <a:r>
@@ -11839,7 +11690,7 @@
                       <a:endParaRPr lang="en-US" sz="1150" dirty="0"/>
                     </a:p>
                   </a:txBody>
-                  <a:tcPr marL="91440" marR="91440" marT="45720" marB="45720" anchor="ctr">
+                  <a:tcPr anchor="ctr">
                     <a:lnL w="6350" cap="flat" cmpd="sng" algn="ctr">
                       <a:solidFill>
                         <a:srgbClr val="DCE3EE"/>
@@ -11881,6 +11732,11 @@
                     </a:solidFill>
                   </a:tcPr>
                 </a:tc>
+                <a:extLst>
+                  <a:ext uri="{0D108BD9-81ED-4DB2-BD59-A6C34878D82A}">
+                    <a16:rowId xmlns:a16="http://schemas.microsoft.com/office/drawing/2014/main" val="10006"/>
+                  </a:ext>
+                </a:extLst>
               </a:tr>
             </a:tbl>
           </a:graphicData>
@@ -11888,7 +11744,7 @@
       </p:graphicFrame>
       <p:graphicFrame>
         <p:nvGraphicFramePr>
-          <p:cNvPr id="4" name="Gráfico ponto de equilíbrio" descr=""/>
+          <p:cNvPr id="4" name="Gráfico ponto de equilíbrio"/>
           <p:cNvGraphicFramePr/>
           <p:nvPr/>
         </p:nvGraphicFramePr>
@@ -11896,9 +11752,9 @@
           <a:off x="4937760" y="1051560"/>
           <a:ext cx="3749040" cy="2880360"/>
         </p:xfrm>
-        <a:graphic xmlns:a="http://schemas.openxmlformats.org/drawingml/2006/main">
+        <a:graphic>
           <a:graphicData uri="http://schemas.openxmlformats.org/drawingml/2006/chart">
-            <c:chart xmlns:c="http://schemas.openxmlformats.org/drawingml/2006/chart" r:id="rId1"/>
+            <c:chart xmlns:c="http://schemas.openxmlformats.org/drawingml/2006/chart" xmlns:r="http://schemas.openxmlformats.org/officeDocument/2006/relationships" r:id="rId3"/>
           </a:graphicData>
         </a:graphic>
       </p:graphicFrame>
@@ -11923,7 +11779,7 @@
           <a:bodyPr wrap="square" lIns="0" tIns="0" rIns="0" bIns="0" rtlCol="0" anchor="t"/>
           <a:lstStyle/>
           <a:p>
-            <a:pPr indent="0" marL="0">
+            <a:pPr marL="0" indent="0">
               <a:buNone/>
             </a:pPr>
             <a:r>
@@ -11959,7 +11815,7 @@
           <a:bodyPr wrap="square" lIns="0" tIns="0" rIns="0" bIns="0" rtlCol="0" anchor="t"/>
           <a:lstStyle/>
           <a:p>
-            <a:pPr indent="0" marL="0">
+            <a:pPr marL="0" indent="0">
               <a:buNone/>
             </a:pPr>
             <a:r>
@@ -11994,7 +11850,7 @@
           </a:prstGeom>
           <a:extLst>
             <a:ext uri="{C572A759-6A51-4108-AA02-DFA0A04FC94B}">
-              <ma14:wrappingTextBoxFlag xmlns:ma14="http://schemas.microsoft.com/office/mac/drawingml/2011/main" val="0"/>
+              <ma14:wrappingTextBoxFlag xmlns:ma14="http://schemas.microsoft.com/office/mac/drawingml/2011/main" xmlns="" val="0"/>
             </a:ext>
           </a:extLst>
         </p:spPr>
@@ -12012,7 +11868,7 @@
           <a:p>
             <a:pPr algn="r"/>
             <a:fld id="{F7021451-1387-4CA6-816F-3879F97B5CBC}" type="slidenum">
-              <a:rPr b="0" lang="en-US"/>
+              <a:rPr lang="en-US" b="0"/>
               <a:t>9</a:t>
             </a:fld>
             <a:endParaRPr lang="en-US"/>
@@ -12320,4 +12176,319 @@
     </a:ext>
   </a:extLst>
 </a:theme>
+</file>
+
+<file path=ppt/theme/theme2.xml><?xml version="1.0" encoding="utf-8"?>
+<a:theme xmlns:a="http://schemas.openxmlformats.org/drawingml/2006/main" name="Tema do Office">
+  <a:themeElements>
+    <a:clrScheme name="Office">
+      <a:dk1>
+        <a:sysClr val="windowText" lastClr="000000"/>
+      </a:dk1>
+      <a:lt1>
+        <a:sysClr val="window" lastClr="FFFFFF"/>
+      </a:lt1>
+      <a:dk2>
+        <a:srgbClr val="0E2841"/>
+      </a:dk2>
+      <a:lt2>
+        <a:srgbClr val="E8E8E8"/>
+      </a:lt2>
+      <a:accent1>
+        <a:srgbClr val="156082"/>
+      </a:accent1>
+      <a:accent2>
+        <a:srgbClr val="E97132"/>
+      </a:accent2>
+      <a:accent3>
+        <a:srgbClr val="196B24"/>
+      </a:accent3>
+      <a:accent4>
+        <a:srgbClr val="0F9ED5"/>
+      </a:accent4>
+      <a:accent5>
+        <a:srgbClr val="A02B93"/>
+      </a:accent5>
+      <a:accent6>
+        <a:srgbClr val="4EA72E"/>
+      </a:accent6>
+      <a:hlink>
+        <a:srgbClr val="467886"/>
+      </a:hlink>
+      <a:folHlink>
+        <a:srgbClr val="96607D"/>
+      </a:folHlink>
+    </a:clrScheme>
+    <a:fontScheme name="Office">
+      <a:majorFont>
+        <a:latin typeface="Aptos Display" panose="02110004020202020204"/>
+        <a:ea typeface=""/>
+        <a:cs typeface=""/>
+        <a:font script="Jpan" typeface="游ゴシック Light"/>
+        <a:font script="Hang" typeface="맑은 고딕"/>
+        <a:font script="Hans" typeface="等线 Light"/>
+        <a:font script="Hant" typeface="新細明體"/>
+        <a:font script="Arab" typeface="Times New Roman"/>
+        <a:font script="Hebr" typeface="Times New Roman"/>
+        <a:font script="Thai" typeface="Angsana New"/>
+        <a:font script="Ethi" typeface="Nyala"/>
+        <a:font script="Beng" typeface="Vrinda"/>
+        <a:font script="Gujr" typeface="Shruti"/>
+        <a:font script="Khmr" typeface="MoolBoran"/>
+        <a:font script="Knda" typeface="Tunga"/>
+        <a:font script="Guru" typeface="Raavi"/>
+        <a:font script="Cans" typeface="Euphemia"/>
+        <a:font script="Cher" typeface="Plantagenet Cherokee"/>
+        <a:font script="Yiii" typeface="Microsoft Yi Baiti"/>
+        <a:font script="Tibt" typeface="Microsoft Himalaya"/>
+        <a:font script="Thaa" typeface="MV Boli"/>
+        <a:font script="Deva" typeface="Mangal"/>
+        <a:font script="Telu" typeface="Gautami"/>
+        <a:font script="Taml" typeface="Latha"/>
+        <a:font script="Syrc" typeface="Estrangelo Edessa"/>
+        <a:font script="Orya" typeface="Kalinga"/>
+        <a:font script="Mlym" typeface="Kartika"/>
+        <a:font script="Laoo" typeface="DokChampa"/>
+        <a:font script="Sinh" typeface="Iskoola Pota"/>
+        <a:font script="Mong" typeface="Mongolian Baiti"/>
+        <a:font script="Viet" typeface="Times New Roman"/>
+        <a:font script="Uigh" typeface="Microsoft Uighur"/>
+        <a:font script="Geor" typeface="Sylfaen"/>
+        <a:font script="Armn" typeface="Arial"/>
+        <a:font script="Bugi" typeface="Leelawadee UI"/>
+        <a:font script="Bopo" typeface="Microsoft JhengHei"/>
+        <a:font script="Java" typeface="Javanese Text"/>
+        <a:font script="Lisu" typeface="Segoe UI"/>
+        <a:font script="Mymr" typeface="Myanmar Text"/>
+        <a:font script="Nkoo" typeface="Ebrima"/>
+        <a:font script="Olck" typeface="Nirmala UI"/>
+        <a:font script="Osma" typeface="Ebrima"/>
+        <a:font script="Phag" typeface="Phagspa"/>
+        <a:font script="Syrn" typeface="Estrangelo Edessa"/>
+        <a:font script="Syrj" typeface="Estrangelo Edessa"/>
+        <a:font script="Syre" typeface="Estrangelo Edessa"/>
+        <a:font script="Sora" typeface="Nirmala UI"/>
+        <a:font script="Tale" typeface="Microsoft Tai Le"/>
+        <a:font script="Talu" typeface="Microsoft New Tai Lue"/>
+        <a:font script="Tfng" typeface="Ebrima"/>
+      </a:majorFont>
+      <a:minorFont>
+        <a:latin typeface="Aptos" panose="02110004020202020204"/>
+        <a:ea typeface=""/>
+        <a:cs typeface=""/>
+        <a:font script="Jpan" typeface="游ゴシック"/>
+        <a:font script="Hang" typeface="맑은 고딕"/>
+        <a:font script="Hans" typeface="等线"/>
+        <a:font script="Hant" typeface="新細明體"/>
+        <a:font script="Arab" typeface="Arial"/>
+        <a:font script="Hebr" typeface="Arial"/>
+        <a:font script="Thai" typeface="Cordia New"/>
+        <a:font script="Ethi" typeface="Nyala"/>
+        <a:font script="Beng" typeface="Vrinda"/>
+        <a:font script="Gujr" typeface="Shruti"/>
+        <a:font script="Khmr" typeface="DaunPenh"/>
+        <a:font script="Knda" typeface="Tunga"/>
+        <a:font script="Guru" typeface="Raavi"/>
+        <a:font script="Cans" typeface="Euphemia"/>
+        <a:font script="Cher" typeface="Plantagenet Cherokee"/>
+        <a:font script="Yiii" typeface="Microsoft Yi Baiti"/>
+        <a:font script="Tibt" typeface="Microsoft Himalaya"/>
+        <a:font script="Thaa" typeface="MV Boli"/>
+        <a:font script="Deva" typeface="Mangal"/>
+        <a:font script="Telu" typeface="Gautami"/>
+        <a:font script="Taml" typeface="Latha"/>
+        <a:font script="Syrc" typeface="Estrangelo Edessa"/>
+        <a:font script="Orya" typeface="Kalinga"/>
+        <a:font script="Mlym" typeface="Kartika"/>
+        <a:font script="Laoo" typeface="DokChampa"/>
+        <a:font script="Sinh" typeface="Iskoola Pota"/>
+        <a:font script="Mong" typeface="Mongolian Baiti"/>
+        <a:font script="Viet" typeface="Arial"/>
+        <a:font script="Uigh" typeface="Microsoft Uighur"/>
+        <a:font script="Geor" typeface="Sylfaen"/>
+        <a:font script="Armn" typeface="Arial"/>
+        <a:font script="Bugi" typeface="Leelawadee UI"/>
+        <a:font script="Bopo" typeface="Microsoft JhengHei"/>
+        <a:font script="Java" typeface="Javanese Text"/>
+        <a:font script="Lisu" typeface="Segoe UI"/>
+        <a:font script="Mymr" typeface="Myanmar Text"/>
+        <a:font script="Nkoo" typeface="Ebrima"/>
+        <a:font script="Olck" typeface="Nirmala UI"/>
+        <a:font script="Osma" typeface="Ebrima"/>
+        <a:font script="Phag" typeface="Phagspa"/>
+        <a:font script="Syrn" typeface="Estrangelo Edessa"/>
+        <a:font script="Syrj" typeface="Estrangelo Edessa"/>
+        <a:font script="Syre" typeface="Estrangelo Edessa"/>
+        <a:font script="Sora" typeface="Nirmala UI"/>
+        <a:font script="Tale" typeface="Microsoft Tai Le"/>
+        <a:font script="Talu" typeface="Microsoft New Tai Lue"/>
+        <a:font script="Tfng" typeface="Ebrima"/>
+      </a:minorFont>
+    </a:fontScheme>
+    <a:fmtScheme name="Office">
+      <a:fillStyleLst>
+        <a:solidFill>
+          <a:schemeClr val="phClr"/>
+        </a:solidFill>
+        <a:gradFill rotWithShape="1">
+          <a:gsLst>
+            <a:gs pos="0">
+              <a:schemeClr val="phClr">
+                <a:lumMod val="110000"/>
+                <a:satMod val="105000"/>
+                <a:tint val="67000"/>
+              </a:schemeClr>
+            </a:gs>
+            <a:gs pos="50000">
+              <a:schemeClr val="phClr">
+                <a:lumMod val="105000"/>
+                <a:satMod val="103000"/>
+                <a:tint val="73000"/>
+              </a:schemeClr>
+            </a:gs>
+            <a:gs pos="100000">
+              <a:schemeClr val="phClr">
+                <a:lumMod val="105000"/>
+                <a:satMod val="109000"/>
+                <a:tint val="81000"/>
+              </a:schemeClr>
+            </a:gs>
+          </a:gsLst>
+          <a:lin ang="5400000" scaled="0"/>
+        </a:gradFill>
+        <a:gradFill rotWithShape="1">
+          <a:gsLst>
+            <a:gs pos="0">
+              <a:schemeClr val="phClr">
+                <a:satMod val="103000"/>
+                <a:lumMod val="102000"/>
+                <a:tint val="94000"/>
+              </a:schemeClr>
+            </a:gs>
+            <a:gs pos="50000">
+              <a:schemeClr val="phClr">
+                <a:satMod val="110000"/>
+                <a:lumMod val="100000"/>
+                <a:shade val="100000"/>
+              </a:schemeClr>
+            </a:gs>
+            <a:gs pos="100000">
+              <a:schemeClr val="phClr">
+                <a:lumMod val="99000"/>
+                <a:satMod val="120000"/>
+                <a:shade val="78000"/>
+              </a:schemeClr>
+            </a:gs>
+          </a:gsLst>
+          <a:lin ang="5400000" scaled="0"/>
+        </a:gradFill>
+      </a:fillStyleLst>
+      <a:lnStyleLst>
+        <a:ln w="12700" cap="flat" cmpd="sng" algn="ctr">
+          <a:solidFill>
+            <a:schemeClr val="phClr"/>
+          </a:solidFill>
+          <a:prstDash val="solid"/>
+          <a:miter lim="800000"/>
+        </a:ln>
+        <a:ln w="19050" cap="flat" cmpd="sng" algn="ctr">
+          <a:solidFill>
+            <a:schemeClr val="phClr"/>
+          </a:solidFill>
+          <a:prstDash val="solid"/>
+          <a:miter lim="800000"/>
+        </a:ln>
+        <a:ln w="25400" cap="flat" cmpd="sng" algn="ctr">
+          <a:solidFill>
+            <a:schemeClr val="phClr"/>
+          </a:solidFill>
+          <a:prstDash val="solid"/>
+          <a:miter lim="800000"/>
+        </a:ln>
+      </a:lnStyleLst>
+      <a:effectStyleLst>
+        <a:effectStyle>
+          <a:effectLst/>
+        </a:effectStyle>
+        <a:effectStyle>
+          <a:effectLst/>
+        </a:effectStyle>
+        <a:effectStyle>
+          <a:effectLst>
+            <a:outerShdw blurRad="57150" dist="19050" dir="5400000" algn="ctr" rotWithShape="0">
+              <a:srgbClr val="000000">
+                <a:alpha val="63000"/>
+              </a:srgbClr>
+            </a:outerShdw>
+          </a:effectLst>
+        </a:effectStyle>
+      </a:effectStyleLst>
+      <a:bgFillStyleLst>
+        <a:solidFill>
+          <a:schemeClr val="phClr"/>
+        </a:solidFill>
+        <a:solidFill>
+          <a:schemeClr val="phClr">
+            <a:tint val="95000"/>
+            <a:satMod val="170000"/>
+          </a:schemeClr>
+        </a:solidFill>
+        <a:gradFill rotWithShape="1">
+          <a:gsLst>
+            <a:gs pos="0">
+              <a:schemeClr val="phClr">
+                <a:tint val="93000"/>
+                <a:satMod val="150000"/>
+                <a:shade val="98000"/>
+                <a:lumMod val="102000"/>
+              </a:schemeClr>
+            </a:gs>
+            <a:gs pos="50000">
+              <a:schemeClr val="phClr">
+                <a:tint val="98000"/>
+                <a:satMod val="130000"/>
+                <a:shade val="90000"/>
+                <a:lumMod val="103000"/>
+              </a:schemeClr>
+            </a:gs>
+            <a:gs pos="100000">
+              <a:schemeClr val="phClr">
+                <a:shade val="63000"/>
+                <a:satMod val="120000"/>
+              </a:schemeClr>
+            </a:gs>
+          </a:gsLst>
+          <a:lin ang="5400000" scaled="0"/>
+        </a:gradFill>
+      </a:bgFillStyleLst>
+    </a:fmtScheme>
+  </a:themeElements>
+  <a:objectDefaults>
+    <a:lnDef>
+      <a:spPr/>
+      <a:bodyPr/>
+      <a:lstStyle/>
+      <a:style>
+        <a:lnRef idx="2">
+          <a:schemeClr val="accent1"/>
+        </a:lnRef>
+        <a:fillRef idx="0">
+          <a:schemeClr val="accent1"/>
+        </a:fillRef>
+        <a:effectRef idx="1">
+          <a:schemeClr val="accent1"/>
+        </a:effectRef>
+        <a:fontRef idx="minor">
+          <a:schemeClr val="tx1"/>
+        </a:fontRef>
+      </a:style>
+    </a:lnDef>
+  </a:objectDefaults>
+  <a:extraClrSchemeLst/>
+  <a:extLst>
+    <a:ext uri="{05A4C25C-085E-4340-85A3-A5531E510DB2}">
+      <thm15:themeFamily xmlns:thm15="http://schemas.microsoft.com/office/thememl/2012/main" name="Office Theme" id="{2E142A2C-CD16-42D6-873A-C26D2A0506FA}" vid="{1BDDFF52-6CD6-40A5-AB3C-68EB2F1E4D0A}"/>
+    </a:ext>
+  </a:extLst>
+</a:theme>
 </file>